--- a/home-made-diagrams/16.3 homebrew-diagrams.pptx
+++ b/home-made-diagrams/16.3 homebrew-diagrams.pptx
@@ -7,6 +7,7 @@
   <p:sldIdLst>
     <p:sldId id="256" r:id="rId2"/>
     <p:sldId id="257" r:id="rId3"/>
+    <p:sldId id="258" r:id="rId4"/>
   </p:sldIdLst>
   <p:sldSz cx="12192000" cy="6858000"/>
   <p:notesSz cx="6858000" cy="9144000"/>
@@ -3373,8 +3374,8 @@
         </p:nvSpPr>
         <p:spPr>
           <a:xfrm>
-            <a:off x="1828800" y="1190625"/>
-            <a:ext cx="2724150" cy="2724150"/>
+            <a:off x="1243886" y="1269185"/>
+            <a:ext cx="1615806" cy="1615806"/>
           </a:xfrm>
           <a:prstGeom prst="ellipse">
             <a:avLst/>
@@ -3425,8 +3426,8 @@
         </p:nvSpPr>
         <p:spPr>
           <a:xfrm>
-            <a:off x="4733925" y="1190625"/>
-            <a:ext cx="2724150" cy="2724150"/>
+            <a:off x="3815556" y="1269185"/>
+            <a:ext cx="1615806" cy="1615806"/>
           </a:xfrm>
           <a:prstGeom prst="ellipse">
             <a:avLst/>
@@ -3477,8 +3478,8 @@
         </p:nvSpPr>
         <p:spPr>
           <a:xfrm>
-            <a:off x="7639050" y="1181100"/>
-            <a:ext cx="2724150" cy="2724150"/>
+            <a:off x="6530862" y="1276102"/>
+            <a:ext cx="1615806" cy="1615806"/>
           </a:xfrm>
           <a:prstGeom prst="ellipse">
             <a:avLst/>
@@ -3529,8 +3530,8 @@
         </p:nvSpPr>
         <p:spPr>
           <a:xfrm>
-            <a:off x="1828800" y="2943225"/>
-            <a:ext cx="2724150" cy="2724150"/>
+            <a:off x="1215771" y="4280584"/>
+            <a:ext cx="1615806" cy="1615806"/>
           </a:xfrm>
           <a:prstGeom prst="ellipse">
             <a:avLst/>
@@ -3584,8 +3585,8 @@
         </p:nvSpPr>
         <p:spPr>
           <a:xfrm>
-            <a:off x="4733925" y="2943225"/>
-            <a:ext cx="2724150" cy="2724150"/>
+            <a:off x="3815555" y="4280584"/>
+            <a:ext cx="1615806" cy="1615806"/>
           </a:xfrm>
           <a:prstGeom prst="ellipse">
             <a:avLst/>
@@ -3639,8 +3640,8 @@
         </p:nvSpPr>
         <p:spPr>
           <a:xfrm>
-            <a:off x="7639050" y="2933700"/>
-            <a:ext cx="2724150" cy="2724150"/>
+            <a:off x="6530862" y="4280584"/>
+            <a:ext cx="1615806" cy="1615806"/>
           </a:xfrm>
           <a:prstGeom prst="ellipse">
             <a:avLst/>
@@ -3694,8 +3695,8 @@
         </p:nvSpPr>
         <p:spPr>
           <a:xfrm>
-            <a:off x="2156745" y="495300"/>
-            <a:ext cx="2068259" cy="461665"/>
+            <a:off x="1444603" y="1594969"/>
+            <a:ext cx="1214371" cy="830997"/>
           </a:xfrm>
           <a:prstGeom prst="rect">
             <a:avLst/>
@@ -3708,9 +3709,24 @@
           </a:bodyPr>
           <a:lstStyle/>
           <a:p>
-            <a:r>
-              <a:rPr lang="en-NZ" sz="2400" dirty="0"/>
-              <a:t>1. Attachment</a:t>
+            <a:pPr algn="ctr"/>
+            <a:r>
+              <a:rPr lang="en-NZ" sz="1600" dirty="0"/>
+              <a:t>1.</a:t>
+            </a:r>
+          </a:p>
+          <a:p>
+            <a:pPr algn="ctr"/>
+            <a:r>
+              <a:rPr lang="en-NZ" sz="1600" dirty="0"/>
+              <a:t>Reversible</a:t>
+            </a:r>
+          </a:p>
+          <a:p>
+            <a:pPr algn="ctr"/>
+            <a:r>
+              <a:rPr lang="en-NZ" sz="1600" dirty="0"/>
+              <a:t>attachment</a:t>
             </a:r>
           </a:p>
         </p:txBody>
@@ -3729,8 +3745,8 @@
         </p:nvSpPr>
         <p:spPr>
           <a:xfrm>
-            <a:off x="5124484" y="495300"/>
-            <a:ext cx="1943032" cy="461665"/>
+            <a:off x="3835230" y="1369202"/>
+            <a:ext cx="1576457" cy="1077218"/>
           </a:xfrm>
           <a:prstGeom prst="rect">
             <a:avLst/>
@@ -3743,9 +3759,31 @@
           </a:bodyPr>
           <a:lstStyle/>
           <a:p>
-            <a:r>
-              <a:rPr lang="en-NZ" sz="2400" dirty="0"/>
-              <a:t>2. Maturation</a:t>
+            <a:pPr algn="ctr"/>
+            <a:r>
+              <a:rPr lang="en-NZ" sz="1600" dirty="0"/>
+              <a:t>2.</a:t>
+            </a:r>
+          </a:p>
+          <a:p>
+            <a:pPr algn="ctr"/>
+            <a:r>
+              <a:rPr lang="en-NZ" sz="1600" dirty="0"/>
+              <a:t>Irreversible</a:t>
+            </a:r>
+          </a:p>
+          <a:p>
+            <a:pPr algn="ctr"/>
+            <a:r>
+              <a:rPr lang="en-NZ" sz="1600" dirty="0"/>
+              <a:t>attachment</a:t>
+            </a:r>
+          </a:p>
+          <a:p>
+            <a:pPr algn="ctr"/>
+            <a:r>
+              <a:rPr lang="en-NZ" sz="1600" dirty="0"/>
+              <a:t>(microcolonies)</a:t>
             </a:r>
           </a:p>
         </p:txBody>
@@ -3764,8 +3802,8 @@
         </p:nvSpPr>
         <p:spPr>
           <a:xfrm>
-            <a:off x="7998831" y="495299"/>
-            <a:ext cx="2004588" cy="461665"/>
+            <a:off x="6764761" y="1718079"/>
+            <a:ext cx="1148007" cy="584775"/>
           </a:xfrm>
           <a:prstGeom prst="rect">
             <a:avLst/>
@@ -3778,9 +3816,561 @@
           </a:bodyPr>
           <a:lstStyle/>
           <a:p>
-            <a:r>
-              <a:rPr lang="en-NZ" sz="2400" dirty="0"/>
-              <a:t>3. Dissipation</a:t>
+            <a:pPr algn="ctr"/>
+            <a:r>
+              <a:rPr lang="en-NZ" sz="1600" dirty="0"/>
+              <a:t>3.</a:t>
+            </a:r>
+          </a:p>
+          <a:p>
+            <a:pPr algn="ctr"/>
+            <a:r>
+              <a:rPr lang="en-NZ" sz="1600" dirty="0"/>
+              <a:t>Maturation</a:t>
+            </a:r>
+          </a:p>
+        </p:txBody>
+      </p:sp>
+      <p:sp>
+        <p:nvSpPr>
+          <p:cNvPr id="2" name="Oval 1">
+            <a:extLst>
+              <a:ext uri="{FF2B5EF4-FFF2-40B4-BE49-F238E27FC236}">
+                <a16:creationId xmlns:a16="http://schemas.microsoft.com/office/drawing/2014/main" id="{3154398F-7386-059A-55DB-A2D0B5D61644}"/>
+              </a:ext>
+            </a:extLst>
+          </p:cNvPr>
+          <p:cNvSpPr/>
+          <p:nvPr/>
+        </p:nvSpPr>
+        <p:spPr>
+          <a:xfrm>
+            <a:off x="9164738" y="1276102"/>
+            <a:ext cx="1615806" cy="1615806"/>
+          </a:xfrm>
+          <a:prstGeom prst="ellipse">
+            <a:avLst/>
+          </a:prstGeom>
+          <a:noFill/>
+          <a:ln w="57150">
+            <a:solidFill>
+              <a:schemeClr val="accent5"/>
+            </a:solidFill>
+          </a:ln>
+        </p:spPr>
+        <p:style>
+          <a:lnRef idx="2">
+            <a:schemeClr val="accent1">
+              <a:shade val="15000"/>
+            </a:schemeClr>
+          </a:lnRef>
+          <a:fillRef idx="1">
+            <a:schemeClr val="accent1"/>
+          </a:fillRef>
+          <a:effectRef idx="0">
+            <a:schemeClr val="accent1"/>
+          </a:effectRef>
+          <a:fontRef idx="minor">
+            <a:schemeClr val="lt1"/>
+          </a:fontRef>
+        </p:style>
+        <p:txBody>
+          <a:bodyPr rtlCol="0" anchor="ctr"/>
+          <a:lstStyle/>
+          <a:p>
+            <a:pPr algn="ctr"/>
+            <a:endParaRPr lang="en-NZ"/>
+          </a:p>
+        </p:txBody>
+      </p:sp>
+      <p:sp>
+        <p:nvSpPr>
+          <p:cNvPr id="3" name="Oval 2">
+            <a:extLst>
+              <a:ext uri="{FF2B5EF4-FFF2-40B4-BE49-F238E27FC236}">
+                <a16:creationId xmlns:a16="http://schemas.microsoft.com/office/drawing/2014/main" id="{CBF97914-B2F8-2055-F760-133A0C50405E}"/>
+              </a:ext>
+            </a:extLst>
+          </p:cNvPr>
+          <p:cNvSpPr/>
+          <p:nvPr/>
+        </p:nvSpPr>
+        <p:spPr>
+          <a:xfrm>
+            <a:off x="9164738" y="4280584"/>
+            <a:ext cx="1615806" cy="1615806"/>
+          </a:xfrm>
+          <a:prstGeom prst="ellipse">
+            <a:avLst/>
+          </a:prstGeom>
+          <a:noFill/>
+          <a:ln w="57150">
+            <a:solidFill>
+              <a:schemeClr val="accent5">
+                <a:lumMod val="40000"/>
+                <a:lumOff val="60000"/>
+              </a:schemeClr>
+            </a:solidFill>
+          </a:ln>
+        </p:spPr>
+        <p:style>
+          <a:lnRef idx="2">
+            <a:schemeClr val="accent1">
+              <a:shade val="15000"/>
+            </a:schemeClr>
+          </a:lnRef>
+          <a:fillRef idx="1">
+            <a:schemeClr val="accent1"/>
+          </a:fillRef>
+          <a:effectRef idx="0">
+            <a:schemeClr val="accent1"/>
+          </a:effectRef>
+          <a:fontRef idx="minor">
+            <a:schemeClr val="lt1"/>
+          </a:fontRef>
+        </p:style>
+        <p:txBody>
+          <a:bodyPr rtlCol="0" anchor="ctr"/>
+          <a:lstStyle/>
+          <a:p>
+            <a:pPr algn="ctr"/>
+            <a:endParaRPr lang="en-NZ"/>
+          </a:p>
+        </p:txBody>
+      </p:sp>
+      <p:sp>
+        <p:nvSpPr>
+          <p:cNvPr id="15" name="TextBox 14">
+            <a:extLst>
+              <a:ext uri="{FF2B5EF4-FFF2-40B4-BE49-F238E27FC236}">
+                <a16:creationId xmlns:a16="http://schemas.microsoft.com/office/drawing/2014/main" id="{5831E1B0-606E-7C5F-E3AB-9675BDDBDDC9}"/>
+              </a:ext>
+            </a:extLst>
+          </p:cNvPr>
+          <p:cNvSpPr txBox="1"/>
+          <p:nvPr/>
+        </p:nvSpPr>
+        <p:spPr>
+          <a:xfrm>
+            <a:off x="9377863" y="1718078"/>
+            <a:ext cx="1189556" cy="584775"/>
+          </a:xfrm>
+          <a:prstGeom prst="rect">
+            <a:avLst/>
+          </a:prstGeom>
+          <a:noFill/>
+        </p:spPr>
+        <p:txBody>
+          <a:bodyPr wrap="none" rtlCol="0">
+            <a:spAutoFit/>
+          </a:bodyPr>
+          <a:lstStyle/>
+          <a:p>
+            <a:pPr algn="ctr"/>
+            <a:r>
+              <a:rPr lang="en-NZ" sz="1600" dirty="0"/>
+              <a:t>4.</a:t>
+            </a:r>
+          </a:p>
+          <a:p>
+            <a:pPr algn="ctr"/>
+            <a:r>
+              <a:rPr lang="en-NZ" sz="1600" dirty="0"/>
+              <a:t>Dissipation</a:t>
+            </a:r>
+          </a:p>
+        </p:txBody>
+      </p:sp>
+      <p:sp>
+        <p:nvSpPr>
+          <p:cNvPr id="17" name="Rectangle: Rounded Corners 16">
+            <a:extLst>
+              <a:ext uri="{FF2B5EF4-FFF2-40B4-BE49-F238E27FC236}">
+                <a16:creationId xmlns:a16="http://schemas.microsoft.com/office/drawing/2014/main" id="{27BE8332-E929-B4C7-8E62-1E8C99299AAA}"/>
+              </a:ext>
+            </a:extLst>
+          </p:cNvPr>
+          <p:cNvSpPr/>
+          <p:nvPr/>
+        </p:nvSpPr>
+        <p:spPr>
+          <a:xfrm>
+            <a:off x="1114792" y="3108102"/>
+            <a:ext cx="9829366" cy="938150"/>
+          </a:xfrm>
+          <a:prstGeom prst="roundRect">
+            <a:avLst/>
+          </a:prstGeom>
+          <a:noFill/>
+          <a:ln w="38100">
+            <a:solidFill>
+              <a:srgbClr val="002060"/>
+            </a:solidFill>
+          </a:ln>
+        </p:spPr>
+        <p:style>
+          <a:lnRef idx="2">
+            <a:schemeClr val="accent1">
+              <a:shade val="15000"/>
+            </a:schemeClr>
+          </a:lnRef>
+          <a:fillRef idx="1">
+            <a:schemeClr val="accent1"/>
+          </a:fillRef>
+          <a:effectRef idx="0">
+            <a:schemeClr val="accent1"/>
+          </a:effectRef>
+          <a:fontRef idx="minor">
+            <a:schemeClr val="lt1"/>
+          </a:fontRef>
+        </p:style>
+        <p:txBody>
+          <a:bodyPr rtlCol="0" anchor="ctr"/>
+          <a:lstStyle/>
+          <a:p>
+            <a:pPr algn="ctr"/>
+            <a:endParaRPr lang="en-NZ"/>
+          </a:p>
+        </p:txBody>
+      </p:sp>
+      <p:sp>
+        <p:nvSpPr>
+          <p:cNvPr id="18" name="TextBox 17">
+            <a:extLst>
+              <a:ext uri="{FF2B5EF4-FFF2-40B4-BE49-F238E27FC236}">
+                <a16:creationId xmlns:a16="http://schemas.microsoft.com/office/drawing/2014/main" id="{940DA1D7-DD7F-EB0D-089C-32B7CDCEF414}"/>
+              </a:ext>
+            </a:extLst>
+          </p:cNvPr>
+          <p:cNvSpPr txBox="1"/>
+          <p:nvPr/>
+        </p:nvSpPr>
+        <p:spPr>
+          <a:xfrm>
+            <a:off x="4894016" y="3392511"/>
+            <a:ext cx="2406556" cy="369332"/>
+          </a:xfrm>
+          <a:prstGeom prst="rect">
+            <a:avLst/>
+          </a:prstGeom>
+          <a:noFill/>
+        </p:spPr>
+        <p:txBody>
+          <a:bodyPr wrap="none" rtlCol="0">
+            <a:spAutoFit/>
+          </a:bodyPr>
+          <a:lstStyle/>
+          <a:p>
+            <a:r>
+              <a:rPr lang="en-NZ" i="1" dirty="0"/>
+              <a:t>c) Unclassified genes?</a:t>
+            </a:r>
+          </a:p>
+        </p:txBody>
+      </p:sp>
+      <p:sp>
+        <p:nvSpPr>
+          <p:cNvPr id="19" name="TextBox 18">
+            <a:extLst>
+              <a:ext uri="{FF2B5EF4-FFF2-40B4-BE49-F238E27FC236}">
+                <a16:creationId xmlns:a16="http://schemas.microsoft.com/office/drawing/2014/main" id="{7C9BAA7D-54CF-703D-86B3-0A9088D1EFC0}"/>
+              </a:ext>
+            </a:extLst>
+          </p:cNvPr>
+          <p:cNvSpPr txBox="1"/>
+          <p:nvPr/>
+        </p:nvSpPr>
+        <p:spPr>
+          <a:xfrm>
+            <a:off x="11332559" y="4794680"/>
+            <a:ext cx="436594" cy="369332"/>
+          </a:xfrm>
+          <a:prstGeom prst="rect">
+            <a:avLst/>
+          </a:prstGeom>
+          <a:noFill/>
+        </p:spPr>
+        <p:txBody>
+          <a:bodyPr wrap="none" rtlCol="0">
+            <a:spAutoFit/>
+          </a:bodyPr>
+          <a:lstStyle/>
+          <a:p>
+            <a:r>
+              <a:rPr lang="en-NZ" i="1" dirty="0"/>
+              <a:t>Pa</a:t>
+            </a:r>
+          </a:p>
+        </p:txBody>
+      </p:sp>
+      <p:sp>
+        <p:nvSpPr>
+          <p:cNvPr id="20" name="TextBox 19">
+            <a:extLst>
+              <a:ext uri="{FF2B5EF4-FFF2-40B4-BE49-F238E27FC236}">
+                <a16:creationId xmlns:a16="http://schemas.microsoft.com/office/drawing/2014/main" id="{D78F9B9A-AF40-A294-E4AC-CA77167CDD35}"/>
+              </a:ext>
+            </a:extLst>
+          </p:cNvPr>
+          <p:cNvSpPr txBox="1"/>
+          <p:nvPr/>
+        </p:nvSpPr>
+        <p:spPr>
+          <a:xfrm>
+            <a:off x="11331213" y="1892422"/>
+            <a:ext cx="437940" cy="369332"/>
+          </a:xfrm>
+          <a:prstGeom prst="rect">
+            <a:avLst/>
+          </a:prstGeom>
+          <a:noFill/>
+        </p:spPr>
+        <p:txBody>
+          <a:bodyPr wrap="none" rtlCol="0">
+            <a:spAutoFit/>
+          </a:bodyPr>
+          <a:lstStyle/>
+          <a:p>
+            <a:r>
+              <a:rPr lang="en-NZ" i="1" dirty="0"/>
+              <a:t>Sa</a:t>
+            </a:r>
+          </a:p>
+        </p:txBody>
+      </p:sp>
+      <p:cxnSp>
+        <p:nvCxnSpPr>
+          <p:cNvPr id="22" name="Straight Arrow Connector 21">
+            <a:extLst>
+              <a:ext uri="{FF2B5EF4-FFF2-40B4-BE49-F238E27FC236}">
+                <a16:creationId xmlns:a16="http://schemas.microsoft.com/office/drawing/2014/main" id="{69066965-29D5-5BB9-DC3F-89EA6661EADD}"/>
+              </a:ext>
+            </a:extLst>
+          </p:cNvPr>
+          <p:cNvCxnSpPr/>
+          <p:nvPr/>
+        </p:nvCxnSpPr>
+        <p:spPr>
+          <a:xfrm>
+            <a:off x="11551789" y="2528226"/>
+            <a:ext cx="0" cy="1817511"/>
+          </a:xfrm>
+          <a:prstGeom prst="straightConnector1">
+            <a:avLst/>
+          </a:prstGeom>
+          <a:ln w="38100">
+            <a:solidFill>
+              <a:srgbClr val="002060"/>
+            </a:solidFill>
+            <a:headEnd type="triangle"/>
+            <a:tailEnd type="triangle"/>
+          </a:ln>
+        </p:spPr>
+        <p:style>
+          <a:lnRef idx="2">
+            <a:schemeClr val="accent1"/>
+          </a:lnRef>
+          <a:fillRef idx="0">
+            <a:schemeClr val="accent1"/>
+          </a:fillRef>
+          <a:effectRef idx="1">
+            <a:schemeClr val="accent1"/>
+          </a:effectRef>
+          <a:fontRef idx="minor">
+            <a:schemeClr val="tx1"/>
+          </a:fontRef>
+        </p:style>
+      </p:cxnSp>
+      <p:sp>
+        <p:nvSpPr>
+          <p:cNvPr id="23" name="TextBox 22">
+            <a:extLst>
+              <a:ext uri="{FF2B5EF4-FFF2-40B4-BE49-F238E27FC236}">
+                <a16:creationId xmlns:a16="http://schemas.microsoft.com/office/drawing/2014/main" id="{7C6049CC-365A-0ED7-541C-6FF1B02E01F9}"/>
+              </a:ext>
+            </a:extLst>
+          </p:cNvPr>
+          <p:cNvSpPr txBox="1"/>
+          <p:nvPr/>
+        </p:nvSpPr>
+        <p:spPr>
+          <a:xfrm rot="5400000">
+            <a:off x="10823260" y="3307810"/>
+            <a:ext cx="2102242" cy="338554"/>
+          </a:xfrm>
+          <a:prstGeom prst="rect">
+            <a:avLst/>
+          </a:prstGeom>
+          <a:noFill/>
+        </p:spPr>
+        <p:txBody>
+          <a:bodyPr wrap="none" rtlCol="0">
+            <a:spAutoFit/>
+          </a:bodyPr>
+          <a:lstStyle/>
+          <a:p>
+            <a:r>
+              <a:rPr lang="en-NZ" sz="1600" i="1" dirty="0"/>
+              <a:t>b) Strain coevolution?</a:t>
+            </a:r>
+          </a:p>
+        </p:txBody>
+      </p:sp>
+      <p:cxnSp>
+        <p:nvCxnSpPr>
+          <p:cNvPr id="24" name="Straight Arrow Connector 23">
+            <a:extLst>
+              <a:ext uri="{FF2B5EF4-FFF2-40B4-BE49-F238E27FC236}">
+                <a16:creationId xmlns:a16="http://schemas.microsoft.com/office/drawing/2014/main" id="{7F013D25-E6E5-CC3F-5E00-033CF0F546AF}"/>
+              </a:ext>
+            </a:extLst>
+          </p:cNvPr>
+          <p:cNvCxnSpPr>
+            <a:cxnSpLocks/>
+          </p:cNvCxnSpPr>
+          <p:nvPr/>
+        </p:nvCxnSpPr>
+        <p:spPr>
+          <a:xfrm flipH="1">
+            <a:off x="1961877" y="6287426"/>
+            <a:ext cx="8141679" cy="0"/>
+          </a:xfrm>
+          <a:prstGeom prst="straightConnector1">
+            <a:avLst/>
+          </a:prstGeom>
+          <a:ln w="38100">
+            <a:solidFill>
+              <a:srgbClr val="002060"/>
+            </a:solidFill>
+            <a:headEnd type="stealth"/>
+            <a:tailEnd type="none"/>
+          </a:ln>
+        </p:spPr>
+        <p:style>
+          <a:lnRef idx="2">
+            <a:schemeClr val="accent1"/>
+          </a:lnRef>
+          <a:fillRef idx="0">
+            <a:schemeClr val="accent1"/>
+          </a:fillRef>
+          <a:effectRef idx="1">
+            <a:schemeClr val="accent1"/>
+          </a:effectRef>
+          <a:fontRef idx="minor">
+            <a:schemeClr val="tx1"/>
+          </a:fontRef>
+        </p:style>
+      </p:cxnSp>
+      <p:sp>
+        <p:nvSpPr>
+          <p:cNvPr id="28" name="TextBox 27">
+            <a:extLst>
+              <a:ext uri="{FF2B5EF4-FFF2-40B4-BE49-F238E27FC236}">
+                <a16:creationId xmlns:a16="http://schemas.microsoft.com/office/drawing/2014/main" id="{EF7FD21F-EADE-4B5B-DC0A-B2D2DC7C6FF2}"/>
+              </a:ext>
+            </a:extLst>
+          </p:cNvPr>
+          <p:cNvSpPr txBox="1"/>
+          <p:nvPr/>
+        </p:nvSpPr>
+        <p:spPr>
+          <a:xfrm>
+            <a:off x="4681965" y="6389057"/>
+            <a:ext cx="2656799" cy="369332"/>
+          </a:xfrm>
+          <a:prstGeom prst="rect">
+            <a:avLst/>
+          </a:prstGeom>
+          <a:noFill/>
+        </p:spPr>
+        <p:txBody>
+          <a:bodyPr wrap="square">
+            <a:spAutoFit/>
+          </a:bodyPr>
+          <a:lstStyle/>
+          <a:p>
+            <a:pPr algn="ctr"/>
+            <a:r>
+              <a:rPr lang="en-NZ" i="1" dirty="0"/>
+              <a:t>a</a:t>
+            </a:r>
+            <a:r>
+              <a:rPr lang="en-NZ" sz="1800" i="1" dirty="0"/>
+              <a:t>) Parallel development?</a:t>
+            </a:r>
+          </a:p>
+        </p:txBody>
+      </p:sp>
+      <p:cxnSp>
+        <p:nvCxnSpPr>
+          <p:cNvPr id="30" name="Straight Connector 29">
+            <a:extLst>
+              <a:ext uri="{FF2B5EF4-FFF2-40B4-BE49-F238E27FC236}">
+                <a16:creationId xmlns:a16="http://schemas.microsoft.com/office/drawing/2014/main" id="{577B4CBF-33AF-078D-895A-AED1F0B7DEF2}"/>
+              </a:ext>
+            </a:extLst>
+          </p:cNvPr>
+          <p:cNvCxnSpPr/>
+          <p:nvPr/>
+        </p:nvCxnSpPr>
+        <p:spPr>
+          <a:xfrm>
+            <a:off x="3352800" y="1010465"/>
+            <a:ext cx="0" cy="4933244"/>
+          </a:xfrm>
+          <a:prstGeom prst="line">
+            <a:avLst/>
+          </a:prstGeom>
+          <a:ln w="38100">
+            <a:prstDash val="sysDot"/>
+          </a:ln>
+        </p:spPr>
+        <p:style>
+          <a:lnRef idx="2">
+            <a:schemeClr val="accent1"/>
+          </a:lnRef>
+          <a:fillRef idx="0">
+            <a:schemeClr val="accent1"/>
+          </a:fillRef>
+          <a:effectRef idx="1">
+            <a:schemeClr val="accent1"/>
+          </a:effectRef>
+          <a:fontRef idx="minor">
+            <a:schemeClr val="tx1"/>
+          </a:fontRef>
+        </p:style>
+      </p:cxnSp>
+      <p:sp>
+        <p:nvSpPr>
+          <p:cNvPr id="31" name="TextBox 30">
+            <a:extLst>
+              <a:ext uri="{FF2B5EF4-FFF2-40B4-BE49-F238E27FC236}">
+                <a16:creationId xmlns:a16="http://schemas.microsoft.com/office/drawing/2014/main" id="{196EA6B5-F415-583D-28DD-358B191C7F30}"/>
+              </a:ext>
+            </a:extLst>
+          </p:cNvPr>
+          <p:cNvSpPr txBox="1"/>
+          <p:nvPr/>
+        </p:nvSpPr>
+        <p:spPr>
+          <a:xfrm>
+            <a:off x="2023674" y="508817"/>
+            <a:ext cx="2644570" cy="369332"/>
+          </a:xfrm>
+          <a:prstGeom prst="rect">
+            <a:avLst/>
+          </a:prstGeom>
+          <a:noFill/>
+        </p:spPr>
+        <p:txBody>
+          <a:bodyPr wrap="none" rtlCol="0">
+            <a:spAutoFit/>
+          </a:bodyPr>
+          <a:lstStyle/>
+          <a:p>
+            <a:r>
+              <a:rPr lang="en-NZ" i="1" dirty="0"/>
+              <a:t>d) Developmental gates?</a:t>
             </a:r>
           </a:p>
         </p:txBody>
@@ -5510,6 +6100,328 @@
     <p:extLst>
       <p:ext uri="{BB962C8B-B14F-4D97-AF65-F5344CB8AC3E}">
         <p14:creationId xmlns:p14="http://schemas.microsoft.com/office/powerpoint/2010/main" val="2578992580"/>
+      </p:ext>
+    </p:extLst>
+  </p:cSld>
+  <p:clrMapOvr>
+    <a:masterClrMapping/>
+  </p:clrMapOvr>
+</p:sld>
+</file>
+
+<file path=ppt/slides/slide3.xml><?xml version="1.0" encoding="utf-8"?>
+<p:sld xmlns:a="http://schemas.openxmlformats.org/drawingml/2006/main" xmlns:r="http://schemas.openxmlformats.org/officeDocument/2006/relationships" xmlns:p="http://schemas.openxmlformats.org/presentationml/2006/main">
+  <p:cSld>
+    <p:spTree>
+      <p:nvGrpSpPr>
+        <p:cNvPr id="1" name=""/>
+        <p:cNvGrpSpPr/>
+        <p:nvPr/>
+      </p:nvGrpSpPr>
+      <p:grpSpPr>
+        <a:xfrm>
+          <a:off x="0" y="0"/>
+          <a:ext cx="0" cy="0"/>
+          <a:chOff x="0" y="0"/>
+          <a:chExt cx="0" cy="0"/>
+        </a:xfrm>
+      </p:grpSpPr>
+      <p:sp>
+        <p:nvSpPr>
+          <p:cNvPr id="2" name="Arrow: Right 1">
+            <a:extLst>
+              <a:ext uri="{FF2B5EF4-FFF2-40B4-BE49-F238E27FC236}">
+                <a16:creationId xmlns:a16="http://schemas.microsoft.com/office/drawing/2014/main" id="{BA1DE30D-CE9A-6C73-19D9-DA55B177DF8C}"/>
+              </a:ext>
+            </a:extLst>
+          </p:cNvPr>
+          <p:cNvSpPr/>
+          <p:nvPr/>
+        </p:nvSpPr>
+        <p:spPr>
+          <a:xfrm rot="16200000">
+            <a:off x="3610146" y="2102606"/>
+            <a:ext cx="2682625" cy="735189"/>
+          </a:xfrm>
+          <a:prstGeom prst="rightArrow">
+            <a:avLst/>
+          </a:prstGeom>
+          <a:gradFill flip="none" rotWithShape="1">
+            <a:gsLst>
+              <a:gs pos="0">
+                <a:srgbClr val="002060"/>
+              </a:gs>
+              <a:gs pos="74000">
+                <a:schemeClr val="accent1">
+                  <a:lumMod val="45000"/>
+                  <a:lumOff val="55000"/>
+                </a:schemeClr>
+              </a:gs>
+              <a:gs pos="83000">
+                <a:schemeClr val="accent1">
+                  <a:lumMod val="45000"/>
+                  <a:lumOff val="55000"/>
+                </a:schemeClr>
+              </a:gs>
+              <a:gs pos="100000">
+                <a:schemeClr val="accent1">
+                  <a:lumMod val="30000"/>
+                  <a:lumOff val="70000"/>
+                </a:schemeClr>
+              </a:gs>
+            </a:gsLst>
+            <a:lin ang="10800000" scaled="1"/>
+            <a:tileRect/>
+          </a:gradFill>
+        </p:spPr>
+        <p:style>
+          <a:lnRef idx="2">
+            <a:schemeClr val="accent1">
+              <a:shade val="15000"/>
+            </a:schemeClr>
+          </a:lnRef>
+          <a:fillRef idx="1">
+            <a:schemeClr val="accent1"/>
+          </a:fillRef>
+          <a:effectRef idx="0">
+            <a:schemeClr val="accent1"/>
+          </a:effectRef>
+          <a:fontRef idx="minor">
+            <a:schemeClr val="lt1"/>
+          </a:fontRef>
+        </p:style>
+        <p:txBody>
+          <a:bodyPr rtlCol="0" anchor="ctr"/>
+          <a:lstStyle/>
+          <a:p>
+            <a:pPr algn="ctr"/>
+            <a:endParaRPr lang="en-NZ"/>
+          </a:p>
+        </p:txBody>
+      </p:sp>
+      <p:sp>
+        <p:nvSpPr>
+          <p:cNvPr id="3" name="TextBox 2">
+            <a:extLst>
+              <a:ext uri="{FF2B5EF4-FFF2-40B4-BE49-F238E27FC236}">
+                <a16:creationId xmlns:a16="http://schemas.microsoft.com/office/drawing/2014/main" id="{CF6C44CB-9B18-7C6C-F594-14E2357BDA83}"/>
+              </a:ext>
+            </a:extLst>
+          </p:cNvPr>
+          <p:cNvSpPr txBox="1"/>
+          <p:nvPr/>
+        </p:nvSpPr>
+        <p:spPr>
+          <a:xfrm>
+            <a:off x="6079914" y="3579292"/>
+            <a:ext cx="2482411" cy="646331"/>
+          </a:xfrm>
+          <a:prstGeom prst="rect">
+            <a:avLst/>
+          </a:prstGeom>
+          <a:noFill/>
+        </p:spPr>
+        <p:txBody>
+          <a:bodyPr wrap="none" rtlCol="0">
+            <a:spAutoFit/>
+          </a:bodyPr>
+          <a:lstStyle/>
+          <a:p>
+            <a:pPr algn="ctr"/>
+            <a:r>
+              <a:rPr lang="en-NZ" b="1" dirty="0"/>
+              <a:t>Evolutionary theory:</a:t>
+            </a:r>
+          </a:p>
+          <a:p>
+            <a:pPr algn="ctr"/>
+            <a:r>
+              <a:rPr lang="en-NZ" b="1" dirty="0"/>
+              <a:t>Extent of co-evolution</a:t>
+            </a:r>
+          </a:p>
+        </p:txBody>
+      </p:sp>
+      <p:sp>
+        <p:nvSpPr>
+          <p:cNvPr id="4" name="TextBox 3">
+            <a:extLst>
+              <a:ext uri="{FF2B5EF4-FFF2-40B4-BE49-F238E27FC236}">
+                <a16:creationId xmlns:a16="http://schemas.microsoft.com/office/drawing/2014/main" id="{EAA15363-E156-D932-2109-C258B1F8F449}"/>
+              </a:ext>
+            </a:extLst>
+          </p:cNvPr>
+          <p:cNvSpPr txBox="1"/>
+          <p:nvPr/>
+        </p:nvSpPr>
+        <p:spPr>
+          <a:xfrm>
+            <a:off x="6242137" y="2192506"/>
+            <a:ext cx="2157963" cy="646331"/>
+          </a:xfrm>
+          <a:prstGeom prst="rect">
+            <a:avLst/>
+          </a:prstGeom>
+          <a:noFill/>
+        </p:spPr>
+        <p:txBody>
+          <a:bodyPr wrap="none" rtlCol="0">
+            <a:spAutoFit/>
+          </a:bodyPr>
+          <a:lstStyle/>
+          <a:p>
+            <a:pPr algn="ctr"/>
+            <a:r>
+              <a:rPr lang="en-NZ" b="1" dirty="0"/>
+              <a:t>Ecological theory:</a:t>
+            </a:r>
+          </a:p>
+          <a:p>
+            <a:pPr algn="ctr"/>
+            <a:r>
+              <a:rPr lang="en-NZ" b="1" dirty="0"/>
+              <a:t>Recognition of Self</a:t>
+            </a:r>
+          </a:p>
+        </p:txBody>
+      </p:sp>
+      <p:sp>
+        <p:nvSpPr>
+          <p:cNvPr id="5" name="TextBox 4">
+            <a:extLst>
+              <a:ext uri="{FF2B5EF4-FFF2-40B4-BE49-F238E27FC236}">
+                <a16:creationId xmlns:a16="http://schemas.microsoft.com/office/drawing/2014/main" id="{8E6D3258-D691-A2F0-7922-4C7F833CC344}"/>
+              </a:ext>
+            </a:extLst>
+          </p:cNvPr>
+          <p:cNvSpPr txBox="1"/>
+          <p:nvPr/>
+        </p:nvSpPr>
+        <p:spPr>
+          <a:xfrm>
+            <a:off x="1954964" y="4639733"/>
+            <a:ext cx="8282075" cy="1200329"/>
+          </a:xfrm>
+          <a:prstGeom prst="rect">
+            <a:avLst/>
+          </a:prstGeom>
+          <a:noFill/>
+        </p:spPr>
+        <p:txBody>
+          <a:bodyPr wrap="none" rtlCol="0">
+            <a:spAutoFit/>
+          </a:bodyPr>
+          <a:lstStyle/>
+          <a:p>
+            <a:pPr algn="ctr"/>
+            <a:r>
+              <a:rPr lang="en-NZ" i="1" dirty="0"/>
+              <a:t>It is not a good idea to use both ecological and evolutionary theory, simultaneously,</a:t>
+            </a:r>
+          </a:p>
+          <a:p>
+            <a:pPr algn="ctr"/>
+            <a:r>
+              <a:rPr lang="en-NZ" i="1" dirty="0"/>
+              <a:t>to predict clinical phenotypes. This could lead to logical confounding.</a:t>
+            </a:r>
+          </a:p>
+          <a:p>
+            <a:pPr algn="ctr"/>
+            <a:endParaRPr lang="en-NZ" i="1" dirty="0"/>
+          </a:p>
+          <a:p>
+            <a:pPr algn="ctr"/>
+            <a:r>
+              <a:rPr lang="en-NZ" i="1" dirty="0"/>
+              <a:t>I want to focus on ecological theory, as it seems underexplored.</a:t>
+            </a:r>
+          </a:p>
+        </p:txBody>
+      </p:sp>
+      <p:sp>
+        <p:nvSpPr>
+          <p:cNvPr id="6" name="TextBox 5">
+            <a:extLst>
+              <a:ext uri="{FF2B5EF4-FFF2-40B4-BE49-F238E27FC236}">
+                <a16:creationId xmlns:a16="http://schemas.microsoft.com/office/drawing/2014/main" id="{8DD44F29-BEEC-1A69-0E0E-F6B2CDA8EA02}"/>
+              </a:ext>
+            </a:extLst>
+          </p:cNvPr>
+          <p:cNvSpPr txBox="1"/>
+          <p:nvPr/>
+        </p:nvSpPr>
+        <p:spPr>
+          <a:xfrm>
+            <a:off x="5952156" y="805721"/>
+            <a:ext cx="2737929" cy="646331"/>
+          </a:xfrm>
+          <a:prstGeom prst="rect">
+            <a:avLst/>
+          </a:prstGeom>
+          <a:noFill/>
+        </p:spPr>
+        <p:txBody>
+          <a:bodyPr wrap="none" rtlCol="0">
+            <a:spAutoFit/>
+          </a:bodyPr>
+          <a:lstStyle/>
+          <a:p>
+            <a:pPr algn="ctr"/>
+            <a:r>
+              <a:rPr lang="en-NZ" b="1" dirty="0"/>
+              <a:t>Molecular microbiology:</a:t>
+            </a:r>
+          </a:p>
+          <a:p>
+            <a:pPr algn="ctr"/>
+            <a:r>
+              <a:rPr lang="en-NZ" b="1" dirty="0"/>
+              <a:t>Biofilm phenotypes</a:t>
+            </a:r>
+          </a:p>
+        </p:txBody>
+      </p:sp>
+      <p:sp>
+        <p:nvSpPr>
+          <p:cNvPr id="7" name="TextBox 6">
+            <a:extLst>
+              <a:ext uri="{FF2B5EF4-FFF2-40B4-BE49-F238E27FC236}">
+                <a16:creationId xmlns:a16="http://schemas.microsoft.com/office/drawing/2014/main" id="{FEFF34A7-9146-08AB-9F2C-587F5A8731DF}"/>
+              </a:ext>
+            </a:extLst>
+          </p:cNvPr>
+          <p:cNvSpPr txBox="1"/>
+          <p:nvPr/>
+        </p:nvSpPr>
+        <p:spPr>
+          <a:xfrm rot="16200000">
+            <a:off x="3480248" y="2331006"/>
+            <a:ext cx="1310359" cy="369332"/>
+          </a:xfrm>
+          <a:prstGeom prst="rect">
+            <a:avLst/>
+          </a:prstGeom>
+          <a:noFill/>
+        </p:spPr>
+        <p:txBody>
+          <a:bodyPr wrap="none" rtlCol="0">
+            <a:spAutoFit/>
+          </a:bodyPr>
+          <a:lstStyle/>
+          <a:p>
+            <a:pPr algn="ctr"/>
+            <a:r>
+              <a:rPr lang="en-NZ" i="1" dirty="0"/>
+              <a:t>Complexity</a:t>
+            </a:r>
+          </a:p>
+        </p:txBody>
+      </p:sp>
+    </p:spTree>
+    <p:extLst>
+      <p:ext uri="{BB962C8B-B14F-4D97-AF65-F5344CB8AC3E}">
+        <p14:creationId xmlns:p14="http://schemas.microsoft.com/office/powerpoint/2010/main" val="1701025199"/>
       </p:ext>
     </p:extLst>
   </p:cSld>

--- a/home-made-diagrams/16.3 homebrew-diagrams.pptx
+++ b/home-made-diagrams/16.3 homebrew-diagrams.pptx
@@ -8,6 +8,7 @@
     <p:sldId id="256" r:id="rId2"/>
     <p:sldId id="257" r:id="rId3"/>
     <p:sldId id="258" r:id="rId4"/>
+    <p:sldId id="259" r:id="rId5"/>
   </p:sldIdLst>
   <p:sldSz cx="12192000" cy="6858000"/>
   <p:notesSz cx="6858000" cy="9144000"/>
@@ -109,7 +110,7 @@
   <p:extLst>
     <p:ext uri="{EFAFB233-063F-42B5-8137-9DF3F51BA10A}">
       <p15:sldGuideLst xmlns:p15="http://schemas.microsoft.com/office/powerpoint/2012/main">
-        <p15:guide id="1" orient="horz" pos="2160" userDrawn="1">
+        <p15:guide id="1" orient="horz" pos="2183" userDrawn="1">
           <p15:clr>
             <a:srgbClr val="A4A3A4"/>
           </p15:clr>
@@ -6422,6 +6423,3616 @@
     <p:extLst>
       <p:ext uri="{BB962C8B-B14F-4D97-AF65-F5344CB8AC3E}">
         <p14:creationId xmlns:p14="http://schemas.microsoft.com/office/powerpoint/2010/main" val="1701025199"/>
+      </p:ext>
+    </p:extLst>
+  </p:cSld>
+  <p:clrMapOvr>
+    <a:masterClrMapping/>
+  </p:clrMapOvr>
+</p:sld>
+</file>
+
+<file path=ppt/slides/slide4.xml><?xml version="1.0" encoding="utf-8"?>
+<p:sld xmlns:a="http://schemas.openxmlformats.org/drawingml/2006/main" xmlns:r="http://schemas.openxmlformats.org/officeDocument/2006/relationships" xmlns:p="http://schemas.openxmlformats.org/presentationml/2006/main">
+  <p:cSld>
+    <p:spTree>
+      <p:nvGrpSpPr>
+        <p:cNvPr id="1" name=""/>
+        <p:cNvGrpSpPr/>
+        <p:nvPr/>
+      </p:nvGrpSpPr>
+      <p:grpSpPr>
+        <a:xfrm>
+          <a:off x="0" y="0"/>
+          <a:ext cx="0" cy="0"/>
+          <a:chOff x="0" y="0"/>
+          <a:chExt cx="0" cy="0"/>
+        </a:xfrm>
+      </p:grpSpPr>
+      <p:sp>
+        <p:nvSpPr>
+          <p:cNvPr id="61" name="Oval 60">
+            <a:extLst>
+              <a:ext uri="{FF2B5EF4-FFF2-40B4-BE49-F238E27FC236}">
+                <a16:creationId xmlns:a16="http://schemas.microsoft.com/office/drawing/2014/main" id="{F455C083-E9C5-5A39-FEA6-68447FC3E7C8}"/>
+              </a:ext>
+            </a:extLst>
+          </p:cNvPr>
+          <p:cNvSpPr/>
+          <p:nvPr/>
+        </p:nvSpPr>
+        <p:spPr>
+          <a:xfrm>
+            <a:off x="9920642" y="1098034"/>
+            <a:ext cx="276225" cy="276225"/>
+          </a:xfrm>
+          <a:prstGeom prst="ellipse">
+            <a:avLst/>
+          </a:prstGeom>
+          <a:solidFill>
+            <a:schemeClr val="accent2">
+              <a:lumMod val="60000"/>
+              <a:lumOff val="40000"/>
+            </a:schemeClr>
+          </a:solidFill>
+        </p:spPr>
+        <p:style>
+          <a:lnRef idx="2">
+            <a:schemeClr val="accent1">
+              <a:shade val="15000"/>
+            </a:schemeClr>
+          </a:lnRef>
+          <a:fillRef idx="1">
+            <a:schemeClr val="accent1"/>
+          </a:fillRef>
+          <a:effectRef idx="0">
+            <a:schemeClr val="accent1"/>
+          </a:effectRef>
+          <a:fontRef idx="minor">
+            <a:schemeClr val="lt1"/>
+          </a:fontRef>
+        </p:style>
+        <p:txBody>
+          <a:bodyPr rtlCol="0" anchor="ctr"/>
+          <a:lstStyle/>
+          <a:p>
+            <a:pPr algn="ctr"/>
+            <a:endParaRPr lang="en-NZ"/>
+          </a:p>
+        </p:txBody>
+      </p:sp>
+      <p:sp>
+        <p:nvSpPr>
+          <p:cNvPr id="62" name="Oval 61">
+            <a:extLst>
+              <a:ext uri="{FF2B5EF4-FFF2-40B4-BE49-F238E27FC236}">
+                <a16:creationId xmlns:a16="http://schemas.microsoft.com/office/drawing/2014/main" id="{9C5B69B0-79DC-F893-4AC1-CC82CFF1B905}"/>
+              </a:ext>
+            </a:extLst>
+          </p:cNvPr>
+          <p:cNvSpPr/>
+          <p:nvPr/>
+        </p:nvSpPr>
+        <p:spPr>
+          <a:xfrm>
+            <a:off x="9920641" y="1675021"/>
+            <a:ext cx="276225" cy="276225"/>
+          </a:xfrm>
+          <a:prstGeom prst="ellipse">
+            <a:avLst/>
+          </a:prstGeom>
+          <a:solidFill>
+            <a:schemeClr val="accent6">
+              <a:lumMod val="20000"/>
+              <a:lumOff val="80000"/>
+            </a:schemeClr>
+          </a:solidFill>
+        </p:spPr>
+        <p:style>
+          <a:lnRef idx="2">
+            <a:schemeClr val="accent1">
+              <a:shade val="15000"/>
+            </a:schemeClr>
+          </a:lnRef>
+          <a:fillRef idx="1">
+            <a:schemeClr val="accent1"/>
+          </a:fillRef>
+          <a:effectRef idx="0">
+            <a:schemeClr val="accent1"/>
+          </a:effectRef>
+          <a:fontRef idx="minor">
+            <a:schemeClr val="lt1"/>
+          </a:fontRef>
+        </p:style>
+        <p:txBody>
+          <a:bodyPr rtlCol="0" anchor="ctr"/>
+          <a:lstStyle/>
+          <a:p>
+            <a:pPr algn="ctr"/>
+            <a:endParaRPr lang="en-NZ"/>
+          </a:p>
+        </p:txBody>
+      </p:sp>
+      <p:sp>
+        <p:nvSpPr>
+          <p:cNvPr id="63" name="TextBox 62">
+            <a:extLst>
+              <a:ext uri="{FF2B5EF4-FFF2-40B4-BE49-F238E27FC236}">
+                <a16:creationId xmlns:a16="http://schemas.microsoft.com/office/drawing/2014/main" id="{320FAC81-A2A9-2509-86BB-CD554D3744F5}"/>
+              </a:ext>
+            </a:extLst>
+          </p:cNvPr>
+          <p:cNvSpPr txBox="1"/>
+          <p:nvPr/>
+        </p:nvSpPr>
+        <p:spPr>
+          <a:xfrm>
+            <a:off x="10382929" y="1643856"/>
+            <a:ext cx="1050288" cy="338554"/>
+          </a:xfrm>
+          <a:prstGeom prst="rect">
+            <a:avLst/>
+          </a:prstGeom>
+          <a:noFill/>
+        </p:spPr>
+        <p:txBody>
+          <a:bodyPr wrap="none" rtlCol="0">
+            <a:spAutoFit/>
+          </a:bodyPr>
+          <a:lstStyle/>
+          <a:p>
+            <a:r>
+              <a:rPr lang="en-NZ" sz="1600" dirty="0"/>
+              <a:t>Product B</a:t>
+            </a:r>
+          </a:p>
+        </p:txBody>
+      </p:sp>
+      <p:sp>
+        <p:nvSpPr>
+          <p:cNvPr id="64" name="TextBox 63">
+            <a:extLst>
+              <a:ext uri="{FF2B5EF4-FFF2-40B4-BE49-F238E27FC236}">
+                <a16:creationId xmlns:a16="http://schemas.microsoft.com/office/drawing/2014/main" id="{5D3C20D5-EF5F-0E68-99D6-10A11C88C752}"/>
+              </a:ext>
+            </a:extLst>
+          </p:cNvPr>
+          <p:cNvSpPr txBox="1"/>
+          <p:nvPr/>
+        </p:nvSpPr>
+        <p:spPr>
+          <a:xfrm>
+            <a:off x="10354936" y="1066869"/>
+            <a:ext cx="1047082" cy="338554"/>
+          </a:xfrm>
+          <a:prstGeom prst="rect">
+            <a:avLst/>
+          </a:prstGeom>
+          <a:noFill/>
+        </p:spPr>
+        <p:txBody>
+          <a:bodyPr wrap="none" rtlCol="0">
+            <a:spAutoFit/>
+          </a:bodyPr>
+          <a:lstStyle/>
+          <a:p>
+            <a:pPr algn="ctr"/>
+            <a:r>
+              <a:rPr lang="en-NZ" sz="1600" dirty="0"/>
+              <a:t>Product A</a:t>
+            </a:r>
+          </a:p>
+        </p:txBody>
+      </p:sp>
+      <p:cxnSp>
+        <p:nvCxnSpPr>
+          <p:cNvPr id="5" name="Straight Connector 4">
+            <a:extLst>
+              <a:ext uri="{FF2B5EF4-FFF2-40B4-BE49-F238E27FC236}">
+                <a16:creationId xmlns:a16="http://schemas.microsoft.com/office/drawing/2014/main" id="{5C4A7EB7-0BC2-AD31-B70D-5FFE9047D5DA}"/>
+              </a:ext>
+            </a:extLst>
+          </p:cNvPr>
+          <p:cNvCxnSpPr>
+            <a:cxnSpLocks/>
+          </p:cNvCxnSpPr>
+          <p:nvPr/>
+        </p:nvCxnSpPr>
+        <p:spPr>
+          <a:xfrm rot="600000">
+            <a:off x="1994712" y="1382292"/>
+            <a:ext cx="1749007" cy="0"/>
+          </a:xfrm>
+          <a:prstGeom prst="line">
+            <a:avLst/>
+          </a:prstGeom>
+          <a:ln w="50800" cap="rnd">
+            <a:solidFill>
+              <a:schemeClr val="accent5">
+                <a:lumMod val="75000"/>
+              </a:schemeClr>
+            </a:solidFill>
+          </a:ln>
+        </p:spPr>
+        <p:style>
+          <a:lnRef idx="2">
+            <a:schemeClr val="accent1"/>
+          </a:lnRef>
+          <a:fillRef idx="0">
+            <a:schemeClr val="accent1"/>
+          </a:fillRef>
+          <a:effectRef idx="1">
+            <a:schemeClr val="accent1"/>
+          </a:effectRef>
+          <a:fontRef idx="minor">
+            <a:schemeClr val="tx1"/>
+          </a:fontRef>
+        </p:style>
+      </p:cxnSp>
+      <p:cxnSp>
+        <p:nvCxnSpPr>
+          <p:cNvPr id="12" name="Straight Connector 11">
+            <a:extLst>
+              <a:ext uri="{FF2B5EF4-FFF2-40B4-BE49-F238E27FC236}">
+                <a16:creationId xmlns:a16="http://schemas.microsoft.com/office/drawing/2014/main" id="{6FE7E5E9-5212-FC58-4BAD-3115B70FD611}"/>
+              </a:ext>
+            </a:extLst>
+          </p:cNvPr>
+          <p:cNvCxnSpPr>
+            <a:cxnSpLocks/>
+          </p:cNvCxnSpPr>
+          <p:nvPr/>
+        </p:nvCxnSpPr>
+        <p:spPr>
+          <a:xfrm rot="21000000">
+            <a:off x="1989738" y="1080771"/>
+            <a:ext cx="1749007" cy="0"/>
+          </a:xfrm>
+          <a:prstGeom prst="line">
+            <a:avLst/>
+          </a:prstGeom>
+          <a:ln w="50800" cap="rnd">
+            <a:solidFill>
+              <a:schemeClr val="accent5">
+                <a:lumMod val="75000"/>
+              </a:schemeClr>
+            </a:solidFill>
+          </a:ln>
+        </p:spPr>
+        <p:style>
+          <a:lnRef idx="2">
+            <a:schemeClr val="accent1"/>
+          </a:lnRef>
+          <a:fillRef idx="0">
+            <a:schemeClr val="accent1"/>
+          </a:fillRef>
+          <a:effectRef idx="1">
+            <a:schemeClr val="accent1"/>
+          </a:effectRef>
+          <a:fontRef idx="minor">
+            <a:schemeClr val="tx1"/>
+          </a:fontRef>
+        </p:style>
+      </p:cxnSp>
+      <p:sp>
+        <p:nvSpPr>
+          <p:cNvPr id="25" name="Rectangle 24">
+            <a:extLst>
+              <a:ext uri="{FF2B5EF4-FFF2-40B4-BE49-F238E27FC236}">
+                <a16:creationId xmlns:a16="http://schemas.microsoft.com/office/drawing/2014/main" id="{ED16E2D6-6AE5-FA3E-3433-26B0C72C5A44}"/>
+              </a:ext>
+            </a:extLst>
+          </p:cNvPr>
+          <p:cNvSpPr/>
+          <p:nvPr/>
+        </p:nvSpPr>
+        <p:spPr>
+          <a:xfrm>
+            <a:off x="3598460" y="801915"/>
+            <a:ext cx="254000" cy="254000"/>
+          </a:xfrm>
+          <a:prstGeom prst="rect">
+            <a:avLst/>
+          </a:prstGeom>
+          <a:solidFill>
+            <a:schemeClr val="accent3">
+              <a:lumMod val="20000"/>
+              <a:lumOff val="80000"/>
+            </a:schemeClr>
+          </a:solidFill>
+        </p:spPr>
+        <p:style>
+          <a:lnRef idx="2">
+            <a:schemeClr val="accent1">
+              <a:shade val="15000"/>
+            </a:schemeClr>
+          </a:lnRef>
+          <a:fillRef idx="1">
+            <a:schemeClr val="accent1"/>
+          </a:fillRef>
+          <a:effectRef idx="0">
+            <a:schemeClr val="accent1"/>
+          </a:effectRef>
+          <a:fontRef idx="minor">
+            <a:schemeClr val="lt1"/>
+          </a:fontRef>
+        </p:style>
+        <p:txBody>
+          <a:bodyPr rtlCol="0" anchor="ctr"/>
+          <a:lstStyle/>
+          <a:p>
+            <a:pPr algn="ctr"/>
+            <a:endParaRPr lang="en-NZ"/>
+          </a:p>
+        </p:txBody>
+      </p:sp>
+      <p:sp>
+        <p:nvSpPr>
+          <p:cNvPr id="26" name="Rectangle 25">
+            <a:extLst>
+              <a:ext uri="{FF2B5EF4-FFF2-40B4-BE49-F238E27FC236}">
+                <a16:creationId xmlns:a16="http://schemas.microsoft.com/office/drawing/2014/main" id="{E4E4CB40-967F-9A8F-30D4-B558C4158CF1}"/>
+              </a:ext>
+            </a:extLst>
+          </p:cNvPr>
+          <p:cNvSpPr/>
+          <p:nvPr/>
+        </p:nvSpPr>
+        <p:spPr>
+          <a:xfrm>
+            <a:off x="3598460" y="1404708"/>
+            <a:ext cx="254000" cy="254000"/>
+          </a:xfrm>
+          <a:prstGeom prst="rect">
+            <a:avLst/>
+          </a:prstGeom>
+          <a:solidFill>
+            <a:schemeClr val="accent3">
+              <a:lumMod val="20000"/>
+              <a:lumOff val="80000"/>
+            </a:schemeClr>
+          </a:solidFill>
+        </p:spPr>
+        <p:style>
+          <a:lnRef idx="2">
+            <a:schemeClr val="accent1">
+              <a:shade val="15000"/>
+            </a:schemeClr>
+          </a:lnRef>
+          <a:fillRef idx="1">
+            <a:schemeClr val="accent1"/>
+          </a:fillRef>
+          <a:effectRef idx="0">
+            <a:schemeClr val="accent1"/>
+          </a:effectRef>
+          <a:fontRef idx="minor">
+            <a:schemeClr val="lt1"/>
+          </a:fontRef>
+        </p:style>
+        <p:txBody>
+          <a:bodyPr rtlCol="0" anchor="ctr"/>
+          <a:lstStyle/>
+          <a:p>
+            <a:pPr algn="ctr"/>
+            <a:endParaRPr lang="en-NZ" dirty="0"/>
+          </a:p>
+        </p:txBody>
+      </p:sp>
+      <p:sp>
+        <p:nvSpPr>
+          <p:cNvPr id="40" name="Pentagon 39">
+            <a:extLst>
+              <a:ext uri="{FF2B5EF4-FFF2-40B4-BE49-F238E27FC236}">
+                <a16:creationId xmlns:a16="http://schemas.microsoft.com/office/drawing/2014/main" id="{FCAB074C-E0C8-ED0B-B5A3-EFEE2FEEEC01}"/>
+              </a:ext>
+            </a:extLst>
+          </p:cNvPr>
+          <p:cNvSpPr/>
+          <p:nvPr/>
+        </p:nvSpPr>
+        <p:spPr>
+          <a:xfrm>
+            <a:off x="1855592" y="1092178"/>
+            <a:ext cx="284913" cy="271346"/>
+          </a:xfrm>
+          <a:prstGeom prst="pentagon">
+            <a:avLst/>
+          </a:prstGeom>
+          <a:solidFill>
+            <a:schemeClr val="accent3">
+              <a:lumMod val="20000"/>
+              <a:lumOff val="80000"/>
+            </a:schemeClr>
+          </a:solidFill>
+        </p:spPr>
+        <p:style>
+          <a:lnRef idx="2">
+            <a:schemeClr val="accent1">
+              <a:shade val="15000"/>
+            </a:schemeClr>
+          </a:lnRef>
+          <a:fillRef idx="1">
+            <a:schemeClr val="accent1"/>
+          </a:fillRef>
+          <a:effectRef idx="0">
+            <a:schemeClr val="accent1"/>
+          </a:effectRef>
+          <a:fontRef idx="minor">
+            <a:schemeClr val="lt1"/>
+          </a:fontRef>
+        </p:style>
+        <p:txBody>
+          <a:bodyPr rtlCol="0" anchor="ctr"/>
+          <a:lstStyle/>
+          <a:p>
+            <a:pPr algn="ctr"/>
+            <a:endParaRPr lang="en-NZ"/>
+          </a:p>
+        </p:txBody>
+      </p:sp>
+      <p:cxnSp>
+        <p:nvCxnSpPr>
+          <p:cNvPr id="67" name="Straight Connector 66">
+            <a:extLst>
+              <a:ext uri="{FF2B5EF4-FFF2-40B4-BE49-F238E27FC236}">
+                <a16:creationId xmlns:a16="http://schemas.microsoft.com/office/drawing/2014/main" id="{3A1EA983-0330-9C42-AA3C-98D333B01258}"/>
+              </a:ext>
+            </a:extLst>
+          </p:cNvPr>
+          <p:cNvCxnSpPr>
+            <a:cxnSpLocks/>
+          </p:cNvCxnSpPr>
+          <p:nvPr/>
+        </p:nvCxnSpPr>
+        <p:spPr>
+          <a:xfrm rot="600000">
+            <a:off x="5153630" y="1382292"/>
+            <a:ext cx="1749007" cy="0"/>
+          </a:xfrm>
+          <a:prstGeom prst="line">
+            <a:avLst/>
+          </a:prstGeom>
+          <a:ln w="50800" cap="rnd">
+            <a:solidFill>
+              <a:schemeClr val="accent5">
+                <a:lumMod val="60000"/>
+                <a:lumOff val="40000"/>
+              </a:schemeClr>
+            </a:solidFill>
+          </a:ln>
+        </p:spPr>
+        <p:style>
+          <a:lnRef idx="2">
+            <a:schemeClr val="accent1"/>
+          </a:lnRef>
+          <a:fillRef idx="0">
+            <a:schemeClr val="accent1"/>
+          </a:fillRef>
+          <a:effectRef idx="1">
+            <a:schemeClr val="accent1"/>
+          </a:effectRef>
+          <a:fontRef idx="minor">
+            <a:schemeClr val="tx1"/>
+          </a:fontRef>
+        </p:style>
+      </p:cxnSp>
+      <p:cxnSp>
+        <p:nvCxnSpPr>
+          <p:cNvPr id="68" name="Straight Connector 67">
+            <a:extLst>
+              <a:ext uri="{FF2B5EF4-FFF2-40B4-BE49-F238E27FC236}">
+                <a16:creationId xmlns:a16="http://schemas.microsoft.com/office/drawing/2014/main" id="{538D9792-5DFD-68CA-8B77-2052E5075D6A}"/>
+              </a:ext>
+            </a:extLst>
+          </p:cNvPr>
+          <p:cNvCxnSpPr>
+            <a:cxnSpLocks/>
+          </p:cNvCxnSpPr>
+          <p:nvPr/>
+        </p:nvCxnSpPr>
+        <p:spPr>
+          <a:xfrm rot="21000000">
+            <a:off x="5148656" y="1080771"/>
+            <a:ext cx="1749007" cy="0"/>
+          </a:xfrm>
+          <a:prstGeom prst="line">
+            <a:avLst/>
+          </a:prstGeom>
+          <a:ln w="50800" cap="rnd">
+            <a:solidFill>
+              <a:schemeClr val="accent5">
+                <a:lumMod val="60000"/>
+                <a:lumOff val="40000"/>
+              </a:schemeClr>
+            </a:solidFill>
+          </a:ln>
+        </p:spPr>
+        <p:style>
+          <a:lnRef idx="2">
+            <a:schemeClr val="accent1"/>
+          </a:lnRef>
+          <a:fillRef idx="0">
+            <a:schemeClr val="accent1"/>
+          </a:fillRef>
+          <a:effectRef idx="1">
+            <a:schemeClr val="accent1"/>
+          </a:effectRef>
+          <a:fontRef idx="minor">
+            <a:schemeClr val="tx1"/>
+          </a:fontRef>
+        </p:style>
+      </p:cxnSp>
+      <p:sp>
+        <p:nvSpPr>
+          <p:cNvPr id="69" name="Rectangle 68">
+            <a:extLst>
+              <a:ext uri="{FF2B5EF4-FFF2-40B4-BE49-F238E27FC236}">
+                <a16:creationId xmlns:a16="http://schemas.microsoft.com/office/drawing/2014/main" id="{C3C9B748-482B-CD5D-DE51-F93C6E56E9F1}"/>
+              </a:ext>
+            </a:extLst>
+          </p:cNvPr>
+          <p:cNvSpPr/>
+          <p:nvPr/>
+        </p:nvSpPr>
+        <p:spPr>
+          <a:xfrm>
+            <a:off x="6757378" y="801915"/>
+            <a:ext cx="254000" cy="254000"/>
+          </a:xfrm>
+          <a:prstGeom prst="rect">
+            <a:avLst/>
+          </a:prstGeom>
+          <a:solidFill>
+            <a:schemeClr val="accent3">
+              <a:lumMod val="20000"/>
+              <a:lumOff val="80000"/>
+            </a:schemeClr>
+          </a:solidFill>
+        </p:spPr>
+        <p:style>
+          <a:lnRef idx="2">
+            <a:schemeClr val="accent1">
+              <a:shade val="15000"/>
+            </a:schemeClr>
+          </a:lnRef>
+          <a:fillRef idx="1">
+            <a:schemeClr val="accent1"/>
+          </a:fillRef>
+          <a:effectRef idx="0">
+            <a:schemeClr val="accent1"/>
+          </a:effectRef>
+          <a:fontRef idx="minor">
+            <a:schemeClr val="lt1"/>
+          </a:fontRef>
+        </p:style>
+        <p:txBody>
+          <a:bodyPr rtlCol="0" anchor="ctr"/>
+          <a:lstStyle/>
+          <a:p>
+            <a:pPr algn="ctr"/>
+            <a:endParaRPr lang="en-NZ"/>
+          </a:p>
+        </p:txBody>
+      </p:sp>
+      <p:sp>
+        <p:nvSpPr>
+          <p:cNvPr id="70" name="Rectangle 69">
+            <a:extLst>
+              <a:ext uri="{FF2B5EF4-FFF2-40B4-BE49-F238E27FC236}">
+                <a16:creationId xmlns:a16="http://schemas.microsoft.com/office/drawing/2014/main" id="{74EC3FE7-B708-E378-D22C-6EA0E0814EA4}"/>
+              </a:ext>
+            </a:extLst>
+          </p:cNvPr>
+          <p:cNvSpPr/>
+          <p:nvPr/>
+        </p:nvSpPr>
+        <p:spPr>
+          <a:xfrm>
+            <a:off x="6757378" y="1404708"/>
+            <a:ext cx="254000" cy="254000"/>
+          </a:xfrm>
+          <a:prstGeom prst="rect">
+            <a:avLst/>
+          </a:prstGeom>
+          <a:solidFill>
+            <a:schemeClr val="accent3">
+              <a:lumMod val="20000"/>
+              <a:lumOff val="80000"/>
+            </a:schemeClr>
+          </a:solidFill>
+        </p:spPr>
+        <p:style>
+          <a:lnRef idx="2">
+            <a:schemeClr val="accent1">
+              <a:shade val="15000"/>
+            </a:schemeClr>
+          </a:lnRef>
+          <a:fillRef idx="1">
+            <a:schemeClr val="accent1"/>
+          </a:fillRef>
+          <a:effectRef idx="0">
+            <a:schemeClr val="accent1"/>
+          </a:effectRef>
+          <a:fontRef idx="minor">
+            <a:schemeClr val="lt1"/>
+          </a:fontRef>
+        </p:style>
+        <p:txBody>
+          <a:bodyPr rtlCol="0" anchor="ctr"/>
+          <a:lstStyle/>
+          <a:p>
+            <a:pPr algn="ctr"/>
+            <a:endParaRPr lang="en-NZ" dirty="0"/>
+          </a:p>
+        </p:txBody>
+      </p:sp>
+      <p:sp>
+        <p:nvSpPr>
+          <p:cNvPr id="71" name="Pentagon 70">
+            <a:extLst>
+              <a:ext uri="{FF2B5EF4-FFF2-40B4-BE49-F238E27FC236}">
+                <a16:creationId xmlns:a16="http://schemas.microsoft.com/office/drawing/2014/main" id="{FD2018DA-C829-6E4F-A83F-C0F0F0A84049}"/>
+              </a:ext>
+            </a:extLst>
+          </p:cNvPr>
+          <p:cNvSpPr/>
+          <p:nvPr/>
+        </p:nvSpPr>
+        <p:spPr>
+          <a:xfrm>
+            <a:off x="5014510" y="1092178"/>
+            <a:ext cx="284913" cy="271346"/>
+          </a:xfrm>
+          <a:prstGeom prst="pentagon">
+            <a:avLst/>
+          </a:prstGeom>
+          <a:solidFill>
+            <a:schemeClr val="accent3">
+              <a:lumMod val="20000"/>
+              <a:lumOff val="80000"/>
+            </a:schemeClr>
+          </a:solidFill>
+        </p:spPr>
+        <p:style>
+          <a:lnRef idx="2">
+            <a:schemeClr val="accent1">
+              <a:shade val="15000"/>
+            </a:schemeClr>
+          </a:lnRef>
+          <a:fillRef idx="1">
+            <a:schemeClr val="accent1"/>
+          </a:fillRef>
+          <a:effectRef idx="0">
+            <a:schemeClr val="accent1"/>
+          </a:effectRef>
+          <a:fontRef idx="minor">
+            <a:schemeClr val="lt1"/>
+          </a:fontRef>
+        </p:style>
+        <p:txBody>
+          <a:bodyPr rtlCol="0" anchor="ctr"/>
+          <a:lstStyle/>
+          <a:p>
+            <a:pPr algn="ctr"/>
+            <a:endParaRPr lang="en-NZ"/>
+          </a:p>
+        </p:txBody>
+      </p:sp>
+      <p:cxnSp>
+        <p:nvCxnSpPr>
+          <p:cNvPr id="74" name="Straight Connector 73">
+            <a:extLst>
+              <a:ext uri="{FF2B5EF4-FFF2-40B4-BE49-F238E27FC236}">
+                <a16:creationId xmlns:a16="http://schemas.microsoft.com/office/drawing/2014/main" id="{2E9AF47F-67FF-078B-AA68-B2AB4DD46B3E}"/>
+              </a:ext>
+            </a:extLst>
+          </p:cNvPr>
+          <p:cNvCxnSpPr>
+            <a:cxnSpLocks/>
+          </p:cNvCxnSpPr>
+          <p:nvPr/>
+        </p:nvCxnSpPr>
+        <p:spPr>
+          <a:xfrm rot="600000">
+            <a:off x="1994712" y="2852380"/>
+            <a:ext cx="1749007" cy="0"/>
+          </a:xfrm>
+          <a:prstGeom prst="line">
+            <a:avLst/>
+          </a:prstGeom>
+          <a:ln w="50800" cap="rnd">
+            <a:solidFill>
+              <a:schemeClr val="accent5">
+                <a:lumMod val="75000"/>
+              </a:schemeClr>
+            </a:solidFill>
+          </a:ln>
+        </p:spPr>
+        <p:style>
+          <a:lnRef idx="2">
+            <a:schemeClr val="accent1"/>
+          </a:lnRef>
+          <a:fillRef idx="0">
+            <a:schemeClr val="accent1"/>
+          </a:fillRef>
+          <a:effectRef idx="1">
+            <a:schemeClr val="accent1"/>
+          </a:effectRef>
+          <a:fontRef idx="minor">
+            <a:schemeClr val="tx1"/>
+          </a:fontRef>
+        </p:style>
+      </p:cxnSp>
+      <p:cxnSp>
+        <p:nvCxnSpPr>
+          <p:cNvPr id="75" name="Straight Connector 74">
+            <a:extLst>
+              <a:ext uri="{FF2B5EF4-FFF2-40B4-BE49-F238E27FC236}">
+                <a16:creationId xmlns:a16="http://schemas.microsoft.com/office/drawing/2014/main" id="{D4C0D1FE-062C-5021-B986-1459D396155E}"/>
+              </a:ext>
+            </a:extLst>
+          </p:cNvPr>
+          <p:cNvCxnSpPr>
+            <a:cxnSpLocks/>
+          </p:cNvCxnSpPr>
+          <p:nvPr/>
+        </p:nvCxnSpPr>
+        <p:spPr>
+          <a:xfrm rot="21000000">
+            <a:off x="1989738" y="2550859"/>
+            <a:ext cx="1749007" cy="0"/>
+          </a:xfrm>
+          <a:prstGeom prst="line">
+            <a:avLst/>
+          </a:prstGeom>
+          <a:ln w="50800" cap="rnd">
+            <a:solidFill>
+              <a:schemeClr val="accent5">
+                <a:lumMod val="75000"/>
+              </a:schemeClr>
+            </a:solidFill>
+          </a:ln>
+        </p:spPr>
+        <p:style>
+          <a:lnRef idx="2">
+            <a:schemeClr val="accent1"/>
+          </a:lnRef>
+          <a:fillRef idx="0">
+            <a:schemeClr val="accent1"/>
+          </a:fillRef>
+          <a:effectRef idx="1">
+            <a:schemeClr val="accent1"/>
+          </a:effectRef>
+          <a:fontRef idx="minor">
+            <a:schemeClr val="tx1"/>
+          </a:fontRef>
+        </p:style>
+      </p:cxnSp>
+      <p:sp>
+        <p:nvSpPr>
+          <p:cNvPr id="76" name="Rectangle 75">
+            <a:extLst>
+              <a:ext uri="{FF2B5EF4-FFF2-40B4-BE49-F238E27FC236}">
+                <a16:creationId xmlns:a16="http://schemas.microsoft.com/office/drawing/2014/main" id="{77B82523-9534-5957-9B50-4C06454426F4}"/>
+              </a:ext>
+            </a:extLst>
+          </p:cNvPr>
+          <p:cNvSpPr/>
+          <p:nvPr/>
+        </p:nvSpPr>
+        <p:spPr>
+          <a:xfrm>
+            <a:off x="3598460" y="2272003"/>
+            <a:ext cx="254000" cy="254000"/>
+          </a:xfrm>
+          <a:prstGeom prst="rect">
+            <a:avLst/>
+          </a:prstGeom>
+          <a:solidFill>
+            <a:schemeClr val="accent3">
+              <a:lumMod val="20000"/>
+              <a:lumOff val="80000"/>
+            </a:schemeClr>
+          </a:solidFill>
+        </p:spPr>
+        <p:style>
+          <a:lnRef idx="2">
+            <a:schemeClr val="accent1">
+              <a:shade val="15000"/>
+            </a:schemeClr>
+          </a:lnRef>
+          <a:fillRef idx="1">
+            <a:schemeClr val="accent1"/>
+          </a:fillRef>
+          <a:effectRef idx="0">
+            <a:schemeClr val="accent1"/>
+          </a:effectRef>
+          <a:fontRef idx="minor">
+            <a:schemeClr val="lt1"/>
+          </a:fontRef>
+        </p:style>
+        <p:txBody>
+          <a:bodyPr rtlCol="0" anchor="ctr"/>
+          <a:lstStyle/>
+          <a:p>
+            <a:pPr algn="ctr"/>
+            <a:endParaRPr lang="en-NZ"/>
+          </a:p>
+        </p:txBody>
+      </p:sp>
+      <p:sp>
+        <p:nvSpPr>
+          <p:cNvPr id="77" name="Rectangle 76">
+            <a:extLst>
+              <a:ext uri="{FF2B5EF4-FFF2-40B4-BE49-F238E27FC236}">
+                <a16:creationId xmlns:a16="http://schemas.microsoft.com/office/drawing/2014/main" id="{F787C480-1CAE-CA90-F6E9-EE2F7ACCDD9C}"/>
+              </a:ext>
+            </a:extLst>
+          </p:cNvPr>
+          <p:cNvSpPr/>
+          <p:nvPr/>
+        </p:nvSpPr>
+        <p:spPr>
+          <a:xfrm>
+            <a:off x="3598460" y="2874796"/>
+            <a:ext cx="254000" cy="254000"/>
+          </a:xfrm>
+          <a:prstGeom prst="rect">
+            <a:avLst/>
+          </a:prstGeom>
+          <a:solidFill>
+            <a:schemeClr val="accent3">
+              <a:lumMod val="20000"/>
+              <a:lumOff val="80000"/>
+            </a:schemeClr>
+          </a:solidFill>
+        </p:spPr>
+        <p:style>
+          <a:lnRef idx="2">
+            <a:schemeClr val="accent1">
+              <a:shade val="15000"/>
+            </a:schemeClr>
+          </a:lnRef>
+          <a:fillRef idx="1">
+            <a:schemeClr val="accent1"/>
+          </a:fillRef>
+          <a:effectRef idx="0">
+            <a:schemeClr val="accent1"/>
+          </a:effectRef>
+          <a:fontRef idx="minor">
+            <a:schemeClr val="lt1"/>
+          </a:fontRef>
+        </p:style>
+        <p:txBody>
+          <a:bodyPr rtlCol="0" anchor="ctr"/>
+          <a:lstStyle/>
+          <a:p>
+            <a:pPr algn="ctr"/>
+            <a:endParaRPr lang="en-NZ" dirty="0"/>
+          </a:p>
+        </p:txBody>
+      </p:sp>
+      <p:sp>
+        <p:nvSpPr>
+          <p:cNvPr id="78" name="Pentagon 77">
+            <a:extLst>
+              <a:ext uri="{FF2B5EF4-FFF2-40B4-BE49-F238E27FC236}">
+                <a16:creationId xmlns:a16="http://schemas.microsoft.com/office/drawing/2014/main" id="{C8634E97-BA1F-F7D5-0CB3-B6FCE13B0A2A}"/>
+              </a:ext>
+            </a:extLst>
+          </p:cNvPr>
+          <p:cNvSpPr/>
+          <p:nvPr/>
+        </p:nvSpPr>
+        <p:spPr>
+          <a:xfrm>
+            <a:off x="1855592" y="2562266"/>
+            <a:ext cx="284913" cy="271346"/>
+          </a:xfrm>
+          <a:prstGeom prst="pentagon">
+            <a:avLst/>
+          </a:prstGeom>
+          <a:solidFill>
+            <a:schemeClr val="accent3">
+              <a:lumMod val="20000"/>
+              <a:lumOff val="80000"/>
+            </a:schemeClr>
+          </a:solidFill>
+        </p:spPr>
+        <p:style>
+          <a:lnRef idx="2">
+            <a:schemeClr val="accent1">
+              <a:shade val="15000"/>
+            </a:schemeClr>
+          </a:lnRef>
+          <a:fillRef idx="1">
+            <a:schemeClr val="accent1"/>
+          </a:fillRef>
+          <a:effectRef idx="0">
+            <a:schemeClr val="accent1"/>
+          </a:effectRef>
+          <a:fontRef idx="minor">
+            <a:schemeClr val="lt1"/>
+          </a:fontRef>
+        </p:style>
+        <p:txBody>
+          <a:bodyPr rtlCol="0" anchor="ctr"/>
+          <a:lstStyle/>
+          <a:p>
+            <a:pPr algn="ctr"/>
+            <a:endParaRPr lang="en-NZ"/>
+          </a:p>
+        </p:txBody>
+      </p:sp>
+      <p:cxnSp>
+        <p:nvCxnSpPr>
+          <p:cNvPr id="79" name="Straight Connector 78">
+            <a:extLst>
+              <a:ext uri="{FF2B5EF4-FFF2-40B4-BE49-F238E27FC236}">
+                <a16:creationId xmlns:a16="http://schemas.microsoft.com/office/drawing/2014/main" id="{850C897A-DF9D-7D4E-F433-6A5C19712442}"/>
+              </a:ext>
+            </a:extLst>
+          </p:cNvPr>
+          <p:cNvCxnSpPr>
+            <a:cxnSpLocks/>
+          </p:cNvCxnSpPr>
+          <p:nvPr/>
+        </p:nvCxnSpPr>
+        <p:spPr>
+          <a:xfrm rot="600000">
+            <a:off x="5153630" y="2852380"/>
+            <a:ext cx="1749007" cy="0"/>
+          </a:xfrm>
+          <a:prstGeom prst="line">
+            <a:avLst/>
+          </a:prstGeom>
+          <a:ln w="50800" cap="rnd">
+            <a:solidFill>
+              <a:schemeClr val="accent5">
+                <a:lumMod val="60000"/>
+                <a:lumOff val="40000"/>
+              </a:schemeClr>
+            </a:solidFill>
+          </a:ln>
+        </p:spPr>
+        <p:style>
+          <a:lnRef idx="2">
+            <a:schemeClr val="accent1"/>
+          </a:lnRef>
+          <a:fillRef idx="0">
+            <a:schemeClr val="accent1"/>
+          </a:fillRef>
+          <a:effectRef idx="1">
+            <a:schemeClr val="accent1"/>
+          </a:effectRef>
+          <a:fontRef idx="minor">
+            <a:schemeClr val="tx1"/>
+          </a:fontRef>
+        </p:style>
+      </p:cxnSp>
+      <p:cxnSp>
+        <p:nvCxnSpPr>
+          <p:cNvPr id="80" name="Straight Connector 79">
+            <a:extLst>
+              <a:ext uri="{FF2B5EF4-FFF2-40B4-BE49-F238E27FC236}">
+                <a16:creationId xmlns:a16="http://schemas.microsoft.com/office/drawing/2014/main" id="{BF293B65-E2F5-03B3-9916-FE632761D305}"/>
+              </a:ext>
+            </a:extLst>
+          </p:cNvPr>
+          <p:cNvCxnSpPr>
+            <a:cxnSpLocks/>
+          </p:cNvCxnSpPr>
+          <p:nvPr/>
+        </p:nvCxnSpPr>
+        <p:spPr>
+          <a:xfrm rot="21000000">
+            <a:off x="5148656" y="2550859"/>
+            <a:ext cx="1749007" cy="0"/>
+          </a:xfrm>
+          <a:prstGeom prst="line">
+            <a:avLst/>
+          </a:prstGeom>
+          <a:ln w="50800" cap="rnd">
+            <a:solidFill>
+              <a:schemeClr val="accent5">
+                <a:lumMod val="60000"/>
+                <a:lumOff val="40000"/>
+              </a:schemeClr>
+            </a:solidFill>
+          </a:ln>
+        </p:spPr>
+        <p:style>
+          <a:lnRef idx="2">
+            <a:schemeClr val="accent1"/>
+          </a:lnRef>
+          <a:fillRef idx="0">
+            <a:schemeClr val="accent1"/>
+          </a:fillRef>
+          <a:effectRef idx="1">
+            <a:schemeClr val="accent1"/>
+          </a:effectRef>
+          <a:fontRef idx="minor">
+            <a:schemeClr val="tx1"/>
+          </a:fontRef>
+        </p:style>
+      </p:cxnSp>
+      <p:sp>
+        <p:nvSpPr>
+          <p:cNvPr id="81" name="Rectangle 80">
+            <a:extLst>
+              <a:ext uri="{FF2B5EF4-FFF2-40B4-BE49-F238E27FC236}">
+                <a16:creationId xmlns:a16="http://schemas.microsoft.com/office/drawing/2014/main" id="{490803F8-E472-18F1-FA54-136E7532B3B2}"/>
+              </a:ext>
+            </a:extLst>
+          </p:cNvPr>
+          <p:cNvSpPr/>
+          <p:nvPr/>
+        </p:nvSpPr>
+        <p:spPr>
+          <a:xfrm>
+            <a:off x="6757378" y="2272003"/>
+            <a:ext cx="254000" cy="254000"/>
+          </a:xfrm>
+          <a:prstGeom prst="rect">
+            <a:avLst/>
+          </a:prstGeom>
+          <a:solidFill>
+            <a:schemeClr val="accent2">
+              <a:lumMod val="60000"/>
+              <a:lumOff val="40000"/>
+            </a:schemeClr>
+          </a:solidFill>
+        </p:spPr>
+        <p:style>
+          <a:lnRef idx="2">
+            <a:schemeClr val="accent1">
+              <a:shade val="15000"/>
+            </a:schemeClr>
+          </a:lnRef>
+          <a:fillRef idx="1">
+            <a:schemeClr val="accent1"/>
+          </a:fillRef>
+          <a:effectRef idx="0">
+            <a:schemeClr val="accent1"/>
+          </a:effectRef>
+          <a:fontRef idx="minor">
+            <a:schemeClr val="lt1"/>
+          </a:fontRef>
+        </p:style>
+        <p:txBody>
+          <a:bodyPr rtlCol="0" anchor="ctr"/>
+          <a:lstStyle/>
+          <a:p>
+            <a:pPr algn="ctr"/>
+            <a:endParaRPr lang="en-NZ"/>
+          </a:p>
+        </p:txBody>
+      </p:sp>
+      <p:sp>
+        <p:nvSpPr>
+          <p:cNvPr id="82" name="Rectangle 81">
+            <a:extLst>
+              <a:ext uri="{FF2B5EF4-FFF2-40B4-BE49-F238E27FC236}">
+                <a16:creationId xmlns:a16="http://schemas.microsoft.com/office/drawing/2014/main" id="{81996382-0AEC-9541-B13B-69F1FA41E84B}"/>
+              </a:ext>
+            </a:extLst>
+          </p:cNvPr>
+          <p:cNvSpPr/>
+          <p:nvPr/>
+        </p:nvSpPr>
+        <p:spPr>
+          <a:xfrm>
+            <a:off x="6757378" y="2874796"/>
+            <a:ext cx="254000" cy="254000"/>
+          </a:xfrm>
+          <a:prstGeom prst="rect">
+            <a:avLst/>
+          </a:prstGeom>
+          <a:solidFill>
+            <a:schemeClr val="accent2">
+              <a:lumMod val="60000"/>
+              <a:lumOff val="40000"/>
+            </a:schemeClr>
+          </a:solidFill>
+        </p:spPr>
+        <p:style>
+          <a:lnRef idx="2">
+            <a:schemeClr val="accent1">
+              <a:shade val="15000"/>
+            </a:schemeClr>
+          </a:lnRef>
+          <a:fillRef idx="1">
+            <a:schemeClr val="accent1"/>
+          </a:fillRef>
+          <a:effectRef idx="0">
+            <a:schemeClr val="accent1"/>
+          </a:effectRef>
+          <a:fontRef idx="minor">
+            <a:schemeClr val="lt1"/>
+          </a:fontRef>
+        </p:style>
+        <p:txBody>
+          <a:bodyPr rtlCol="0" anchor="ctr"/>
+          <a:lstStyle/>
+          <a:p>
+            <a:pPr algn="ctr"/>
+            <a:endParaRPr lang="en-NZ" dirty="0"/>
+          </a:p>
+        </p:txBody>
+      </p:sp>
+      <p:sp>
+        <p:nvSpPr>
+          <p:cNvPr id="83" name="Pentagon 82">
+            <a:extLst>
+              <a:ext uri="{FF2B5EF4-FFF2-40B4-BE49-F238E27FC236}">
+                <a16:creationId xmlns:a16="http://schemas.microsoft.com/office/drawing/2014/main" id="{692A3F52-4358-CE26-A925-30944959990A}"/>
+              </a:ext>
+            </a:extLst>
+          </p:cNvPr>
+          <p:cNvSpPr/>
+          <p:nvPr/>
+        </p:nvSpPr>
+        <p:spPr>
+          <a:xfrm>
+            <a:off x="5014510" y="2562266"/>
+            <a:ext cx="284913" cy="271346"/>
+          </a:xfrm>
+          <a:prstGeom prst="pentagon">
+            <a:avLst/>
+          </a:prstGeom>
+          <a:solidFill>
+            <a:schemeClr val="accent3">
+              <a:lumMod val="20000"/>
+              <a:lumOff val="80000"/>
+            </a:schemeClr>
+          </a:solidFill>
+        </p:spPr>
+        <p:style>
+          <a:lnRef idx="2">
+            <a:schemeClr val="accent1">
+              <a:shade val="15000"/>
+            </a:schemeClr>
+          </a:lnRef>
+          <a:fillRef idx="1">
+            <a:schemeClr val="accent1"/>
+          </a:fillRef>
+          <a:effectRef idx="0">
+            <a:schemeClr val="accent1"/>
+          </a:effectRef>
+          <a:fontRef idx="minor">
+            <a:schemeClr val="lt1"/>
+          </a:fontRef>
+        </p:style>
+        <p:txBody>
+          <a:bodyPr rtlCol="0" anchor="ctr"/>
+          <a:lstStyle/>
+          <a:p>
+            <a:pPr algn="ctr"/>
+            <a:endParaRPr lang="en-NZ"/>
+          </a:p>
+        </p:txBody>
+      </p:sp>
+      <p:cxnSp>
+        <p:nvCxnSpPr>
+          <p:cNvPr id="85" name="Straight Connector 84">
+            <a:extLst>
+              <a:ext uri="{FF2B5EF4-FFF2-40B4-BE49-F238E27FC236}">
+                <a16:creationId xmlns:a16="http://schemas.microsoft.com/office/drawing/2014/main" id="{363D780E-60CA-63CA-E354-23F81F896EDC}"/>
+              </a:ext>
+            </a:extLst>
+          </p:cNvPr>
+          <p:cNvCxnSpPr>
+            <a:cxnSpLocks/>
+          </p:cNvCxnSpPr>
+          <p:nvPr/>
+        </p:nvCxnSpPr>
+        <p:spPr>
+          <a:xfrm rot="600000">
+            <a:off x="1980234" y="4439585"/>
+            <a:ext cx="1749007" cy="0"/>
+          </a:xfrm>
+          <a:prstGeom prst="line">
+            <a:avLst/>
+          </a:prstGeom>
+          <a:ln w="50800" cap="rnd">
+            <a:solidFill>
+              <a:schemeClr val="accent5">
+                <a:lumMod val="75000"/>
+              </a:schemeClr>
+            </a:solidFill>
+          </a:ln>
+        </p:spPr>
+        <p:style>
+          <a:lnRef idx="2">
+            <a:schemeClr val="accent1"/>
+          </a:lnRef>
+          <a:fillRef idx="0">
+            <a:schemeClr val="accent1"/>
+          </a:fillRef>
+          <a:effectRef idx="1">
+            <a:schemeClr val="accent1"/>
+          </a:effectRef>
+          <a:fontRef idx="minor">
+            <a:schemeClr val="tx1"/>
+          </a:fontRef>
+        </p:style>
+      </p:cxnSp>
+      <p:cxnSp>
+        <p:nvCxnSpPr>
+          <p:cNvPr id="86" name="Straight Connector 85">
+            <a:extLst>
+              <a:ext uri="{FF2B5EF4-FFF2-40B4-BE49-F238E27FC236}">
+                <a16:creationId xmlns:a16="http://schemas.microsoft.com/office/drawing/2014/main" id="{8AB7C2C3-3488-7216-33B2-F231235C0F42}"/>
+              </a:ext>
+            </a:extLst>
+          </p:cNvPr>
+          <p:cNvCxnSpPr>
+            <a:cxnSpLocks/>
+          </p:cNvCxnSpPr>
+          <p:nvPr/>
+        </p:nvCxnSpPr>
+        <p:spPr>
+          <a:xfrm rot="21000000">
+            <a:off x="1975260" y="4138064"/>
+            <a:ext cx="1749007" cy="0"/>
+          </a:xfrm>
+          <a:prstGeom prst="line">
+            <a:avLst/>
+          </a:prstGeom>
+          <a:ln w="50800" cap="rnd">
+            <a:solidFill>
+              <a:schemeClr val="accent5">
+                <a:lumMod val="75000"/>
+              </a:schemeClr>
+            </a:solidFill>
+          </a:ln>
+        </p:spPr>
+        <p:style>
+          <a:lnRef idx="2">
+            <a:schemeClr val="accent1"/>
+          </a:lnRef>
+          <a:fillRef idx="0">
+            <a:schemeClr val="accent1"/>
+          </a:fillRef>
+          <a:effectRef idx="1">
+            <a:schemeClr val="accent1"/>
+          </a:effectRef>
+          <a:fontRef idx="minor">
+            <a:schemeClr val="tx1"/>
+          </a:fontRef>
+        </p:style>
+      </p:cxnSp>
+      <p:sp>
+        <p:nvSpPr>
+          <p:cNvPr id="87" name="Rectangle 86">
+            <a:extLst>
+              <a:ext uri="{FF2B5EF4-FFF2-40B4-BE49-F238E27FC236}">
+                <a16:creationId xmlns:a16="http://schemas.microsoft.com/office/drawing/2014/main" id="{39CECEE7-158E-F9A4-A163-A4F40F248266}"/>
+              </a:ext>
+            </a:extLst>
+          </p:cNvPr>
+          <p:cNvSpPr/>
+          <p:nvPr/>
+        </p:nvSpPr>
+        <p:spPr>
+          <a:xfrm>
+            <a:off x="3583982" y="3859208"/>
+            <a:ext cx="254000" cy="254000"/>
+          </a:xfrm>
+          <a:prstGeom prst="rect">
+            <a:avLst/>
+          </a:prstGeom>
+          <a:solidFill>
+            <a:schemeClr val="accent2">
+              <a:lumMod val="60000"/>
+              <a:lumOff val="40000"/>
+            </a:schemeClr>
+          </a:solidFill>
+        </p:spPr>
+        <p:style>
+          <a:lnRef idx="2">
+            <a:schemeClr val="accent1">
+              <a:shade val="15000"/>
+            </a:schemeClr>
+          </a:lnRef>
+          <a:fillRef idx="1">
+            <a:schemeClr val="accent1"/>
+          </a:fillRef>
+          <a:effectRef idx="0">
+            <a:schemeClr val="accent1"/>
+          </a:effectRef>
+          <a:fontRef idx="minor">
+            <a:schemeClr val="lt1"/>
+          </a:fontRef>
+        </p:style>
+        <p:txBody>
+          <a:bodyPr rtlCol="0" anchor="ctr"/>
+          <a:lstStyle/>
+          <a:p>
+            <a:pPr algn="ctr"/>
+            <a:endParaRPr lang="en-NZ"/>
+          </a:p>
+        </p:txBody>
+      </p:sp>
+      <p:sp>
+        <p:nvSpPr>
+          <p:cNvPr id="88" name="Rectangle 87">
+            <a:extLst>
+              <a:ext uri="{FF2B5EF4-FFF2-40B4-BE49-F238E27FC236}">
+                <a16:creationId xmlns:a16="http://schemas.microsoft.com/office/drawing/2014/main" id="{1CAC5EE2-3E70-F52C-2883-51E33D594F06}"/>
+              </a:ext>
+            </a:extLst>
+          </p:cNvPr>
+          <p:cNvSpPr/>
+          <p:nvPr/>
+        </p:nvSpPr>
+        <p:spPr>
+          <a:xfrm>
+            <a:off x="3583982" y="4462001"/>
+            <a:ext cx="254000" cy="254000"/>
+          </a:xfrm>
+          <a:prstGeom prst="rect">
+            <a:avLst/>
+          </a:prstGeom>
+          <a:solidFill>
+            <a:schemeClr val="accent2">
+              <a:lumMod val="60000"/>
+              <a:lumOff val="40000"/>
+            </a:schemeClr>
+          </a:solidFill>
+        </p:spPr>
+        <p:style>
+          <a:lnRef idx="2">
+            <a:schemeClr val="accent1">
+              <a:shade val="15000"/>
+            </a:schemeClr>
+          </a:lnRef>
+          <a:fillRef idx="1">
+            <a:schemeClr val="accent1"/>
+          </a:fillRef>
+          <a:effectRef idx="0">
+            <a:schemeClr val="accent1"/>
+          </a:effectRef>
+          <a:fontRef idx="minor">
+            <a:schemeClr val="lt1"/>
+          </a:fontRef>
+        </p:style>
+        <p:txBody>
+          <a:bodyPr rtlCol="0" anchor="ctr"/>
+          <a:lstStyle/>
+          <a:p>
+            <a:pPr algn="ctr"/>
+            <a:endParaRPr lang="en-NZ" dirty="0"/>
+          </a:p>
+        </p:txBody>
+      </p:sp>
+      <p:sp>
+        <p:nvSpPr>
+          <p:cNvPr id="89" name="Pentagon 88">
+            <a:extLst>
+              <a:ext uri="{FF2B5EF4-FFF2-40B4-BE49-F238E27FC236}">
+                <a16:creationId xmlns:a16="http://schemas.microsoft.com/office/drawing/2014/main" id="{D41D65AC-E250-6614-6AF2-CA23B9CDFB57}"/>
+              </a:ext>
+            </a:extLst>
+          </p:cNvPr>
+          <p:cNvSpPr/>
+          <p:nvPr/>
+        </p:nvSpPr>
+        <p:spPr>
+          <a:xfrm>
+            <a:off x="1841114" y="4149471"/>
+            <a:ext cx="284913" cy="271346"/>
+          </a:xfrm>
+          <a:prstGeom prst="pentagon">
+            <a:avLst/>
+          </a:prstGeom>
+          <a:solidFill>
+            <a:schemeClr val="accent3">
+              <a:lumMod val="20000"/>
+              <a:lumOff val="80000"/>
+            </a:schemeClr>
+          </a:solidFill>
+        </p:spPr>
+        <p:style>
+          <a:lnRef idx="2">
+            <a:schemeClr val="accent1">
+              <a:shade val="15000"/>
+            </a:schemeClr>
+          </a:lnRef>
+          <a:fillRef idx="1">
+            <a:schemeClr val="accent1"/>
+          </a:fillRef>
+          <a:effectRef idx="0">
+            <a:schemeClr val="accent1"/>
+          </a:effectRef>
+          <a:fontRef idx="minor">
+            <a:schemeClr val="lt1"/>
+          </a:fontRef>
+        </p:style>
+        <p:txBody>
+          <a:bodyPr rtlCol="0" anchor="ctr"/>
+          <a:lstStyle/>
+          <a:p>
+            <a:pPr algn="ctr"/>
+            <a:endParaRPr lang="en-NZ"/>
+          </a:p>
+        </p:txBody>
+      </p:sp>
+      <p:cxnSp>
+        <p:nvCxnSpPr>
+          <p:cNvPr id="90" name="Straight Connector 89">
+            <a:extLst>
+              <a:ext uri="{FF2B5EF4-FFF2-40B4-BE49-F238E27FC236}">
+                <a16:creationId xmlns:a16="http://schemas.microsoft.com/office/drawing/2014/main" id="{97F5D927-D15B-C324-C381-AA881CCD140A}"/>
+              </a:ext>
+            </a:extLst>
+          </p:cNvPr>
+          <p:cNvCxnSpPr>
+            <a:cxnSpLocks/>
+          </p:cNvCxnSpPr>
+          <p:nvPr/>
+        </p:nvCxnSpPr>
+        <p:spPr>
+          <a:xfrm rot="600000">
+            <a:off x="5139152" y="4439585"/>
+            <a:ext cx="1749007" cy="0"/>
+          </a:xfrm>
+          <a:prstGeom prst="line">
+            <a:avLst/>
+          </a:prstGeom>
+          <a:ln w="50800" cap="rnd">
+            <a:solidFill>
+              <a:schemeClr val="accent5">
+                <a:lumMod val="60000"/>
+                <a:lumOff val="40000"/>
+              </a:schemeClr>
+            </a:solidFill>
+          </a:ln>
+        </p:spPr>
+        <p:style>
+          <a:lnRef idx="2">
+            <a:schemeClr val="accent1"/>
+          </a:lnRef>
+          <a:fillRef idx="0">
+            <a:schemeClr val="accent1"/>
+          </a:fillRef>
+          <a:effectRef idx="1">
+            <a:schemeClr val="accent1"/>
+          </a:effectRef>
+          <a:fontRef idx="minor">
+            <a:schemeClr val="tx1"/>
+          </a:fontRef>
+        </p:style>
+      </p:cxnSp>
+      <p:cxnSp>
+        <p:nvCxnSpPr>
+          <p:cNvPr id="91" name="Straight Connector 90">
+            <a:extLst>
+              <a:ext uri="{FF2B5EF4-FFF2-40B4-BE49-F238E27FC236}">
+                <a16:creationId xmlns:a16="http://schemas.microsoft.com/office/drawing/2014/main" id="{40B7499F-557E-DBD8-3E79-1427F04BB0B6}"/>
+              </a:ext>
+            </a:extLst>
+          </p:cNvPr>
+          <p:cNvCxnSpPr>
+            <a:cxnSpLocks/>
+          </p:cNvCxnSpPr>
+          <p:nvPr/>
+        </p:nvCxnSpPr>
+        <p:spPr>
+          <a:xfrm rot="21000000">
+            <a:off x="5134178" y="4138064"/>
+            <a:ext cx="1749007" cy="0"/>
+          </a:xfrm>
+          <a:prstGeom prst="line">
+            <a:avLst/>
+          </a:prstGeom>
+          <a:ln w="50800" cap="rnd">
+            <a:solidFill>
+              <a:schemeClr val="accent5">
+                <a:lumMod val="60000"/>
+                <a:lumOff val="40000"/>
+              </a:schemeClr>
+            </a:solidFill>
+          </a:ln>
+        </p:spPr>
+        <p:style>
+          <a:lnRef idx="2">
+            <a:schemeClr val="accent1"/>
+          </a:lnRef>
+          <a:fillRef idx="0">
+            <a:schemeClr val="accent1"/>
+          </a:fillRef>
+          <a:effectRef idx="1">
+            <a:schemeClr val="accent1"/>
+          </a:effectRef>
+          <a:fontRef idx="minor">
+            <a:schemeClr val="tx1"/>
+          </a:fontRef>
+        </p:style>
+      </p:cxnSp>
+      <p:sp>
+        <p:nvSpPr>
+          <p:cNvPr id="92" name="Rectangle 91">
+            <a:extLst>
+              <a:ext uri="{FF2B5EF4-FFF2-40B4-BE49-F238E27FC236}">
+                <a16:creationId xmlns:a16="http://schemas.microsoft.com/office/drawing/2014/main" id="{1D9FC84B-0CFB-155B-073A-DA90F1E0921C}"/>
+              </a:ext>
+            </a:extLst>
+          </p:cNvPr>
+          <p:cNvSpPr/>
+          <p:nvPr/>
+        </p:nvSpPr>
+        <p:spPr>
+          <a:xfrm>
+            <a:off x="6742900" y="3859208"/>
+            <a:ext cx="254000" cy="254000"/>
+          </a:xfrm>
+          <a:prstGeom prst="rect">
+            <a:avLst/>
+          </a:prstGeom>
+          <a:solidFill>
+            <a:schemeClr val="accent3">
+              <a:lumMod val="20000"/>
+              <a:lumOff val="80000"/>
+            </a:schemeClr>
+          </a:solidFill>
+        </p:spPr>
+        <p:style>
+          <a:lnRef idx="2">
+            <a:schemeClr val="accent1">
+              <a:shade val="15000"/>
+            </a:schemeClr>
+          </a:lnRef>
+          <a:fillRef idx="1">
+            <a:schemeClr val="accent1"/>
+          </a:fillRef>
+          <a:effectRef idx="0">
+            <a:schemeClr val="accent1"/>
+          </a:effectRef>
+          <a:fontRef idx="minor">
+            <a:schemeClr val="lt1"/>
+          </a:fontRef>
+        </p:style>
+        <p:txBody>
+          <a:bodyPr rtlCol="0" anchor="ctr"/>
+          <a:lstStyle/>
+          <a:p>
+            <a:pPr algn="ctr"/>
+            <a:endParaRPr lang="en-NZ"/>
+          </a:p>
+        </p:txBody>
+      </p:sp>
+      <p:sp>
+        <p:nvSpPr>
+          <p:cNvPr id="93" name="Rectangle 92">
+            <a:extLst>
+              <a:ext uri="{FF2B5EF4-FFF2-40B4-BE49-F238E27FC236}">
+                <a16:creationId xmlns:a16="http://schemas.microsoft.com/office/drawing/2014/main" id="{2FB39106-4034-AA84-8655-572FC50FD053}"/>
+              </a:ext>
+            </a:extLst>
+          </p:cNvPr>
+          <p:cNvSpPr/>
+          <p:nvPr/>
+        </p:nvSpPr>
+        <p:spPr>
+          <a:xfrm>
+            <a:off x="6742900" y="4462001"/>
+            <a:ext cx="254000" cy="254000"/>
+          </a:xfrm>
+          <a:prstGeom prst="rect">
+            <a:avLst/>
+          </a:prstGeom>
+          <a:solidFill>
+            <a:schemeClr val="accent3">
+              <a:lumMod val="20000"/>
+              <a:lumOff val="80000"/>
+            </a:schemeClr>
+          </a:solidFill>
+        </p:spPr>
+        <p:style>
+          <a:lnRef idx="2">
+            <a:schemeClr val="accent1">
+              <a:shade val="15000"/>
+            </a:schemeClr>
+          </a:lnRef>
+          <a:fillRef idx="1">
+            <a:schemeClr val="accent1"/>
+          </a:fillRef>
+          <a:effectRef idx="0">
+            <a:schemeClr val="accent1"/>
+          </a:effectRef>
+          <a:fontRef idx="minor">
+            <a:schemeClr val="lt1"/>
+          </a:fontRef>
+        </p:style>
+        <p:txBody>
+          <a:bodyPr rtlCol="0" anchor="ctr"/>
+          <a:lstStyle/>
+          <a:p>
+            <a:pPr algn="ctr"/>
+            <a:endParaRPr lang="en-NZ" dirty="0"/>
+          </a:p>
+        </p:txBody>
+      </p:sp>
+      <p:sp>
+        <p:nvSpPr>
+          <p:cNvPr id="94" name="Pentagon 93">
+            <a:extLst>
+              <a:ext uri="{FF2B5EF4-FFF2-40B4-BE49-F238E27FC236}">
+                <a16:creationId xmlns:a16="http://schemas.microsoft.com/office/drawing/2014/main" id="{2519E275-5384-623F-7A85-D7394DC40389}"/>
+              </a:ext>
+            </a:extLst>
+          </p:cNvPr>
+          <p:cNvSpPr/>
+          <p:nvPr/>
+        </p:nvSpPr>
+        <p:spPr>
+          <a:xfrm>
+            <a:off x="5000032" y="4149471"/>
+            <a:ext cx="284913" cy="271346"/>
+          </a:xfrm>
+          <a:prstGeom prst="pentagon">
+            <a:avLst/>
+          </a:prstGeom>
+          <a:solidFill>
+            <a:schemeClr val="accent2">
+              <a:lumMod val="60000"/>
+              <a:lumOff val="40000"/>
+            </a:schemeClr>
+          </a:solidFill>
+        </p:spPr>
+        <p:style>
+          <a:lnRef idx="2">
+            <a:schemeClr val="accent1">
+              <a:shade val="15000"/>
+            </a:schemeClr>
+          </a:lnRef>
+          <a:fillRef idx="1">
+            <a:schemeClr val="accent1"/>
+          </a:fillRef>
+          <a:effectRef idx="0">
+            <a:schemeClr val="accent1"/>
+          </a:effectRef>
+          <a:fontRef idx="minor">
+            <a:schemeClr val="lt1"/>
+          </a:fontRef>
+        </p:style>
+        <p:txBody>
+          <a:bodyPr rtlCol="0" anchor="ctr"/>
+          <a:lstStyle/>
+          <a:p>
+            <a:pPr algn="ctr"/>
+            <a:endParaRPr lang="en-NZ"/>
+          </a:p>
+        </p:txBody>
+      </p:sp>
+      <p:cxnSp>
+        <p:nvCxnSpPr>
+          <p:cNvPr id="96" name="Straight Connector 95">
+            <a:extLst>
+              <a:ext uri="{FF2B5EF4-FFF2-40B4-BE49-F238E27FC236}">
+                <a16:creationId xmlns:a16="http://schemas.microsoft.com/office/drawing/2014/main" id="{96B69348-3949-46A1-B9E8-399F8F32025F}"/>
+              </a:ext>
+            </a:extLst>
+          </p:cNvPr>
+          <p:cNvCxnSpPr>
+            <a:cxnSpLocks/>
+          </p:cNvCxnSpPr>
+          <p:nvPr/>
+        </p:nvCxnSpPr>
+        <p:spPr>
+          <a:xfrm rot="600000">
+            <a:off x="1989759" y="6022893"/>
+            <a:ext cx="1749007" cy="0"/>
+          </a:xfrm>
+          <a:prstGeom prst="line">
+            <a:avLst/>
+          </a:prstGeom>
+          <a:ln w="50800" cap="rnd">
+            <a:solidFill>
+              <a:schemeClr val="accent5">
+                <a:lumMod val="75000"/>
+              </a:schemeClr>
+            </a:solidFill>
+          </a:ln>
+        </p:spPr>
+        <p:style>
+          <a:lnRef idx="2">
+            <a:schemeClr val="accent1"/>
+          </a:lnRef>
+          <a:fillRef idx="0">
+            <a:schemeClr val="accent1"/>
+          </a:fillRef>
+          <a:effectRef idx="1">
+            <a:schemeClr val="accent1"/>
+          </a:effectRef>
+          <a:fontRef idx="minor">
+            <a:schemeClr val="tx1"/>
+          </a:fontRef>
+        </p:style>
+      </p:cxnSp>
+      <p:cxnSp>
+        <p:nvCxnSpPr>
+          <p:cNvPr id="97" name="Straight Connector 96">
+            <a:extLst>
+              <a:ext uri="{FF2B5EF4-FFF2-40B4-BE49-F238E27FC236}">
+                <a16:creationId xmlns:a16="http://schemas.microsoft.com/office/drawing/2014/main" id="{005486DD-56C5-1A12-6434-26396E9596BC}"/>
+              </a:ext>
+            </a:extLst>
+          </p:cNvPr>
+          <p:cNvCxnSpPr>
+            <a:cxnSpLocks/>
+          </p:cNvCxnSpPr>
+          <p:nvPr/>
+        </p:nvCxnSpPr>
+        <p:spPr>
+          <a:xfrm rot="21000000">
+            <a:off x="1984785" y="5721372"/>
+            <a:ext cx="1749007" cy="0"/>
+          </a:xfrm>
+          <a:prstGeom prst="line">
+            <a:avLst/>
+          </a:prstGeom>
+          <a:ln w="50800" cap="rnd">
+            <a:solidFill>
+              <a:schemeClr val="accent5">
+                <a:lumMod val="75000"/>
+              </a:schemeClr>
+            </a:solidFill>
+          </a:ln>
+        </p:spPr>
+        <p:style>
+          <a:lnRef idx="2">
+            <a:schemeClr val="accent1"/>
+          </a:lnRef>
+          <a:fillRef idx="0">
+            <a:schemeClr val="accent1"/>
+          </a:fillRef>
+          <a:effectRef idx="1">
+            <a:schemeClr val="accent1"/>
+          </a:effectRef>
+          <a:fontRef idx="minor">
+            <a:schemeClr val="tx1"/>
+          </a:fontRef>
+        </p:style>
+      </p:cxnSp>
+      <p:sp>
+        <p:nvSpPr>
+          <p:cNvPr id="98" name="Rectangle 97">
+            <a:extLst>
+              <a:ext uri="{FF2B5EF4-FFF2-40B4-BE49-F238E27FC236}">
+                <a16:creationId xmlns:a16="http://schemas.microsoft.com/office/drawing/2014/main" id="{4B947B76-6F8E-E18B-9EEF-92D6F1EE7F88}"/>
+              </a:ext>
+            </a:extLst>
+          </p:cNvPr>
+          <p:cNvSpPr/>
+          <p:nvPr/>
+        </p:nvSpPr>
+        <p:spPr>
+          <a:xfrm>
+            <a:off x="3593507" y="5442516"/>
+            <a:ext cx="254000" cy="254000"/>
+          </a:xfrm>
+          <a:prstGeom prst="rect">
+            <a:avLst/>
+          </a:prstGeom>
+          <a:solidFill>
+            <a:schemeClr val="accent3">
+              <a:lumMod val="20000"/>
+              <a:lumOff val="80000"/>
+            </a:schemeClr>
+          </a:solidFill>
+        </p:spPr>
+        <p:style>
+          <a:lnRef idx="2">
+            <a:schemeClr val="accent1">
+              <a:shade val="15000"/>
+            </a:schemeClr>
+          </a:lnRef>
+          <a:fillRef idx="1">
+            <a:schemeClr val="accent1"/>
+          </a:fillRef>
+          <a:effectRef idx="0">
+            <a:schemeClr val="accent1"/>
+          </a:effectRef>
+          <a:fontRef idx="minor">
+            <a:schemeClr val="lt1"/>
+          </a:fontRef>
+        </p:style>
+        <p:txBody>
+          <a:bodyPr rtlCol="0" anchor="ctr"/>
+          <a:lstStyle/>
+          <a:p>
+            <a:pPr algn="ctr"/>
+            <a:endParaRPr lang="en-NZ"/>
+          </a:p>
+        </p:txBody>
+      </p:sp>
+      <p:sp>
+        <p:nvSpPr>
+          <p:cNvPr id="99" name="Rectangle 98">
+            <a:extLst>
+              <a:ext uri="{FF2B5EF4-FFF2-40B4-BE49-F238E27FC236}">
+                <a16:creationId xmlns:a16="http://schemas.microsoft.com/office/drawing/2014/main" id="{4E1546C3-4342-85C3-7A96-9394EE88EA80}"/>
+              </a:ext>
+            </a:extLst>
+          </p:cNvPr>
+          <p:cNvSpPr/>
+          <p:nvPr/>
+        </p:nvSpPr>
+        <p:spPr>
+          <a:xfrm>
+            <a:off x="3593507" y="6045309"/>
+            <a:ext cx="254000" cy="254000"/>
+          </a:xfrm>
+          <a:prstGeom prst="rect">
+            <a:avLst/>
+          </a:prstGeom>
+          <a:solidFill>
+            <a:schemeClr val="accent3">
+              <a:lumMod val="20000"/>
+              <a:lumOff val="80000"/>
+            </a:schemeClr>
+          </a:solidFill>
+        </p:spPr>
+        <p:style>
+          <a:lnRef idx="2">
+            <a:schemeClr val="accent1">
+              <a:shade val="15000"/>
+            </a:schemeClr>
+          </a:lnRef>
+          <a:fillRef idx="1">
+            <a:schemeClr val="accent1"/>
+          </a:fillRef>
+          <a:effectRef idx="0">
+            <a:schemeClr val="accent1"/>
+          </a:effectRef>
+          <a:fontRef idx="minor">
+            <a:schemeClr val="lt1"/>
+          </a:fontRef>
+        </p:style>
+        <p:txBody>
+          <a:bodyPr rtlCol="0" anchor="ctr"/>
+          <a:lstStyle/>
+          <a:p>
+            <a:pPr algn="ctr"/>
+            <a:endParaRPr lang="en-NZ" dirty="0"/>
+          </a:p>
+        </p:txBody>
+      </p:sp>
+      <p:sp>
+        <p:nvSpPr>
+          <p:cNvPr id="100" name="Pentagon 99">
+            <a:extLst>
+              <a:ext uri="{FF2B5EF4-FFF2-40B4-BE49-F238E27FC236}">
+                <a16:creationId xmlns:a16="http://schemas.microsoft.com/office/drawing/2014/main" id="{A68B4233-B47D-F872-0A7E-B803EDC53D3E}"/>
+              </a:ext>
+            </a:extLst>
+          </p:cNvPr>
+          <p:cNvSpPr/>
+          <p:nvPr/>
+        </p:nvSpPr>
+        <p:spPr>
+          <a:xfrm>
+            <a:off x="1850639" y="5732779"/>
+            <a:ext cx="284913" cy="271346"/>
+          </a:xfrm>
+          <a:prstGeom prst="pentagon">
+            <a:avLst/>
+          </a:prstGeom>
+          <a:solidFill>
+            <a:schemeClr val="accent3">
+              <a:lumMod val="20000"/>
+              <a:lumOff val="80000"/>
+            </a:schemeClr>
+          </a:solidFill>
+        </p:spPr>
+        <p:style>
+          <a:lnRef idx="2">
+            <a:schemeClr val="accent1">
+              <a:shade val="15000"/>
+            </a:schemeClr>
+          </a:lnRef>
+          <a:fillRef idx="1">
+            <a:schemeClr val="accent1"/>
+          </a:fillRef>
+          <a:effectRef idx="0">
+            <a:schemeClr val="accent1"/>
+          </a:effectRef>
+          <a:fontRef idx="minor">
+            <a:schemeClr val="lt1"/>
+          </a:fontRef>
+        </p:style>
+        <p:txBody>
+          <a:bodyPr rtlCol="0" anchor="ctr"/>
+          <a:lstStyle/>
+          <a:p>
+            <a:pPr algn="ctr"/>
+            <a:endParaRPr lang="en-NZ"/>
+          </a:p>
+        </p:txBody>
+      </p:sp>
+      <p:cxnSp>
+        <p:nvCxnSpPr>
+          <p:cNvPr id="101" name="Straight Connector 100">
+            <a:extLst>
+              <a:ext uri="{FF2B5EF4-FFF2-40B4-BE49-F238E27FC236}">
+                <a16:creationId xmlns:a16="http://schemas.microsoft.com/office/drawing/2014/main" id="{8135D9CF-F610-4236-68D9-E8B0E7ECF6C1}"/>
+              </a:ext>
+            </a:extLst>
+          </p:cNvPr>
+          <p:cNvCxnSpPr>
+            <a:cxnSpLocks/>
+          </p:cNvCxnSpPr>
+          <p:nvPr/>
+        </p:nvCxnSpPr>
+        <p:spPr>
+          <a:xfrm rot="600000">
+            <a:off x="5148677" y="6022893"/>
+            <a:ext cx="1749007" cy="0"/>
+          </a:xfrm>
+          <a:prstGeom prst="line">
+            <a:avLst/>
+          </a:prstGeom>
+          <a:ln w="50800" cap="rnd">
+            <a:solidFill>
+              <a:schemeClr val="accent5">
+                <a:lumMod val="60000"/>
+                <a:lumOff val="40000"/>
+              </a:schemeClr>
+            </a:solidFill>
+          </a:ln>
+        </p:spPr>
+        <p:style>
+          <a:lnRef idx="2">
+            <a:schemeClr val="accent1"/>
+          </a:lnRef>
+          <a:fillRef idx="0">
+            <a:schemeClr val="accent1"/>
+          </a:fillRef>
+          <a:effectRef idx="1">
+            <a:schemeClr val="accent1"/>
+          </a:effectRef>
+          <a:fontRef idx="minor">
+            <a:schemeClr val="tx1"/>
+          </a:fontRef>
+        </p:style>
+      </p:cxnSp>
+      <p:cxnSp>
+        <p:nvCxnSpPr>
+          <p:cNvPr id="102" name="Straight Connector 101">
+            <a:extLst>
+              <a:ext uri="{FF2B5EF4-FFF2-40B4-BE49-F238E27FC236}">
+                <a16:creationId xmlns:a16="http://schemas.microsoft.com/office/drawing/2014/main" id="{9B61F311-7A18-29F4-4973-A4F529407808}"/>
+              </a:ext>
+            </a:extLst>
+          </p:cNvPr>
+          <p:cNvCxnSpPr>
+            <a:cxnSpLocks/>
+          </p:cNvCxnSpPr>
+          <p:nvPr/>
+        </p:nvCxnSpPr>
+        <p:spPr>
+          <a:xfrm rot="21000000">
+            <a:off x="5143703" y="5721372"/>
+            <a:ext cx="1749007" cy="0"/>
+          </a:xfrm>
+          <a:prstGeom prst="line">
+            <a:avLst/>
+          </a:prstGeom>
+          <a:ln w="50800" cap="rnd">
+            <a:solidFill>
+              <a:schemeClr val="accent5">
+                <a:lumMod val="60000"/>
+                <a:lumOff val="40000"/>
+              </a:schemeClr>
+            </a:solidFill>
+          </a:ln>
+        </p:spPr>
+        <p:style>
+          <a:lnRef idx="2">
+            <a:schemeClr val="accent1"/>
+          </a:lnRef>
+          <a:fillRef idx="0">
+            <a:schemeClr val="accent1"/>
+          </a:fillRef>
+          <a:effectRef idx="1">
+            <a:schemeClr val="accent1"/>
+          </a:effectRef>
+          <a:fontRef idx="minor">
+            <a:schemeClr val="tx1"/>
+          </a:fontRef>
+        </p:style>
+      </p:cxnSp>
+      <p:sp>
+        <p:nvSpPr>
+          <p:cNvPr id="103" name="Rectangle 102">
+            <a:extLst>
+              <a:ext uri="{FF2B5EF4-FFF2-40B4-BE49-F238E27FC236}">
+                <a16:creationId xmlns:a16="http://schemas.microsoft.com/office/drawing/2014/main" id="{5CA982EF-7611-5AFE-E217-C4E0E5A5317B}"/>
+              </a:ext>
+            </a:extLst>
+          </p:cNvPr>
+          <p:cNvSpPr/>
+          <p:nvPr/>
+        </p:nvSpPr>
+        <p:spPr>
+          <a:xfrm>
+            <a:off x="6752425" y="5442516"/>
+            <a:ext cx="254000" cy="254000"/>
+          </a:xfrm>
+          <a:prstGeom prst="rect">
+            <a:avLst/>
+          </a:prstGeom>
+          <a:solidFill>
+            <a:schemeClr val="accent2">
+              <a:lumMod val="60000"/>
+              <a:lumOff val="40000"/>
+            </a:schemeClr>
+          </a:solidFill>
+        </p:spPr>
+        <p:style>
+          <a:lnRef idx="2">
+            <a:schemeClr val="accent1">
+              <a:shade val="15000"/>
+            </a:schemeClr>
+          </a:lnRef>
+          <a:fillRef idx="1">
+            <a:schemeClr val="accent1"/>
+          </a:fillRef>
+          <a:effectRef idx="0">
+            <a:schemeClr val="accent1"/>
+          </a:effectRef>
+          <a:fontRef idx="minor">
+            <a:schemeClr val="lt1"/>
+          </a:fontRef>
+        </p:style>
+        <p:txBody>
+          <a:bodyPr rtlCol="0" anchor="ctr"/>
+          <a:lstStyle/>
+          <a:p>
+            <a:pPr algn="ctr"/>
+            <a:endParaRPr lang="en-NZ"/>
+          </a:p>
+        </p:txBody>
+      </p:sp>
+      <p:sp>
+        <p:nvSpPr>
+          <p:cNvPr id="104" name="Rectangle 103">
+            <a:extLst>
+              <a:ext uri="{FF2B5EF4-FFF2-40B4-BE49-F238E27FC236}">
+                <a16:creationId xmlns:a16="http://schemas.microsoft.com/office/drawing/2014/main" id="{4961F5CE-B214-E116-2161-18EF9DCFF842}"/>
+              </a:ext>
+            </a:extLst>
+          </p:cNvPr>
+          <p:cNvSpPr/>
+          <p:nvPr/>
+        </p:nvSpPr>
+        <p:spPr>
+          <a:xfrm>
+            <a:off x="6752425" y="6045309"/>
+            <a:ext cx="254000" cy="254000"/>
+          </a:xfrm>
+          <a:prstGeom prst="rect">
+            <a:avLst/>
+          </a:prstGeom>
+          <a:solidFill>
+            <a:schemeClr val="accent2">
+              <a:lumMod val="60000"/>
+              <a:lumOff val="40000"/>
+            </a:schemeClr>
+          </a:solidFill>
+        </p:spPr>
+        <p:style>
+          <a:lnRef idx="2">
+            <a:schemeClr val="accent1">
+              <a:shade val="15000"/>
+            </a:schemeClr>
+          </a:lnRef>
+          <a:fillRef idx="1">
+            <a:schemeClr val="accent1"/>
+          </a:fillRef>
+          <a:effectRef idx="0">
+            <a:schemeClr val="accent1"/>
+          </a:effectRef>
+          <a:fontRef idx="minor">
+            <a:schemeClr val="lt1"/>
+          </a:fontRef>
+        </p:style>
+        <p:txBody>
+          <a:bodyPr rtlCol="0" anchor="ctr"/>
+          <a:lstStyle/>
+          <a:p>
+            <a:pPr algn="ctr"/>
+            <a:endParaRPr lang="en-NZ" dirty="0"/>
+          </a:p>
+        </p:txBody>
+      </p:sp>
+      <p:sp>
+        <p:nvSpPr>
+          <p:cNvPr id="105" name="Pentagon 104">
+            <a:extLst>
+              <a:ext uri="{FF2B5EF4-FFF2-40B4-BE49-F238E27FC236}">
+                <a16:creationId xmlns:a16="http://schemas.microsoft.com/office/drawing/2014/main" id="{2C9C6856-E8C4-4667-66D3-C2BDDF19EBE9}"/>
+              </a:ext>
+            </a:extLst>
+          </p:cNvPr>
+          <p:cNvSpPr/>
+          <p:nvPr/>
+        </p:nvSpPr>
+        <p:spPr>
+          <a:xfrm>
+            <a:off x="5009557" y="5732779"/>
+            <a:ext cx="284913" cy="271346"/>
+          </a:xfrm>
+          <a:prstGeom prst="pentagon">
+            <a:avLst/>
+          </a:prstGeom>
+          <a:solidFill>
+            <a:schemeClr val="accent2">
+              <a:lumMod val="60000"/>
+              <a:lumOff val="40000"/>
+            </a:schemeClr>
+          </a:solidFill>
+        </p:spPr>
+        <p:style>
+          <a:lnRef idx="2">
+            <a:schemeClr val="accent1">
+              <a:shade val="15000"/>
+            </a:schemeClr>
+          </a:lnRef>
+          <a:fillRef idx="1">
+            <a:schemeClr val="accent1"/>
+          </a:fillRef>
+          <a:effectRef idx="0">
+            <a:schemeClr val="accent1"/>
+          </a:effectRef>
+          <a:fontRef idx="minor">
+            <a:schemeClr val="lt1"/>
+          </a:fontRef>
+        </p:style>
+        <p:txBody>
+          <a:bodyPr rtlCol="0" anchor="ctr"/>
+          <a:lstStyle/>
+          <a:p>
+            <a:pPr algn="ctr"/>
+            <a:endParaRPr lang="en-NZ"/>
+          </a:p>
+        </p:txBody>
+      </p:sp>
+      <p:cxnSp>
+        <p:nvCxnSpPr>
+          <p:cNvPr id="109" name="Straight Arrow Connector 108">
+            <a:extLst>
+              <a:ext uri="{FF2B5EF4-FFF2-40B4-BE49-F238E27FC236}">
+                <a16:creationId xmlns:a16="http://schemas.microsoft.com/office/drawing/2014/main" id="{EDCFCDA7-9527-4972-8EFA-700610A7D54A}"/>
+              </a:ext>
+            </a:extLst>
+          </p:cNvPr>
+          <p:cNvCxnSpPr/>
+          <p:nvPr/>
+        </p:nvCxnSpPr>
+        <p:spPr>
+          <a:xfrm>
+            <a:off x="4238625" y="1230436"/>
+            <a:ext cx="438150" cy="0"/>
+          </a:xfrm>
+          <a:prstGeom prst="straightConnector1">
+            <a:avLst/>
+          </a:prstGeom>
+          <a:ln w="50800">
+            <a:tailEnd type="triangle"/>
+          </a:ln>
+        </p:spPr>
+        <p:style>
+          <a:lnRef idx="2">
+            <a:schemeClr val="accent1"/>
+          </a:lnRef>
+          <a:fillRef idx="0">
+            <a:schemeClr val="accent1"/>
+          </a:fillRef>
+          <a:effectRef idx="1">
+            <a:schemeClr val="accent1"/>
+          </a:effectRef>
+          <a:fontRef idx="minor">
+            <a:schemeClr val="tx1"/>
+          </a:fontRef>
+        </p:style>
+      </p:cxnSp>
+      <p:grpSp>
+        <p:nvGrpSpPr>
+          <p:cNvPr id="127" name="Group 126">
+            <a:extLst>
+              <a:ext uri="{FF2B5EF4-FFF2-40B4-BE49-F238E27FC236}">
+                <a16:creationId xmlns:a16="http://schemas.microsoft.com/office/drawing/2014/main" id="{59E9F60C-BB89-F8B2-AA96-D6A8D55A72F4}"/>
+              </a:ext>
+            </a:extLst>
+          </p:cNvPr>
+          <p:cNvGrpSpPr/>
+          <p:nvPr/>
+        </p:nvGrpSpPr>
+        <p:grpSpPr>
+          <a:xfrm>
+            <a:off x="1988545" y="485775"/>
+            <a:ext cx="4900807" cy="300265"/>
+            <a:chOff x="1988545" y="485775"/>
+            <a:chExt cx="4900807" cy="300265"/>
+          </a:xfrm>
+        </p:grpSpPr>
+        <p:cxnSp>
+          <p:nvCxnSpPr>
+            <p:cNvPr id="110" name="Straight Arrow Connector 109">
+              <a:extLst>
+                <a:ext uri="{FF2B5EF4-FFF2-40B4-BE49-F238E27FC236}">
+                  <a16:creationId xmlns:a16="http://schemas.microsoft.com/office/drawing/2014/main" id="{99E3E61D-190E-F177-41CB-A19B747F2E8D}"/>
+                </a:ext>
+              </a:extLst>
+            </p:cNvPr>
+            <p:cNvCxnSpPr>
+              <a:cxnSpLocks/>
+            </p:cNvCxnSpPr>
+            <p:nvPr/>
+          </p:nvCxnSpPr>
+          <p:spPr>
+            <a:xfrm>
+              <a:off x="5147463" y="485775"/>
+              <a:ext cx="0" cy="300265"/>
+            </a:xfrm>
+            <a:prstGeom prst="straightConnector1">
+              <a:avLst/>
+            </a:prstGeom>
+            <a:ln w="50800">
+              <a:tailEnd type="triangle"/>
+            </a:ln>
+          </p:spPr>
+          <p:style>
+            <a:lnRef idx="2">
+              <a:schemeClr val="accent1"/>
+            </a:lnRef>
+            <a:fillRef idx="0">
+              <a:schemeClr val="accent1"/>
+            </a:fillRef>
+            <a:effectRef idx="1">
+              <a:schemeClr val="accent1"/>
+            </a:effectRef>
+            <a:fontRef idx="minor">
+              <a:schemeClr val="tx1"/>
+            </a:fontRef>
+          </p:style>
+        </p:cxnSp>
+        <p:cxnSp>
+          <p:nvCxnSpPr>
+            <p:cNvPr id="115" name="Straight Arrow Connector 114">
+              <a:extLst>
+                <a:ext uri="{FF2B5EF4-FFF2-40B4-BE49-F238E27FC236}">
+                  <a16:creationId xmlns:a16="http://schemas.microsoft.com/office/drawing/2014/main" id="{911D479C-B96C-5FCA-4EEB-64F8BA9B45E0}"/>
+                </a:ext>
+              </a:extLst>
+            </p:cNvPr>
+            <p:cNvCxnSpPr>
+              <a:cxnSpLocks/>
+            </p:cNvCxnSpPr>
+            <p:nvPr/>
+          </p:nvCxnSpPr>
+          <p:spPr>
+            <a:xfrm>
+              <a:off x="2007997" y="485775"/>
+              <a:ext cx="0" cy="300265"/>
+            </a:xfrm>
+            <a:prstGeom prst="straightConnector1">
+              <a:avLst/>
+            </a:prstGeom>
+            <a:ln w="50800">
+              <a:tailEnd type="triangle"/>
+            </a:ln>
+          </p:spPr>
+          <p:style>
+            <a:lnRef idx="2">
+              <a:schemeClr val="accent1"/>
+            </a:lnRef>
+            <a:fillRef idx="0">
+              <a:schemeClr val="accent1"/>
+            </a:fillRef>
+            <a:effectRef idx="1">
+              <a:schemeClr val="accent1"/>
+            </a:effectRef>
+            <a:fontRef idx="minor">
+              <a:schemeClr val="tx1"/>
+            </a:fontRef>
+          </p:style>
+        </p:cxnSp>
+        <p:cxnSp>
+          <p:nvCxnSpPr>
+            <p:cNvPr id="117" name="Straight Connector 116">
+              <a:extLst>
+                <a:ext uri="{FF2B5EF4-FFF2-40B4-BE49-F238E27FC236}">
+                  <a16:creationId xmlns:a16="http://schemas.microsoft.com/office/drawing/2014/main" id="{9F88C856-49AB-8A20-0FE0-88848E3694AF}"/>
+                </a:ext>
+              </a:extLst>
+            </p:cNvPr>
+            <p:cNvCxnSpPr>
+              <a:cxnSpLocks/>
+            </p:cNvCxnSpPr>
+            <p:nvPr/>
+          </p:nvCxnSpPr>
+          <p:spPr>
+            <a:xfrm>
+              <a:off x="1988545" y="485775"/>
+              <a:ext cx="4900807" cy="0"/>
+            </a:xfrm>
+            <a:prstGeom prst="line">
+              <a:avLst/>
+            </a:prstGeom>
+            <a:ln w="50800"/>
+          </p:spPr>
+          <p:style>
+            <a:lnRef idx="2">
+              <a:schemeClr val="accent1"/>
+            </a:lnRef>
+            <a:fillRef idx="0">
+              <a:schemeClr val="accent1"/>
+            </a:fillRef>
+            <a:effectRef idx="1">
+              <a:schemeClr val="accent1"/>
+            </a:effectRef>
+            <a:fontRef idx="minor">
+              <a:schemeClr val="tx1"/>
+            </a:fontRef>
+          </p:style>
+        </p:cxnSp>
+        <p:cxnSp>
+          <p:nvCxnSpPr>
+            <p:cNvPr id="120" name="Straight Connector 119">
+              <a:extLst>
+                <a:ext uri="{FF2B5EF4-FFF2-40B4-BE49-F238E27FC236}">
+                  <a16:creationId xmlns:a16="http://schemas.microsoft.com/office/drawing/2014/main" id="{A693C4A9-A1DD-089C-F323-0210CA68D00E}"/>
+                </a:ext>
+              </a:extLst>
+            </p:cNvPr>
+            <p:cNvCxnSpPr>
+              <a:cxnSpLocks/>
+            </p:cNvCxnSpPr>
+            <p:nvPr/>
+          </p:nvCxnSpPr>
+          <p:spPr>
+            <a:xfrm>
+              <a:off x="6869900" y="485775"/>
+              <a:ext cx="0" cy="209550"/>
+            </a:xfrm>
+            <a:prstGeom prst="line">
+              <a:avLst/>
+            </a:prstGeom>
+            <a:ln w="50800"/>
+          </p:spPr>
+          <p:style>
+            <a:lnRef idx="2">
+              <a:schemeClr val="accent1"/>
+            </a:lnRef>
+            <a:fillRef idx="0">
+              <a:schemeClr val="accent1"/>
+            </a:fillRef>
+            <a:effectRef idx="1">
+              <a:schemeClr val="accent1"/>
+            </a:effectRef>
+            <a:fontRef idx="minor">
+              <a:schemeClr val="tx1"/>
+            </a:fontRef>
+          </p:style>
+        </p:cxnSp>
+      </p:grpSp>
+      <p:sp>
+        <p:nvSpPr>
+          <p:cNvPr id="123" name="Pentagon 122">
+            <a:extLst>
+              <a:ext uri="{FF2B5EF4-FFF2-40B4-BE49-F238E27FC236}">
+                <a16:creationId xmlns:a16="http://schemas.microsoft.com/office/drawing/2014/main" id="{F331B2C8-AA66-BBBF-D20C-C25B91F20385}"/>
+              </a:ext>
+            </a:extLst>
+          </p:cNvPr>
+          <p:cNvSpPr/>
+          <p:nvPr/>
+        </p:nvSpPr>
+        <p:spPr>
+          <a:xfrm>
+            <a:off x="9916296" y="2247723"/>
+            <a:ext cx="284913" cy="271346"/>
+          </a:xfrm>
+          <a:prstGeom prst="pentagon">
+            <a:avLst/>
+          </a:prstGeom>
+          <a:solidFill>
+            <a:schemeClr val="bg1"/>
+          </a:solidFill>
+        </p:spPr>
+        <p:style>
+          <a:lnRef idx="2">
+            <a:schemeClr val="accent1">
+              <a:shade val="15000"/>
+            </a:schemeClr>
+          </a:lnRef>
+          <a:fillRef idx="1">
+            <a:schemeClr val="accent1"/>
+          </a:fillRef>
+          <a:effectRef idx="0">
+            <a:schemeClr val="accent1"/>
+          </a:effectRef>
+          <a:fontRef idx="minor">
+            <a:schemeClr val="lt1"/>
+          </a:fontRef>
+        </p:style>
+        <p:txBody>
+          <a:bodyPr rtlCol="0" anchor="ctr"/>
+          <a:lstStyle/>
+          <a:p>
+            <a:pPr algn="ctr"/>
+            <a:endParaRPr lang="en-NZ"/>
+          </a:p>
+        </p:txBody>
+      </p:sp>
+      <p:sp>
+        <p:nvSpPr>
+          <p:cNvPr id="124" name="TextBox 123">
+            <a:extLst>
+              <a:ext uri="{FF2B5EF4-FFF2-40B4-BE49-F238E27FC236}">
+                <a16:creationId xmlns:a16="http://schemas.microsoft.com/office/drawing/2014/main" id="{4DCCEC0F-A13D-4ABE-2FD1-3ACA61EBD4A0}"/>
+              </a:ext>
+            </a:extLst>
+          </p:cNvPr>
+          <p:cNvSpPr txBox="1"/>
+          <p:nvPr/>
+        </p:nvSpPr>
+        <p:spPr>
+          <a:xfrm>
+            <a:off x="10283603" y="2106615"/>
+            <a:ext cx="1189749" cy="584775"/>
+          </a:xfrm>
+          <a:prstGeom prst="rect">
+            <a:avLst/>
+          </a:prstGeom>
+          <a:noFill/>
+        </p:spPr>
+        <p:txBody>
+          <a:bodyPr wrap="none" rtlCol="0">
+            <a:spAutoFit/>
+          </a:bodyPr>
+          <a:lstStyle/>
+          <a:p>
+            <a:pPr algn="ctr"/>
+            <a:r>
+              <a:rPr lang="en-NZ" sz="1600" dirty="0"/>
+              <a:t>Consumer/</a:t>
+            </a:r>
+          </a:p>
+          <a:p>
+            <a:pPr algn="ctr"/>
+            <a:r>
+              <a:rPr lang="en-NZ" sz="1600" dirty="0"/>
+              <a:t>Sensor</a:t>
+            </a:r>
+          </a:p>
+        </p:txBody>
+      </p:sp>
+      <p:sp>
+        <p:nvSpPr>
+          <p:cNvPr id="125" name="Rectangle 124">
+            <a:extLst>
+              <a:ext uri="{FF2B5EF4-FFF2-40B4-BE49-F238E27FC236}">
+                <a16:creationId xmlns:a16="http://schemas.microsoft.com/office/drawing/2014/main" id="{DA0EB2A9-476C-6698-7FC1-C0C1065D8627}"/>
+              </a:ext>
+            </a:extLst>
+          </p:cNvPr>
+          <p:cNvSpPr/>
+          <p:nvPr/>
+        </p:nvSpPr>
+        <p:spPr>
+          <a:xfrm>
+            <a:off x="9931752" y="2881727"/>
+            <a:ext cx="254000" cy="254000"/>
+          </a:xfrm>
+          <a:prstGeom prst="rect">
+            <a:avLst/>
+          </a:prstGeom>
+          <a:solidFill>
+            <a:schemeClr val="bg1"/>
+          </a:solidFill>
+        </p:spPr>
+        <p:style>
+          <a:lnRef idx="2">
+            <a:schemeClr val="accent1">
+              <a:shade val="15000"/>
+            </a:schemeClr>
+          </a:lnRef>
+          <a:fillRef idx="1">
+            <a:schemeClr val="accent1"/>
+          </a:fillRef>
+          <a:effectRef idx="0">
+            <a:schemeClr val="accent1"/>
+          </a:effectRef>
+          <a:fontRef idx="minor">
+            <a:schemeClr val="lt1"/>
+          </a:fontRef>
+        </p:style>
+        <p:txBody>
+          <a:bodyPr rtlCol="0" anchor="ctr"/>
+          <a:lstStyle/>
+          <a:p>
+            <a:pPr algn="ctr"/>
+            <a:endParaRPr lang="en-NZ" dirty="0"/>
+          </a:p>
+        </p:txBody>
+      </p:sp>
+      <p:sp>
+        <p:nvSpPr>
+          <p:cNvPr id="126" name="TextBox 125">
+            <a:extLst>
+              <a:ext uri="{FF2B5EF4-FFF2-40B4-BE49-F238E27FC236}">
+                <a16:creationId xmlns:a16="http://schemas.microsoft.com/office/drawing/2014/main" id="{22659C98-B7CE-B8BC-E185-05F2C4C39258}"/>
+              </a:ext>
+            </a:extLst>
+          </p:cNvPr>
+          <p:cNvSpPr txBox="1"/>
+          <p:nvPr/>
+        </p:nvSpPr>
+        <p:spPr>
+          <a:xfrm>
+            <a:off x="10382929" y="2841682"/>
+            <a:ext cx="995786" cy="338554"/>
+          </a:xfrm>
+          <a:prstGeom prst="rect">
+            <a:avLst/>
+          </a:prstGeom>
+          <a:noFill/>
+        </p:spPr>
+        <p:txBody>
+          <a:bodyPr wrap="none" rtlCol="0">
+            <a:spAutoFit/>
+          </a:bodyPr>
+          <a:lstStyle/>
+          <a:p>
+            <a:pPr algn="ctr"/>
+            <a:r>
+              <a:rPr lang="en-NZ" sz="1600" dirty="0"/>
+              <a:t>Producer</a:t>
+            </a:r>
+          </a:p>
+        </p:txBody>
+      </p:sp>
+      <p:cxnSp>
+        <p:nvCxnSpPr>
+          <p:cNvPr id="133" name="Straight Arrow Connector 132">
+            <a:extLst>
+              <a:ext uri="{FF2B5EF4-FFF2-40B4-BE49-F238E27FC236}">
+                <a16:creationId xmlns:a16="http://schemas.microsoft.com/office/drawing/2014/main" id="{BC2A1560-804B-ACE8-07C9-5654ED449A21}"/>
+              </a:ext>
+            </a:extLst>
+          </p:cNvPr>
+          <p:cNvCxnSpPr/>
+          <p:nvPr/>
+        </p:nvCxnSpPr>
+        <p:spPr>
+          <a:xfrm>
+            <a:off x="4238625" y="2683576"/>
+            <a:ext cx="438150" cy="0"/>
+          </a:xfrm>
+          <a:prstGeom prst="straightConnector1">
+            <a:avLst/>
+          </a:prstGeom>
+          <a:ln w="50800">
+            <a:tailEnd type="triangle"/>
+          </a:ln>
+        </p:spPr>
+        <p:style>
+          <a:lnRef idx="2">
+            <a:schemeClr val="accent1"/>
+          </a:lnRef>
+          <a:fillRef idx="0">
+            <a:schemeClr val="accent1"/>
+          </a:fillRef>
+          <a:effectRef idx="1">
+            <a:schemeClr val="accent1"/>
+          </a:effectRef>
+          <a:fontRef idx="minor">
+            <a:schemeClr val="tx1"/>
+          </a:fontRef>
+        </p:style>
+      </p:cxnSp>
+      <p:cxnSp>
+        <p:nvCxnSpPr>
+          <p:cNvPr id="139" name="Straight Arrow Connector 138">
+            <a:extLst>
+              <a:ext uri="{FF2B5EF4-FFF2-40B4-BE49-F238E27FC236}">
+                <a16:creationId xmlns:a16="http://schemas.microsoft.com/office/drawing/2014/main" id="{1F382620-E39B-CADB-9D67-8FF8562D962F}"/>
+              </a:ext>
+            </a:extLst>
+          </p:cNvPr>
+          <p:cNvCxnSpPr/>
+          <p:nvPr/>
+        </p:nvCxnSpPr>
+        <p:spPr>
+          <a:xfrm>
+            <a:off x="4219873" y="4285144"/>
+            <a:ext cx="438150" cy="0"/>
+          </a:xfrm>
+          <a:prstGeom prst="straightConnector1">
+            <a:avLst/>
+          </a:prstGeom>
+          <a:ln w="50800">
+            <a:tailEnd type="triangle"/>
+          </a:ln>
+        </p:spPr>
+        <p:style>
+          <a:lnRef idx="2">
+            <a:schemeClr val="accent1"/>
+          </a:lnRef>
+          <a:fillRef idx="0">
+            <a:schemeClr val="accent1"/>
+          </a:fillRef>
+          <a:effectRef idx="1">
+            <a:schemeClr val="accent1"/>
+          </a:effectRef>
+          <a:fontRef idx="minor">
+            <a:schemeClr val="tx1"/>
+          </a:fontRef>
+        </p:style>
+      </p:cxnSp>
+      <p:cxnSp>
+        <p:nvCxnSpPr>
+          <p:cNvPr id="142" name="Straight Arrow Connector 141">
+            <a:extLst>
+              <a:ext uri="{FF2B5EF4-FFF2-40B4-BE49-F238E27FC236}">
+                <a16:creationId xmlns:a16="http://schemas.microsoft.com/office/drawing/2014/main" id="{7A4C815D-D652-98AD-6891-D3A1ED1A3026}"/>
+              </a:ext>
+            </a:extLst>
+          </p:cNvPr>
+          <p:cNvCxnSpPr>
+            <a:cxnSpLocks/>
+          </p:cNvCxnSpPr>
+          <p:nvPr/>
+        </p:nvCxnSpPr>
+        <p:spPr>
+          <a:xfrm>
+            <a:off x="1988545" y="3495133"/>
+            <a:ext cx="0" cy="300265"/>
+          </a:xfrm>
+          <a:prstGeom prst="straightConnector1">
+            <a:avLst/>
+          </a:prstGeom>
+          <a:ln w="50800">
+            <a:tailEnd type="triangle"/>
+          </a:ln>
+        </p:spPr>
+        <p:style>
+          <a:lnRef idx="2">
+            <a:schemeClr val="accent1"/>
+          </a:lnRef>
+          <a:fillRef idx="0">
+            <a:schemeClr val="accent1"/>
+          </a:fillRef>
+          <a:effectRef idx="1">
+            <a:schemeClr val="accent1"/>
+          </a:effectRef>
+          <a:fontRef idx="minor">
+            <a:schemeClr val="tx1"/>
+          </a:fontRef>
+        </p:style>
+      </p:cxnSp>
+      <p:cxnSp>
+        <p:nvCxnSpPr>
+          <p:cNvPr id="143" name="Straight Connector 142">
+            <a:extLst>
+              <a:ext uri="{FF2B5EF4-FFF2-40B4-BE49-F238E27FC236}">
+                <a16:creationId xmlns:a16="http://schemas.microsoft.com/office/drawing/2014/main" id="{548E4C72-2D7D-FB2C-B59A-5A85BF2ED052}"/>
+              </a:ext>
+            </a:extLst>
+          </p:cNvPr>
+          <p:cNvCxnSpPr>
+            <a:cxnSpLocks/>
+          </p:cNvCxnSpPr>
+          <p:nvPr/>
+        </p:nvCxnSpPr>
+        <p:spPr>
+          <a:xfrm>
+            <a:off x="1969093" y="3495133"/>
+            <a:ext cx="4900807" cy="0"/>
+          </a:xfrm>
+          <a:prstGeom prst="line">
+            <a:avLst/>
+          </a:prstGeom>
+          <a:ln w="50800"/>
+        </p:spPr>
+        <p:style>
+          <a:lnRef idx="2">
+            <a:schemeClr val="accent1"/>
+          </a:lnRef>
+          <a:fillRef idx="0">
+            <a:schemeClr val="accent1"/>
+          </a:fillRef>
+          <a:effectRef idx="1">
+            <a:schemeClr val="accent1"/>
+          </a:effectRef>
+          <a:fontRef idx="minor">
+            <a:schemeClr val="tx1"/>
+          </a:fontRef>
+        </p:style>
+      </p:cxnSp>
+      <p:cxnSp>
+        <p:nvCxnSpPr>
+          <p:cNvPr id="144" name="Straight Connector 143">
+            <a:extLst>
+              <a:ext uri="{FF2B5EF4-FFF2-40B4-BE49-F238E27FC236}">
+                <a16:creationId xmlns:a16="http://schemas.microsoft.com/office/drawing/2014/main" id="{DFFCE069-C9C1-78A6-A2D1-63A78E7E5ECF}"/>
+              </a:ext>
+            </a:extLst>
+          </p:cNvPr>
+          <p:cNvCxnSpPr>
+            <a:cxnSpLocks/>
+          </p:cNvCxnSpPr>
+          <p:nvPr/>
+        </p:nvCxnSpPr>
+        <p:spPr>
+          <a:xfrm>
+            <a:off x="6850448" y="3495133"/>
+            <a:ext cx="0" cy="209550"/>
+          </a:xfrm>
+          <a:prstGeom prst="line">
+            <a:avLst/>
+          </a:prstGeom>
+          <a:ln w="50800"/>
+        </p:spPr>
+        <p:style>
+          <a:lnRef idx="2">
+            <a:schemeClr val="accent1"/>
+          </a:lnRef>
+          <a:fillRef idx="0">
+            <a:schemeClr val="accent1"/>
+          </a:fillRef>
+          <a:effectRef idx="1">
+            <a:schemeClr val="accent1"/>
+          </a:effectRef>
+          <a:fontRef idx="minor">
+            <a:schemeClr val="tx1"/>
+          </a:fontRef>
+        </p:style>
+      </p:cxnSp>
+      <p:sp>
+        <p:nvSpPr>
+          <p:cNvPr id="145" name="TextBox 144">
+            <a:extLst>
+              <a:ext uri="{FF2B5EF4-FFF2-40B4-BE49-F238E27FC236}">
+                <a16:creationId xmlns:a16="http://schemas.microsoft.com/office/drawing/2014/main" id="{20AD6FF6-D7FB-6DF3-EE80-0A66D7A198AB}"/>
+              </a:ext>
+            </a:extLst>
+          </p:cNvPr>
+          <p:cNvSpPr txBox="1"/>
+          <p:nvPr/>
+        </p:nvSpPr>
+        <p:spPr>
+          <a:xfrm>
+            <a:off x="7556470" y="3992756"/>
+            <a:ext cx="1318374" cy="584775"/>
+          </a:xfrm>
+          <a:prstGeom prst="rect">
+            <a:avLst/>
+          </a:prstGeom>
+          <a:noFill/>
+        </p:spPr>
+        <p:txBody>
+          <a:bodyPr wrap="none" rtlCol="0">
+            <a:spAutoFit/>
+          </a:bodyPr>
+          <a:lstStyle/>
+          <a:p>
+            <a:pPr algn="ctr"/>
+            <a:r>
+              <a:rPr lang="en-NZ" sz="1600" dirty="0"/>
+              <a:t>Discriminate</a:t>
+            </a:r>
+          </a:p>
+          <a:p>
+            <a:pPr algn="ctr"/>
+            <a:r>
+              <a:rPr lang="en-NZ" sz="1600" dirty="0"/>
+              <a:t>equilibrium</a:t>
+            </a:r>
+          </a:p>
+        </p:txBody>
+      </p:sp>
+      <p:sp>
+        <p:nvSpPr>
+          <p:cNvPr id="147" name="TextBox 146">
+            <a:extLst>
+              <a:ext uri="{FF2B5EF4-FFF2-40B4-BE49-F238E27FC236}">
+                <a16:creationId xmlns:a16="http://schemas.microsoft.com/office/drawing/2014/main" id="{857E8C01-4A3B-E77B-2FEA-CE454CA56D5C}"/>
+              </a:ext>
+            </a:extLst>
+          </p:cNvPr>
+          <p:cNvSpPr txBox="1"/>
+          <p:nvPr/>
+        </p:nvSpPr>
+        <p:spPr>
+          <a:xfrm>
+            <a:off x="7485939" y="928915"/>
+            <a:ext cx="1459438" cy="584775"/>
+          </a:xfrm>
+          <a:prstGeom prst="rect">
+            <a:avLst/>
+          </a:prstGeom>
+          <a:noFill/>
+        </p:spPr>
+        <p:txBody>
+          <a:bodyPr wrap="none" rtlCol="0">
+            <a:spAutoFit/>
+          </a:bodyPr>
+          <a:lstStyle/>
+          <a:p>
+            <a:pPr algn="ctr"/>
+            <a:r>
+              <a:rPr lang="en-NZ" sz="1600" dirty="0"/>
+              <a:t>Indiscriminate</a:t>
+            </a:r>
+          </a:p>
+          <a:p>
+            <a:pPr algn="ctr"/>
+            <a:r>
+              <a:rPr lang="en-NZ" sz="1600" dirty="0"/>
+              <a:t>equilibrium</a:t>
+            </a:r>
+          </a:p>
+        </p:txBody>
+      </p:sp>
+      <p:sp>
+        <p:nvSpPr>
+          <p:cNvPr id="148" name="TextBox 147">
+            <a:extLst>
+              <a:ext uri="{FF2B5EF4-FFF2-40B4-BE49-F238E27FC236}">
+                <a16:creationId xmlns:a16="http://schemas.microsoft.com/office/drawing/2014/main" id="{80E2A1F2-64E4-9AC2-4DDA-9CED9E5F2D98}"/>
+              </a:ext>
+            </a:extLst>
+          </p:cNvPr>
+          <p:cNvSpPr txBox="1"/>
+          <p:nvPr/>
+        </p:nvSpPr>
+        <p:spPr>
+          <a:xfrm>
+            <a:off x="7556471" y="2405551"/>
+            <a:ext cx="1318373" cy="584775"/>
+          </a:xfrm>
+          <a:prstGeom prst="rect">
+            <a:avLst/>
+          </a:prstGeom>
+          <a:noFill/>
+        </p:spPr>
+        <p:txBody>
+          <a:bodyPr wrap="none" rtlCol="0">
+            <a:spAutoFit/>
+          </a:bodyPr>
+          <a:lstStyle/>
+          <a:p>
+            <a:pPr algn="ctr"/>
+            <a:r>
+              <a:rPr lang="en-NZ" sz="1600" dirty="0"/>
+              <a:t>Discriminate</a:t>
+            </a:r>
+          </a:p>
+          <a:p>
+            <a:pPr algn="ctr"/>
+            <a:r>
+              <a:rPr lang="en-NZ" sz="1600" dirty="0"/>
+              <a:t>gradient</a:t>
+            </a:r>
+          </a:p>
+        </p:txBody>
+      </p:sp>
+      <p:sp>
+        <p:nvSpPr>
+          <p:cNvPr id="149" name="TextBox 148">
+            <a:extLst>
+              <a:ext uri="{FF2B5EF4-FFF2-40B4-BE49-F238E27FC236}">
+                <a16:creationId xmlns:a16="http://schemas.microsoft.com/office/drawing/2014/main" id="{A219ADC8-C991-CAE4-174B-C2FDF7DA0BD2}"/>
+              </a:ext>
+            </a:extLst>
+          </p:cNvPr>
+          <p:cNvSpPr txBox="1"/>
+          <p:nvPr/>
+        </p:nvSpPr>
+        <p:spPr>
+          <a:xfrm>
+            <a:off x="7485939" y="5587534"/>
+            <a:ext cx="1459438" cy="584775"/>
+          </a:xfrm>
+          <a:prstGeom prst="rect">
+            <a:avLst/>
+          </a:prstGeom>
+          <a:noFill/>
+        </p:spPr>
+        <p:txBody>
+          <a:bodyPr wrap="none" rtlCol="0">
+            <a:spAutoFit/>
+          </a:bodyPr>
+          <a:lstStyle/>
+          <a:p>
+            <a:pPr algn="ctr"/>
+            <a:r>
+              <a:rPr lang="en-NZ" sz="1600" dirty="0"/>
+              <a:t>Indiscriminate</a:t>
+            </a:r>
+          </a:p>
+          <a:p>
+            <a:pPr algn="ctr"/>
+            <a:r>
+              <a:rPr lang="en-NZ" sz="1600" dirty="0"/>
+              <a:t>gradient</a:t>
+            </a:r>
+          </a:p>
+        </p:txBody>
+      </p:sp>
+      <p:cxnSp>
+        <p:nvCxnSpPr>
+          <p:cNvPr id="150" name="Straight Connector 149">
+            <a:extLst>
+              <a:ext uri="{FF2B5EF4-FFF2-40B4-BE49-F238E27FC236}">
+                <a16:creationId xmlns:a16="http://schemas.microsoft.com/office/drawing/2014/main" id="{D19D0707-B66B-802E-950A-292E0ED18B4D}"/>
+              </a:ext>
+            </a:extLst>
+          </p:cNvPr>
+          <p:cNvCxnSpPr>
+            <a:cxnSpLocks/>
+          </p:cNvCxnSpPr>
+          <p:nvPr/>
+        </p:nvCxnSpPr>
+        <p:spPr>
+          <a:xfrm>
+            <a:off x="3732407" y="485775"/>
+            <a:ext cx="0" cy="209550"/>
+          </a:xfrm>
+          <a:prstGeom prst="line">
+            <a:avLst/>
+          </a:prstGeom>
+          <a:ln w="50800"/>
+        </p:spPr>
+        <p:style>
+          <a:lnRef idx="2">
+            <a:schemeClr val="accent1"/>
+          </a:lnRef>
+          <a:fillRef idx="0">
+            <a:schemeClr val="accent1"/>
+          </a:fillRef>
+          <a:effectRef idx="1">
+            <a:schemeClr val="accent1"/>
+          </a:effectRef>
+          <a:fontRef idx="minor">
+            <a:schemeClr val="tx1"/>
+          </a:fontRef>
+        </p:style>
+      </p:cxnSp>
+      <p:pic>
+        <p:nvPicPr>
+          <p:cNvPr id="151" name="Picture 150" descr="A skull and crossbones on a black background&#10;&#10;AI-generated content may be incorrect.">
+            <a:extLst>
+              <a:ext uri="{FF2B5EF4-FFF2-40B4-BE49-F238E27FC236}">
+                <a16:creationId xmlns:a16="http://schemas.microsoft.com/office/drawing/2014/main" id="{5EC80FAC-AB64-12BE-F4BE-2DC677F0D921}"/>
+              </a:ext>
+            </a:extLst>
+          </p:cNvPr>
+          <p:cNvPicPr>
+            <a:picLocks noChangeAspect="1"/>
+          </p:cNvPicPr>
+          <p:nvPr/>
+        </p:nvPicPr>
+        <p:blipFill>
+          <a:blip r:embed="rId2">
+            <a:extLst>
+              <a:ext uri="{28A0092B-C50C-407E-A947-70E740481C1C}">
+                <a14:useLocalDpi xmlns:a14="http://schemas.microsoft.com/office/drawing/2010/main" val="0"/>
+              </a:ext>
+            </a:extLst>
+          </a:blip>
+          <a:stretch>
+            <a:fillRect/>
+          </a:stretch>
+        </p:blipFill>
+        <p:spPr>
+          <a:xfrm>
+            <a:off x="776450" y="1054424"/>
+            <a:ext cx="360902" cy="346852"/>
+          </a:xfrm>
+          <a:prstGeom prst="rect">
+            <a:avLst/>
+          </a:prstGeom>
+        </p:spPr>
+      </p:pic>
+      <p:pic>
+        <p:nvPicPr>
+          <p:cNvPr id="152" name="Picture 151" descr="A skull and crossbones on a black background&#10;&#10;AI-generated content may be incorrect.">
+            <a:extLst>
+              <a:ext uri="{FF2B5EF4-FFF2-40B4-BE49-F238E27FC236}">
+                <a16:creationId xmlns:a16="http://schemas.microsoft.com/office/drawing/2014/main" id="{795A43C3-EDEE-FDC7-4C79-08617547B770}"/>
+              </a:ext>
+            </a:extLst>
+          </p:cNvPr>
+          <p:cNvPicPr>
+            <a:picLocks noChangeAspect="1"/>
+          </p:cNvPicPr>
+          <p:nvPr/>
+        </p:nvPicPr>
+        <p:blipFill>
+          <a:blip r:embed="rId2">
+            <a:extLst>
+              <a:ext uri="{28A0092B-C50C-407E-A947-70E740481C1C}">
+                <a14:useLocalDpi xmlns:a14="http://schemas.microsoft.com/office/drawing/2010/main" val="0"/>
+              </a:ext>
+            </a:extLst>
+          </a:blip>
+          <a:stretch>
+            <a:fillRect/>
+          </a:stretch>
+        </p:blipFill>
+        <p:spPr>
+          <a:xfrm>
+            <a:off x="776450" y="5695026"/>
+            <a:ext cx="360902" cy="346852"/>
+          </a:xfrm>
+          <a:prstGeom prst="rect">
+            <a:avLst/>
+          </a:prstGeom>
+        </p:spPr>
+      </p:pic>
+      <p:grpSp>
+        <p:nvGrpSpPr>
+          <p:cNvPr id="164" name="Group 163">
+            <a:extLst>
+              <a:ext uri="{FF2B5EF4-FFF2-40B4-BE49-F238E27FC236}">
+                <a16:creationId xmlns:a16="http://schemas.microsoft.com/office/drawing/2014/main" id="{18BDB3E9-208B-B28C-48B0-B3306BBE036F}"/>
+              </a:ext>
+            </a:extLst>
+          </p:cNvPr>
+          <p:cNvGrpSpPr/>
+          <p:nvPr/>
+        </p:nvGrpSpPr>
+        <p:grpSpPr>
+          <a:xfrm>
+            <a:off x="1944375" y="5055984"/>
+            <a:ext cx="1811803" cy="300265"/>
+            <a:chOff x="1944375" y="5055984"/>
+            <a:chExt cx="1811803" cy="300265"/>
+          </a:xfrm>
+        </p:grpSpPr>
+        <p:cxnSp>
+          <p:nvCxnSpPr>
+            <p:cNvPr id="153" name="Straight Arrow Connector 152">
+              <a:extLst>
+                <a:ext uri="{FF2B5EF4-FFF2-40B4-BE49-F238E27FC236}">
+                  <a16:creationId xmlns:a16="http://schemas.microsoft.com/office/drawing/2014/main" id="{9D3F39DA-43C8-7C51-7294-AC5751169B4E}"/>
+                </a:ext>
+              </a:extLst>
+            </p:cNvPr>
+            <p:cNvCxnSpPr>
+              <a:cxnSpLocks/>
+            </p:cNvCxnSpPr>
+            <p:nvPr/>
+          </p:nvCxnSpPr>
+          <p:spPr>
+            <a:xfrm>
+              <a:off x="1969093" y="5055984"/>
+              <a:ext cx="0" cy="300265"/>
+            </a:xfrm>
+            <a:prstGeom prst="straightConnector1">
+              <a:avLst/>
+            </a:prstGeom>
+            <a:ln w="50800">
+              <a:tailEnd type="triangle"/>
+            </a:ln>
+          </p:spPr>
+          <p:style>
+            <a:lnRef idx="2">
+              <a:schemeClr val="accent1"/>
+            </a:lnRef>
+            <a:fillRef idx="0">
+              <a:schemeClr val="accent1"/>
+            </a:fillRef>
+            <a:effectRef idx="1">
+              <a:schemeClr val="accent1"/>
+            </a:effectRef>
+            <a:fontRef idx="minor">
+              <a:schemeClr val="tx1"/>
+            </a:fontRef>
+          </p:style>
+        </p:cxnSp>
+        <p:cxnSp>
+          <p:nvCxnSpPr>
+            <p:cNvPr id="154" name="Straight Connector 153">
+              <a:extLst>
+                <a:ext uri="{FF2B5EF4-FFF2-40B4-BE49-F238E27FC236}">
+                  <a16:creationId xmlns:a16="http://schemas.microsoft.com/office/drawing/2014/main" id="{90D98FF6-3870-4A43-BC1E-603F56D1E34D}"/>
+                </a:ext>
+              </a:extLst>
+            </p:cNvPr>
+            <p:cNvCxnSpPr>
+              <a:cxnSpLocks/>
+            </p:cNvCxnSpPr>
+            <p:nvPr/>
+          </p:nvCxnSpPr>
+          <p:spPr>
+            <a:xfrm>
+              <a:off x="3732407" y="5055984"/>
+              <a:ext cx="0" cy="209550"/>
+            </a:xfrm>
+            <a:prstGeom prst="line">
+              <a:avLst/>
+            </a:prstGeom>
+            <a:ln w="50800"/>
+          </p:spPr>
+          <p:style>
+            <a:lnRef idx="2">
+              <a:schemeClr val="accent1"/>
+            </a:lnRef>
+            <a:fillRef idx="0">
+              <a:schemeClr val="accent1"/>
+            </a:fillRef>
+            <a:effectRef idx="1">
+              <a:schemeClr val="accent1"/>
+            </a:effectRef>
+            <a:fontRef idx="minor">
+              <a:schemeClr val="tx1"/>
+            </a:fontRef>
+          </p:style>
+        </p:cxnSp>
+        <p:cxnSp>
+          <p:nvCxnSpPr>
+            <p:cNvPr id="155" name="Straight Connector 154">
+              <a:extLst>
+                <a:ext uri="{FF2B5EF4-FFF2-40B4-BE49-F238E27FC236}">
+                  <a16:creationId xmlns:a16="http://schemas.microsoft.com/office/drawing/2014/main" id="{BFED43B9-E8CB-E092-3029-BD1738275871}"/>
+                </a:ext>
+              </a:extLst>
+            </p:cNvPr>
+            <p:cNvCxnSpPr>
+              <a:cxnSpLocks/>
+            </p:cNvCxnSpPr>
+            <p:nvPr/>
+          </p:nvCxnSpPr>
+          <p:spPr>
+            <a:xfrm>
+              <a:off x="1944375" y="5055984"/>
+              <a:ext cx="1811803" cy="0"/>
+            </a:xfrm>
+            <a:prstGeom prst="line">
+              <a:avLst/>
+            </a:prstGeom>
+            <a:ln w="50800"/>
+          </p:spPr>
+          <p:style>
+            <a:lnRef idx="2">
+              <a:schemeClr val="accent1"/>
+            </a:lnRef>
+            <a:fillRef idx="0">
+              <a:schemeClr val="accent1"/>
+            </a:fillRef>
+            <a:effectRef idx="1">
+              <a:schemeClr val="accent1"/>
+            </a:effectRef>
+            <a:fontRef idx="minor">
+              <a:schemeClr val="tx1"/>
+            </a:fontRef>
+          </p:style>
+        </p:cxnSp>
+      </p:grpSp>
+      <p:cxnSp>
+        <p:nvCxnSpPr>
+          <p:cNvPr id="160" name="Straight Arrow Connector 159">
+            <a:extLst>
+              <a:ext uri="{FF2B5EF4-FFF2-40B4-BE49-F238E27FC236}">
+                <a16:creationId xmlns:a16="http://schemas.microsoft.com/office/drawing/2014/main" id="{D08378AA-0E79-FED5-F738-4092B61037D3}"/>
+              </a:ext>
+            </a:extLst>
+          </p:cNvPr>
+          <p:cNvCxnSpPr>
+            <a:cxnSpLocks/>
+          </p:cNvCxnSpPr>
+          <p:nvPr/>
+        </p:nvCxnSpPr>
+        <p:spPr>
+          <a:xfrm>
+            <a:off x="5102267" y="5033607"/>
+            <a:ext cx="0" cy="300265"/>
+          </a:xfrm>
+          <a:prstGeom prst="straightConnector1">
+            <a:avLst/>
+          </a:prstGeom>
+          <a:ln w="50800">
+            <a:tailEnd type="triangle"/>
+          </a:ln>
+        </p:spPr>
+        <p:style>
+          <a:lnRef idx="2">
+            <a:schemeClr val="accent1"/>
+          </a:lnRef>
+          <a:fillRef idx="0">
+            <a:schemeClr val="accent1"/>
+          </a:fillRef>
+          <a:effectRef idx="1">
+            <a:schemeClr val="accent1"/>
+          </a:effectRef>
+          <a:fontRef idx="minor">
+            <a:schemeClr val="tx1"/>
+          </a:fontRef>
+        </p:style>
+      </p:cxnSp>
+      <p:cxnSp>
+        <p:nvCxnSpPr>
+          <p:cNvPr id="161" name="Straight Connector 160">
+            <a:extLst>
+              <a:ext uri="{FF2B5EF4-FFF2-40B4-BE49-F238E27FC236}">
+                <a16:creationId xmlns:a16="http://schemas.microsoft.com/office/drawing/2014/main" id="{70F1657C-8BFA-F64F-F342-3FCA5B78D5FB}"/>
+              </a:ext>
+            </a:extLst>
+          </p:cNvPr>
+          <p:cNvCxnSpPr>
+            <a:cxnSpLocks/>
+          </p:cNvCxnSpPr>
+          <p:nvPr/>
+        </p:nvCxnSpPr>
+        <p:spPr>
+          <a:xfrm>
+            <a:off x="6865581" y="5033607"/>
+            <a:ext cx="0" cy="209550"/>
+          </a:xfrm>
+          <a:prstGeom prst="line">
+            <a:avLst/>
+          </a:prstGeom>
+          <a:ln w="50800"/>
+        </p:spPr>
+        <p:style>
+          <a:lnRef idx="2">
+            <a:schemeClr val="accent1"/>
+          </a:lnRef>
+          <a:fillRef idx="0">
+            <a:schemeClr val="accent1"/>
+          </a:fillRef>
+          <a:effectRef idx="1">
+            <a:schemeClr val="accent1"/>
+          </a:effectRef>
+          <a:fontRef idx="minor">
+            <a:schemeClr val="tx1"/>
+          </a:fontRef>
+        </p:style>
+      </p:cxnSp>
+      <p:cxnSp>
+        <p:nvCxnSpPr>
+          <p:cNvPr id="162" name="Straight Connector 161">
+            <a:extLst>
+              <a:ext uri="{FF2B5EF4-FFF2-40B4-BE49-F238E27FC236}">
+                <a16:creationId xmlns:a16="http://schemas.microsoft.com/office/drawing/2014/main" id="{6CC28E72-B40B-8DEF-8C16-27A59A8E50CC}"/>
+              </a:ext>
+            </a:extLst>
+          </p:cNvPr>
+          <p:cNvCxnSpPr>
+            <a:cxnSpLocks/>
+          </p:cNvCxnSpPr>
+          <p:nvPr/>
+        </p:nvCxnSpPr>
+        <p:spPr>
+          <a:xfrm>
+            <a:off x="5077549" y="5033607"/>
+            <a:ext cx="1811803" cy="0"/>
+          </a:xfrm>
+          <a:prstGeom prst="line">
+            <a:avLst/>
+          </a:prstGeom>
+          <a:ln w="50800"/>
+        </p:spPr>
+        <p:style>
+          <a:lnRef idx="2">
+            <a:schemeClr val="accent1"/>
+          </a:lnRef>
+          <a:fillRef idx="0">
+            <a:schemeClr val="accent1"/>
+          </a:fillRef>
+          <a:effectRef idx="1">
+            <a:schemeClr val="accent1"/>
+          </a:effectRef>
+          <a:fontRef idx="minor">
+            <a:schemeClr val="tx1"/>
+          </a:fontRef>
+        </p:style>
+      </p:cxnSp>
+      <p:sp>
+        <p:nvSpPr>
+          <p:cNvPr id="163" name="Rectangle 162">
+            <a:extLst>
+              <a:ext uri="{FF2B5EF4-FFF2-40B4-BE49-F238E27FC236}">
+                <a16:creationId xmlns:a16="http://schemas.microsoft.com/office/drawing/2014/main" id="{3F94BC91-2FDF-71C0-4E2A-F35E1424E0C7}"/>
+              </a:ext>
+            </a:extLst>
+          </p:cNvPr>
+          <p:cNvSpPr/>
+          <p:nvPr/>
+        </p:nvSpPr>
+        <p:spPr>
+          <a:xfrm>
+            <a:off x="9612495" y="501988"/>
+            <a:ext cx="2038371" cy="2927012"/>
+          </a:xfrm>
+          <a:prstGeom prst="rect">
+            <a:avLst/>
+          </a:prstGeom>
+          <a:noFill/>
+        </p:spPr>
+        <p:style>
+          <a:lnRef idx="2">
+            <a:schemeClr val="accent1">
+              <a:shade val="15000"/>
+            </a:schemeClr>
+          </a:lnRef>
+          <a:fillRef idx="1">
+            <a:schemeClr val="accent1"/>
+          </a:fillRef>
+          <a:effectRef idx="0">
+            <a:schemeClr val="accent1"/>
+          </a:effectRef>
+          <a:fontRef idx="minor">
+            <a:schemeClr val="lt1"/>
+          </a:fontRef>
+        </p:style>
+        <p:txBody>
+          <a:bodyPr rtlCol="0" anchor="ctr"/>
+          <a:lstStyle/>
+          <a:p>
+            <a:pPr algn="ctr"/>
+            <a:endParaRPr lang="en-NZ"/>
+          </a:p>
+        </p:txBody>
+      </p:sp>
+      <p:grpSp>
+        <p:nvGrpSpPr>
+          <p:cNvPr id="166" name="Group 165">
+            <a:extLst>
+              <a:ext uri="{FF2B5EF4-FFF2-40B4-BE49-F238E27FC236}">
+                <a16:creationId xmlns:a16="http://schemas.microsoft.com/office/drawing/2014/main" id="{5F2A4BB8-8910-F936-CAD9-7AE7E796E56A}"/>
+              </a:ext>
+            </a:extLst>
+          </p:cNvPr>
+          <p:cNvGrpSpPr/>
+          <p:nvPr/>
+        </p:nvGrpSpPr>
+        <p:grpSpPr>
+          <a:xfrm>
+            <a:off x="1963313" y="1938098"/>
+            <a:ext cx="1811803" cy="300265"/>
+            <a:chOff x="1944375" y="5055984"/>
+            <a:chExt cx="1811803" cy="300265"/>
+          </a:xfrm>
+        </p:grpSpPr>
+        <p:cxnSp>
+          <p:nvCxnSpPr>
+            <p:cNvPr id="167" name="Straight Arrow Connector 166">
+              <a:extLst>
+                <a:ext uri="{FF2B5EF4-FFF2-40B4-BE49-F238E27FC236}">
+                  <a16:creationId xmlns:a16="http://schemas.microsoft.com/office/drawing/2014/main" id="{22B5C639-566A-9A4F-63CF-7F30FB193BED}"/>
+                </a:ext>
+              </a:extLst>
+            </p:cNvPr>
+            <p:cNvCxnSpPr>
+              <a:cxnSpLocks/>
+            </p:cNvCxnSpPr>
+            <p:nvPr/>
+          </p:nvCxnSpPr>
+          <p:spPr>
+            <a:xfrm>
+              <a:off x="1969093" y="5055984"/>
+              <a:ext cx="0" cy="300265"/>
+            </a:xfrm>
+            <a:prstGeom prst="straightConnector1">
+              <a:avLst/>
+            </a:prstGeom>
+            <a:ln w="50800">
+              <a:tailEnd type="triangle"/>
+            </a:ln>
+          </p:spPr>
+          <p:style>
+            <a:lnRef idx="2">
+              <a:schemeClr val="accent1"/>
+            </a:lnRef>
+            <a:fillRef idx="0">
+              <a:schemeClr val="accent1"/>
+            </a:fillRef>
+            <a:effectRef idx="1">
+              <a:schemeClr val="accent1"/>
+            </a:effectRef>
+            <a:fontRef idx="minor">
+              <a:schemeClr val="tx1"/>
+            </a:fontRef>
+          </p:style>
+        </p:cxnSp>
+        <p:cxnSp>
+          <p:nvCxnSpPr>
+            <p:cNvPr id="168" name="Straight Connector 167">
+              <a:extLst>
+                <a:ext uri="{FF2B5EF4-FFF2-40B4-BE49-F238E27FC236}">
+                  <a16:creationId xmlns:a16="http://schemas.microsoft.com/office/drawing/2014/main" id="{26292209-DE00-7F18-4F50-8CB9562A1BA1}"/>
+                </a:ext>
+              </a:extLst>
+            </p:cNvPr>
+            <p:cNvCxnSpPr>
+              <a:cxnSpLocks/>
+            </p:cNvCxnSpPr>
+            <p:nvPr/>
+          </p:nvCxnSpPr>
+          <p:spPr>
+            <a:xfrm>
+              <a:off x="3732407" y="5055984"/>
+              <a:ext cx="0" cy="209550"/>
+            </a:xfrm>
+            <a:prstGeom prst="line">
+              <a:avLst/>
+            </a:prstGeom>
+            <a:ln w="50800"/>
+          </p:spPr>
+          <p:style>
+            <a:lnRef idx="2">
+              <a:schemeClr val="accent1"/>
+            </a:lnRef>
+            <a:fillRef idx="0">
+              <a:schemeClr val="accent1"/>
+            </a:fillRef>
+            <a:effectRef idx="1">
+              <a:schemeClr val="accent1"/>
+            </a:effectRef>
+            <a:fontRef idx="minor">
+              <a:schemeClr val="tx1"/>
+            </a:fontRef>
+          </p:style>
+        </p:cxnSp>
+        <p:cxnSp>
+          <p:nvCxnSpPr>
+            <p:cNvPr id="169" name="Straight Connector 168">
+              <a:extLst>
+                <a:ext uri="{FF2B5EF4-FFF2-40B4-BE49-F238E27FC236}">
+                  <a16:creationId xmlns:a16="http://schemas.microsoft.com/office/drawing/2014/main" id="{5734C52C-61A2-D3E9-9A05-0D98F6236B9F}"/>
+                </a:ext>
+              </a:extLst>
+            </p:cNvPr>
+            <p:cNvCxnSpPr>
+              <a:cxnSpLocks/>
+            </p:cNvCxnSpPr>
+            <p:nvPr/>
+          </p:nvCxnSpPr>
+          <p:spPr>
+            <a:xfrm>
+              <a:off x="1944375" y="5055984"/>
+              <a:ext cx="1811803" cy="0"/>
+            </a:xfrm>
+            <a:prstGeom prst="line">
+              <a:avLst/>
+            </a:prstGeom>
+            <a:ln w="50800"/>
+          </p:spPr>
+          <p:style>
+            <a:lnRef idx="2">
+              <a:schemeClr val="accent1"/>
+            </a:lnRef>
+            <a:fillRef idx="0">
+              <a:schemeClr val="accent1"/>
+            </a:fillRef>
+            <a:effectRef idx="1">
+              <a:schemeClr val="accent1"/>
+            </a:effectRef>
+            <a:fontRef idx="minor">
+              <a:schemeClr val="tx1"/>
+            </a:fontRef>
+          </p:style>
+        </p:cxnSp>
+      </p:grpSp>
+      <p:sp>
+        <p:nvSpPr>
+          <p:cNvPr id="170" name="TextBox 169">
+            <a:extLst>
+              <a:ext uri="{FF2B5EF4-FFF2-40B4-BE49-F238E27FC236}">
+                <a16:creationId xmlns:a16="http://schemas.microsoft.com/office/drawing/2014/main" id="{66B8A6BB-6982-1259-8371-CE98892E52F8}"/>
+              </a:ext>
+            </a:extLst>
+          </p:cNvPr>
+          <p:cNvSpPr txBox="1"/>
+          <p:nvPr/>
+        </p:nvSpPr>
+        <p:spPr>
+          <a:xfrm>
+            <a:off x="10196866" y="615152"/>
+            <a:ext cx="860044" cy="338554"/>
+          </a:xfrm>
+          <a:prstGeom prst="rect">
+            <a:avLst/>
+          </a:prstGeom>
+          <a:noFill/>
+        </p:spPr>
+        <p:txBody>
+          <a:bodyPr wrap="none" rtlCol="0">
+            <a:spAutoFit/>
+          </a:bodyPr>
+          <a:lstStyle/>
+          <a:p>
+            <a:pPr algn="ctr"/>
+            <a:r>
+              <a:rPr lang="en-NZ" sz="1600" b="1" dirty="0"/>
+              <a:t>Legend</a:t>
+            </a:r>
+          </a:p>
+        </p:txBody>
+      </p:sp>
+      <p:sp>
+        <p:nvSpPr>
+          <p:cNvPr id="171" name="TextBox 170">
+            <a:extLst>
+              <a:ext uri="{FF2B5EF4-FFF2-40B4-BE49-F238E27FC236}">
+                <a16:creationId xmlns:a16="http://schemas.microsoft.com/office/drawing/2014/main" id="{D7C381F6-A046-01E3-9842-3C6F6DBF461E}"/>
+              </a:ext>
+            </a:extLst>
+          </p:cNvPr>
+          <p:cNvSpPr txBox="1"/>
+          <p:nvPr/>
+        </p:nvSpPr>
+        <p:spPr>
+          <a:xfrm>
+            <a:off x="2485134" y="6386759"/>
+            <a:ext cx="768159" cy="369332"/>
+          </a:xfrm>
+          <a:prstGeom prst="rect">
+            <a:avLst/>
+          </a:prstGeom>
+          <a:noFill/>
+        </p:spPr>
+        <p:txBody>
+          <a:bodyPr wrap="none" rtlCol="0">
+            <a:spAutoFit/>
+          </a:bodyPr>
+          <a:lstStyle/>
+          <a:p>
+            <a:r>
+              <a:rPr lang="en-NZ" i="1" dirty="0"/>
+              <a:t>Cell A</a:t>
+            </a:r>
+          </a:p>
+        </p:txBody>
+      </p:sp>
+      <p:sp>
+        <p:nvSpPr>
+          <p:cNvPr id="172" name="TextBox 171">
+            <a:extLst>
+              <a:ext uri="{FF2B5EF4-FFF2-40B4-BE49-F238E27FC236}">
+                <a16:creationId xmlns:a16="http://schemas.microsoft.com/office/drawing/2014/main" id="{D539EF59-639F-824A-3E21-F0DEA9B28E3D}"/>
+              </a:ext>
+            </a:extLst>
+          </p:cNvPr>
+          <p:cNvSpPr txBox="1"/>
+          <p:nvPr/>
+        </p:nvSpPr>
+        <p:spPr>
+          <a:xfrm>
+            <a:off x="5644053" y="6392611"/>
+            <a:ext cx="772969" cy="369332"/>
+          </a:xfrm>
+          <a:prstGeom prst="rect">
+            <a:avLst/>
+          </a:prstGeom>
+          <a:noFill/>
+        </p:spPr>
+        <p:txBody>
+          <a:bodyPr wrap="none" rtlCol="0">
+            <a:spAutoFit/>
+          </a:bodyPr>
+          <a:lstStyle/>
+          <a:p>
+            <a:r>
+              <a:rPr lang="en-NZ" i="1" dirty="0"/>
+              <a:t>Cell B</a:t>
+            </a:r>
+          </a:p>
+        </p:txBody>
+      </p:sp>
+    </p:spTree>
+    <p:extLst>
+      <p:ext uri="{BB962C8B-B14F-4D97-AF65-F5344CB8AC3E}">
+        <p14:creationId xmlns:p14="http://schemas.microsoft.com/office/powerpoint/2010/main" val="4276616464"/>
       </p:ext>
     </p:extLst>
   </p:cSld>

--- a/home-made-diagrams/16.3 homebrew-diagrams.pptx
+++ b/home-made-diagrams/16.3 homebrew-diagrams.pptx
@@ -4,11 +4,15 @@
   <p:sldMasterIdLst>
     <p:sldMasterId id="2147483648" r:id="rId1"/>
   </p:sldMasterIdLst>
+  <p:notesMasterIdLst>
+    <p:notesMasterId r:id="rId7"/>
+  </p:notesMasterIdLst>
   <p:sldIdLst>
     <p:sldId id="256" r:id="rId2"/>
     <p:sldId id="257" r:id="rId3"/>
     <p:sldId id="258" r:id="rId4"/>
     <p:sldId id="259" r:id="rId5"/>
+    <p:sldId id="260" r:id="rId6"/>
   </p:sldIdLst>
   <p:sldSz cx="12192000" cy="6858000"/>
   <p:notesSz cx="6858000" cy="9144000"/>
@@ -110,12 +114,12 @@
   <p:extLst>
     <p:ext uri="{EFAFB233-063F-42B5-8137-9DF3F51BA10A}">
       <p15:sldGuideLst xmlns:p15="http://schemas.microsoft.com/office/powerpoint/2012/main">
-        <p15:guide id="1" orient="horz" pos="2183" userDrawn="1">
+        <p15:guide id="1" orient="horz" pos="2160" userDrawn="1">
           <p15:clr>
             <a:srgbClr val="A4A3A4"/>
           </p15:clr>
         </p15:guide>
-        <p15:guide id="2" pos="3840" userDrawn="1">
+        <p15:guide id="2" pos="3863" userDrawn="1">
           <p15:clr>
             <a:srgbClr val="A4A3A4"/>
           </p15:clr>
@@ -124,6 +128,440 @@
     </p:ext>
   </p:extLst>
 </p:presentation>
+</file>
+
+<file path=ppt/notesMasters/notesMaster1.xml><?xml version="1.0" encoding="utf-8"?>
+<p:notesMaster xmlns:a="http://schemas.openxmlformats.org/drawingml/2006/main" xmlns:r="http://schemas.openxmlformats.org/officeDocument/2006/relationships" xmlns:p="http://schemas.openxmlformats.org/presentationml/2006/main">
+  <p:cSld>
+    <p:bg>
+      <p:bgRef idx="1001">
+        <a:schemeClr val="bg1"/>
+      </p:bgRef>
+    </p:bg>
+    <p:spTree>
+      <p:nvGrpSpPr>
+        <p:cNvPr id="1" name=""/>
+        <p:cNvGrpSpPr/>
+        <p:nvPr/>
+      </p:nvGrpSpPr>
+      <p:grpSpPr>
+        <a:xfrm>
+          <a:off x="0" y="0"/>
+          <a:ext cx="0" cy="0"/>
+          <a:chOff x="0" y="0"/>
+          <a:chExt cx="0" cy="0"/>
+        </a:xfrm>
+      </p:grpSpPr>
+      <p:sp>
+        <p:nvSpPr>
+          <p:cNvPr id="2" name="Header Placeholder 1"/>
+          <p:cNvSpPr>
+            <a:spLocks noGrp="1"/>
+          </p:cNvSpPr>
+          <p:nvPr>
+            <p:ph type="hdr" sz="quarter"/>
+          </p:nvPr>
+        </p:nvSpPr>
+        <p:spPr>
+          <a:xfrm>
+            <a:off x="0" y="0"/>
+            <a:ext cx="2971800" cy="458788"/>
+          </a:xfrm>
+          <a:prstGeom prst="rect">
+            <a:avLst/>
+          </a:prstGeom>
+        </p:spPr>
+        <p:txBody>
+          <a:bodyPr vert="horz" lIns="91440" tIns="45720" rIns="91440" bIns="45720" rtlCol="0"/>
+          <a:lstStyle>
+            <a:lvl1pPr algn="l">
+              <a:defRPr sz="1200"/>
+            </a:lvl1pPr>
+          </a:lstStyle>
+          <a:p>
+            <a:endParaRPr lang="en-NZ"/>
+          </a:p>
+        </p:txBody>
+      </p:sp>
+      <p:sp>
+        <p:nvSpPr>
+          <p:cNvPr id="3" name="Date Placeholder 2"/>
+          <p:cNvSpPr>
+            <a:spLocks noGrp="1"/>
+          </p:cNvSpPr>
+          <p:nvPr>
+            <p:ph type="dt" idx="1"/>
+          </p:nvPr>
+        </p:nvSpPr>
+        <p:spPr>
+          <a:xfrm>
+            <a:off x="3884613" y="0"/>
+            <a:ext cx="2971800" cy="458788"/>
+          </a:xfrm>
+          <a:prstGeom prst="rect">
+            <a:avLst/>
+          </a:prstGeom>
+        </p:spPr>
+        <p:txBody>
+          <a:bodyPr vert="horz" lIns="91440" tIns="45720" rIns="91440" bIns="45720" rtlCol="0"/>
+          <a:lstStyle>
+            <a:lvl1pPr algn="r">
+              <a:defRPr sz="1200"/>
+            </a:lvl1pPr>
+          </a:lstStyle>
+          <a:p>
+            <a:fld id="{A71292D7-1B04-46C9-A06C-666C8C4D7CE5}" type="datetimeFigureOut">
+              <a:rPr lang="en-NZ" smtClean="0"/>
+              <a:t>25/03/2025</a:t>
+            </a:fld>
+            <a:endParaRPr lang="en-NZ"/>
+          </a:p>
+        </p:txBody>
+      </p:sp>
+      <p:sp>
+        <p:nvSpPr>
+          <p:cNvPr id="4" name="Slide Image Placeholder 3"/>
+          <p:cNvSpPr>
+            <a:spLocks noGrp="1" noRot="1" noChangeAspect="1"/>
+          </p:cNvSpPr>
+          <p:nvPr>
+            <p:ph type="sldImg" idx="2"/>
+          </p:nvPr>
+        </p:nvSpPr>
+        <p:spPr>
+          <a:xfrm>
+            <a:off x="685800" y="1143000"/>
+            <a:ext cx="5486400" cy="3086100"/>
+          </a:xfrm>
+          <a:prstGeom prst="rect">
+            <a:avLst/>
+          </a:prstGeom>
+          <a:noFill/>
+          <a:ln w="12700">
+            <a:solidFill>
+              <a:prstClr val="black"/>
+            </a:solidFill>
+          </a:ln>
+        </p:spPr>
+        <p:txBody>
+          <a:bodyPr vert="horz" lIns="91440" tIns="45720" rIns="91440" bIns="45720" rtlCol="0" anchor="ctr"/>
+          <a:lstStyle/>
+          <a:p>
+            <a:endParaRPr lang="en-NZ"/>
+          </a:p>
+        </p:txBody>
+      </p:sp>
+      <p:sp>
+        <p:nvSpPr>
+          <p:cNvPr id="5" name="Notes Placeholder 4"/>
+          <p:cNvSpPr>
+            <a:spLocks noGrp="1"/>
+          </p:cNvSpPr>
+          <p:nvPr>
+            <p:ph type="body" sz="quarter" idx="3"/>
+          </p:nvPr>
+        </p:nvSpPr>
+        <p:spPr>
+          <a:xfrm>
+            <a:off x="685800" y="4400550"/>
+            <a:ext cx="5486400" cy="3600450"/>
+          </a:xfrm>
+          <a:prstGeom prst="rect">
+            <a:avLst/>
+          </a:prstGeom>
+        </p:spPr>
+        <p:txBody>
+          <a:bodyPr vert="horz" lIns="91440" tIns="45720" rIns="91440" bIns="45720" rtlCol="0"/>
+          <a:lstStyle/>
+          <a:p>
+            <a:pPr lvl="0"/>
+            <a:r>
+              <a:rPr lang="en-US"/>
+              <a:t>Click to edit Master text styles</a:t>
+            </a:r>
+          </a:p>
+          <a:p>
+            <a:pPr lvl="1"/>
+            <a:r>
+              <a:rPr lang="en-US"/>
+              <a:t>Second level</a:t>
+            </a:r>
+          </a:p>
+          <a:p>
+            <a:pPr lvl="2"/>
+            <a:r>
+              <a:rPr lang="en-US"/>
+              <a:t>Third level</a:t>
+            </a:r>
+          </a:p>
+          <a:p>
+            <a:pPr lvl="3"/>
+            <a:r>
+              <a:rPr lang="en-US"/>
+              <a:t>Fourth level</a:t>
+            </a:r>
+          </a:p>
+          <a:p>
+            <a:pPr lvl="4"/>
+            <a:r>
+              <a:rPr lang="en-US"/>
+              <a:t>Fifth level</a:t>
+            </a:r>
+            <a:endParaRPr lang="en-NZ"/>
+          </a:p>
+        </p:txBody>
+      </p:sp>
+      <p:sp>
+        <p:nvSpPr>
+          <p:cNvPr id="6" name="Footer Placeholder 5"/>
+          <p:cNvSpPr>
+            <a:spLocks noGrp="1"/>
+          </p:cNvSpPr>
+          <p:nvPr>
+            <p:ph type="ftr" sz="quarter" idx="4"/>
+          </p:nvPr>
+        </p:nvSpPr>
+        <p:spPr>
+          <a:xfrm>
+            <a:off x="0" y="8685213"/>
+            <a:ext cx="2971800" cy="458787"/>
+          </a:xfrm>
+          <a:prstGeom prst="rect">
+            <a:avLst/>
+          </a:prstGeom>
+        </p:spPr>
+        <p:txBody>
+          <a:bodyPr vert="horz" lIns="91440" tIns="45720" rIns="91440" bIns="45720" rtlCol="0" anchor="b"/>
+          <a:lstStyle>
+            <a:lvl1pPr algn="l">
+              <a:defRPr sz="1200"/>
+            </a:lvl1pPr>
+          </a:lstStyle>
+          <a:p>
+            <a:endParaRPr lang="en-NZ"/>
+          </a:p>
+        </p:txBody>
+      </p:sp>
+      <p:sp>
+        <p:nvSpPr>
+          <p:cNvPr id="7" name="Slide Number Placeholder 6"/>
+          <p:cNvSpPr>
+            <a:spLocks noGrp="1"/>
+          </p:cNvSpPr>
+          <p:nvPr>
+            <p:ph type="sldNum" sz="quarter" idx="5"/>
+          </p:nvPr>
+        </p:nvSpPr>
+        <p:spPr>
+          <a:xfrm>
+            <a:off x="3884613" y="8685213"/>
+            <a:ext cx="2971800" cy="458787"/>
+          </a:xfrm>
+          <a:prstGeom prst="rect">
+            <a:avLst/>
+          </a:prstGeom>
+        </p:spPr>
+        <p:txBody>
+          <a:bodyPr vert="horz" lIns="91440" tIns="45720" rIns="91440" bIns="45720" rtlCol="0" anchor="b"/>
+          <a:lstStyle>
+            <a:lvl1pPr algn="r">
+              <a:defRPr sz="1200"/>
+            </a:lvl1pPr>
+          </a:lstStyle>
+          <a:p>
+            <a:fld id="{6C87BD2D-587A-4309-87CD-214B0A26F75E}" type="slidenum">
+              <a:rPr lang="en-NZ" smtClean="0"/>
+              <a:t>‹#›</a:t>
+            </a:fld>
+            <a:endParaRPr lang="en-NZ"/>
+          </a:p>
+        </p:txBody>
+      </p:sp>
+    </p:spTree>
+    <p:extLst>
+      <p:ext uri="{BB962C8B-B14F-4D97-AF65-F5344CB8AC3E}">
+        <p14:creationId xmlns:p14="http://schemas.microsoft.com/office/powerpoint/2010/main" val="2826430664"/>
+      </p:ext>
+    </p:extLst>
+  </p:cSld>
+  <p:clrMap bg1="lt1" tx1="dk1" bg2="lt2" tx2="dk2" accent1="accent1" accent2="accent2" accent3="accent3" accent4="accent4" accent5="accent5" accent6="accent6" hlink="hlink" folHlink="folHlink"/>
+  <p:notesStyle>
+    <a:lvl1pPr marL="0" algn="l" defTabSz="914400" rtl="0" eaLnBrk="1" latinLnBrk="0" hangingPunct="1">
+      <a:defRPr sz="1200" kern="1200">
+        <a:solidFill>
+          <a:schemeClr val="tx1"/>
+        </a:solidFill>
+        <a:latin typeface="+mn-lt"/>
+        <a:ea typeface="+mn-ea"/>
+        <a:cs typeface="+mn-cs"/>
+      </a:defRPr>
+    </a:lvl1pPr>
+    <a:lvl2pPr marL="457200" algn="l" defTabSz="914400" rtl="0" eaLnBrk="1" latinLnBrk="0" hangingPunct="1">
+      <a:defRPr sz="1200" kern="1200">
+        <a:solidFill>
+          <a:schemeClr val="tx1"/>
+        </a:solidFill>
+        <a:latin typeface="+mn-lt"/>
+        <a:ea typeface="+mn-ea"/>
+        <a:cs typeface="+mn-cs"/>
+      </a:defRPr>
+    </a:lvl2pPr>
+    <a:lvl3pPr marL="914400" algn="l" defTabSz="914400" rtl="0" eaLnBrk="1" latinLnBrk="0" hangingPunct="1">
+      <a:defRPr sz="1200" kern="1200">
+        <a:solidFill>
+          <a:schemeClr val="tx1"/>
+        </a:solidFill>
+        <a:latin typeface="+mn-lt"/>
+        <a:ea typeface="+mn-ea"/>
+        <a:cs typeface="+mn-cs"/>
+      </a:defRPr>
+    </a:lvl3pPr>
+    <a:lvl4pPr marL="1371600" algn="l" defTabSz="914400" rtl="0" eaLnBrk="1" latinLnBrk="0" hangingPunct="1">
+      <a:defRPr sz="1200" kern="1200">
+        <a:solidFill>
+          <a:schemeClr val="tx1"/>
+        </a:solidFill>
+        <a:latin typeface="+mn-lt"/>
+        <a:ea typeface="+mn-ea"/>
+        <a:cs typeface="+mn-cs"/>
+      </a:defRPr>
+    </a:lvl4pPr>
+    <a:lvl5pPr marL="1828800" algn="l" defTabSz="914400" rtl="0" eaLnBrk="1" latinLnBrk="0" hangingPunct="1">
+      <a:defRPr sz="1200" kern="1200">
+        <a:solidFill>
+          <a:schemeClr val="tx1"/>
+        </a:solidFill>
+        <a:latin typeface="+mn-lt"/>
+        <a:ea typeface="+mn-ea"/>
+        <a:cs typeface="+mn-cs"/>
+      </a:defRPr>
+    </a:lvl5pPr>
+    <a:lvl6pPr marL="2286000" algn="l" defTabSz="914400" rtl="0" eaLnBrk="1" latinLnBrk="0" hangingPunct="1">
+      <a:defRPr sz="1200" kern="1200">
+        <a:solidFill>
+          <a:schemeClr val="tx1"/>
+        </a:solidFill>
+        <a:latin typeface="+mn-lt"/>
+        <a:ea typeface="+mn-ea"/>
+        <a:cs typeface="+mn-cs"/>
+      </a:defRPr>
+    </a:lvl6pPr>
+    <a:lvl7pPr marL="2743200" algn="l" defTabSz="914400" rtl="0" eaLnBrk="1" latinLnBrk="0" hangingPunct="1">
+      <a:defRPr sz="1200" kern="1200">
+        <a:solidFill>
+          <a:schemeClr val="tx1"/>
+        </a:solidFill>
+        <a:latin typeface="+mn-lt"/>
+        <a:ea typeface="+mn-ea"/>
+        <a:cs typeface="+mn-cs"/>
+      </a:defRPr>
+    </a:lvl7pPr>
+    <a:lvl8pPr marL="3200400" algn="l" defTabSz="914400" rtl="0" eaLnBrk="1" latinLnBrk="0" hangingPunct="1">
+      <a:defRPr sz="1200" kern="1200">
+        <a:solidFill>
+          <a:schemeClr val="tx1"/>
+        </a:solidFill>
+        <a:latin typeface="+mn-lt"/>
+        <a:ea typeface="+mn-ea"/>
+        <a:cs typeface="+mn-cs"/>
+      </a:defRPr>
+    </a:lvl8pPr>
+    <a:lvl9pPr marL="3657600" algn="l" defTabSz="914400" rtl="0" eaLnBrk="1" latinLnBrk="0" hangingPunct="1">
+      <a:defRPr sz="1200" kern="1200">
+        <a:solidFill>
+          <a:schemeClr val="tx1"/>
+        </a:solidFill>
+        <a:latin typeface="+mn-lt"/>
+        <a:ea typeface="+mn-ea"/>
+        <a:cs typeface="+mn-cs"/>
+      </a:defRPr>
+    </a:lvl9pPr>
+  </p:notesStyle>
+</p:notesMaster>
+</file>
+
+<file path=ppt/notesSlides/notesSlide1.xml><?xml version="1.0" encoding="utf-8"?>
+<p:notes xmlns:a="http://schemas.openxmlformats.org/drawingml/2006/main" xmlns:r="http://schemas.openxmlformats.org/officeDocument/2006/relationships" xmlns:p="http://schemas.openxmlformats.org/presentationml/2006/main">
+  <p:cSld>
+    <p:spTree>
+      <p:nvGrpSpPr>
+        <p:cNvPr id="1" name=""/>
+        <p:cNvGrpSpPr/>
+        <p:nvPr/>
+      </p:nvGrpSpPr>
+      <p:grpSpPr>
+        <a:xfrm>
+          <a:off x="0" y="0"/>
+          <a:ext cx="0" cy="0"/>
+          <a:chOff x="0" y="0"/>
+          <a:chExt cx="0" cy="0"/>
+        </a:xfrm>
+      </p:grpSpPr>
+      <p:sp>
+        <p:nvSpPr>
+          <p:cNvPr id="2" name="Slide Image Placeholder 1"/>
+          <p:cNvSpPr>
+            <a:spLocks noGrp="1" noRot="1" noChangeAspect="1"/>
+          </p:cNvSpPr>
+          <p:nvPr>
+            <p:ph type="sldImg"/>
+          </p:nvPr>
+        </p:nvSpPr>
+        <p:spPr/>
+      </p:sp>
+      <p:sp>
+        <p:nvSpPr>
+          <p:cNvPr id="3" name="Notes Placeholder 2"/>
+          <p:cNvSpPr>
+            <a:spLocks noGrp="1"/>
+          </p:cNvSpPr>
+          <p:nvPr>
+            <p:ph type="body" idx="1"/>
+          </p:nvPr>
+        </p:nvSpPr>
+        <p:spPr/>
+        <p:txBody>
+          <a:bodyPr/>
+          <a:lstStyle/>
+          <a:p>
+            <a:endParaRPr lang="en-NZ" dirty="0"/>
+          </a:p>
+        </p:txBody>
+      </p:sp>
+      <p:sp>
+        <p:nvSpPr>
+          <p:cNvPr id="4" name="Slide Number Placeholder 3"/>
+          <p:cNvSpPr>
+            <a:spLocks noGrp="1"/>
+          </p:cNvSpPr>
+          <p:nvPr>
+            <p:ph type="sldNum" sz="quarter" idx="5"/>
+          </p:nvPr>
+        </p:nvSpPr>
+        <p:spPr/>
+        <p:txBody>
+          <a:bodyPr/>
+          <a:lstStyle/>
+          <a:p>
+            <a:fld id="{6C87BD2D-587A-4309-87CD-214B0A26F75E}" type="slidenum">
+              <a:rPr lang="en-NZ" smtClean="0"/>
+              <a:t>5</a:t>
+            </a:fld>
+            <a:endParaRPr lang="en-NZ"/>
+          </a:p>
+        </p:txBody>
+      </p:sp>
+    </p:spTree>
+    <p:extLst>
+      <p:ext uri="{BB962C8B-B14F-4D97-AF65-F5344CB8AC3E}">
+        <p14:creationId xmlns:p14="http://schemas.microsoft.com/office/powerpoint/2010/main" val="11609495"/>
+      </p:ext>
+    </p:extLst>
+  </p:cSld>
+  <p:clrMapOvr>
+    <a:masterClrMapping/>
+  </p:clrMapOvr>
+</p:notes>
 </file>
 
 <file path=ppt/slideLayouts/slideLayout1.xml><?xml version="1.0" encoding="utf-8"?>
@@ -10033,6 +10471,1652 @@
     <p:extLst>
       <p:ext uri="{BB962C8B-B14F-4D97-AF65-F5344CB8AC3E}">
         <p14:creationId xmlns:p14="http://schemas.microsoft.com/office/powerpoint/2010/main" val="4276616464"/>
+      </p:ext>
+    </p:extLst>
+  </p:cSld>
+  <p:clrMapOvr>
+    <a:masterClrMapping/>
+  </p:clrMapOvr>
+</p:sld>
+</file>
+
+<file path=ppt/slides/slide5.xml><?xml version="1.0" encoding="utf-8"?>
+<p:sld xmlns:a="http://schemas.openxmlformats.org/drawingml/2006/main" xmlns:r="http://schemas.openxmlformats.org/officeDocument/2006/relationships" xmlns:p="http://schemas.openxmlformats.org/presentationml/2006/main">
+  <p:cSld>
+    <p:spTree>
+      <p:nvGrpSpPr>
+        <p:cNvPr id="1" name=""/>
+        <p:cNvGrpSpPr/>
+        <p:nvPr/>
+      </p:nvGrpSpPr>
+      <p:grpSpPr>
+        <a:xfrm>
+          <a:off x="0" y="0"/>
+          <a:ext cx="0" cy="0"/>
+          <a:chOff x="0" y="0"/>
+          <a:chExt cx="0" cy="0"/>
+        </a:xfrm>
+      </p:grpSpPr>
+      <p:sp>
+        <p:nvSpPr>
+          <p:cNvPr id="59" name="Rectangle 58">
+            <a:extLst>
+              <a:ext uri="{FF2B5EF4-FFF2-40B4-BE49-F238E27FC236}">
+                <a16:creationId xmlns:a16="http://schemas.microsoft.com/office/drawing/2014/main" id="{7AE8109A-A1B8-3F66-A57F-62E4A113A41D}"/>
+              </a:ext>
+            </a:extLst>
+          </p:cNvPr>
+          <p:cNvSpPr/>
+          <p:nvPr/>
+        </p:nvSpPr>
+        <p:spPr>
+          <a:xfrm>
+            <a:off x="6132512" y="3445857"/>
+            <a:ext cx="6059487" cy="3428999"/>
+          </a:xfrm>
+          <a:prstGeom prst="rect">
+            <a:avLst/>
+          </a:prstGeom>
+          <a:solidFill>
+            <a:srgbClr val="FFFFCC"/>
+          </a:solidFill>
+          <a:ln>
+            <a:noFill/>
+          </a:ln>
+        </p:spPr>
+        <p:style>
+          <a:lnRef idx="2">
+            <a:schemeClr val="accent1">
+              <a:shade val="15000"/>
+            </a:schemeClr>
+          </a:lnRef>
+          <a:fillRef idx="1">
+            <a:schemeClr val="accent1"/>
+          </a:fillRef>
+          <a:effectRef idx="0">
+            <a:schemeClr val="accent1"/>
+          </a:effectRef>
+          <a:fontRef idx="minor">
+            <a:schemeClr val="lt1"/>
+          </a:fontRef>
+        </p:style>
+        <p:txBody>
+          <a:bodyPr rtlCol="0" anchor="ctr"/>
+          <a:lstStyle/>
+          <a:p>
+            <a:pPr algn="ctr"/>
+            <a:endParaRPr lang="en-NZ"/>
+          </a:p>
+        </p:txBody>
+      </p:sp>
+      <p:sp>
+        <p:nvSpPr>
+          <p:cNvPr id="58" name="Rectangle 57">
+            <a:extLst>
+              <a:ext uri="{FF2B5EF4-FFF2-40B4-BE49-F238E27FC236}">
+                <a16:creationId xmlns:a16="http://schemas.microsoft.com/office/drawing/2014/main" id="{B72AA8C6-7E12-2499-0D77-A8271274262F}"/>
+              </a:ext>
+            </a:extLst>
+          </p:cNvPr>
+          <p:cNvSpPr/>
+          <p:nvPr/>
+        </p:nvSpPr>
+        <p:spPr>
+          <a:xfrm>
+            <a:off x="0" y="3429000"/>
+            <a:ext cx="6132513" cy="3428999"/>
+          </a:xfrm>
+          <a:prstGeom prst="rect">
+            <a:avLst/>
+          </a:prstGeom>
+          <a:solidFill>
+            <a:schemeClr val="accent3">
+              <a:lumMod val="20000"/>
+              <a:lumOff val="80000"/>
+            </a:schemeClr>
+          </a:solidFill>
+          <a:ln>
+            <a:noFill/>
+          </a:ln>
+        </p:spPr>
+        <p:style>
+          <a:lnRef idx="2">
+            <a:schemeClr val="accent1">
+              <a:shade val="15000"/>
+            </a:schemeClr>
+          </a:lnRef>
+          <a:fillRef idx="1">
+            <a:schemeClr val="accent1"/>
+          </a:fillRef>
+          <a:effectRef idx="0">
+            <a:schemeClr val="accent1"/>
+          </a:effectRef>
+          <a:fontRef idx="minor">
+            <a:schemeClr val="lt1"/>
+          </a:fontRef>
+        </p:style>
+        <p:txBody>
+          <a:bodyPr rtlCol="0" anchor="ctr"/>
+          <a:lstStyle/>
+          <a:p>
+            <a:pPr algn="ctr"/>
+            <a:endParaRPr lang="en-NZ"/>
+          </a:p>
+        </p:txBody>
+      </p:sp>
+      <p:sp>
+        <p:nvSpPr>
+          <p:cNvPr id="57" name="Rectangle 56">
+            <a:extLst>
+              <a:ext uri="{FF2B5EF4-FFF2-40B4-BE49-F238E27FC236}">
+                <a16:creationId xmlns:a16="http://schemas.microsoft.com/office/drawing/2014/main" id="{634D72B4-28F3-D8F4-3827-B6941AC92269}"/>
+              </a:ext>
+            </a:extLst>
+          </p:cNvPr>
+          <p:cNvSpPr/>
+          <p:nvPr/>
+        </p:nvSpPr>
+        <p:spPr>
+          <a:xfrm>
+            <a:off x="6132513" y="1"/>
+            <a:ext cx="6059486" cy="3429000"/>
+          </a:xfrm>
+          <a:prstGeom prst="rect">
+            <a:avLst/>
+          </a:prstGeom>
+          <a:solidFill>
+            <a:schemeClr val="accent1">
+              <a:lumMod val="20000"/>
+              <a:lumOff val="80000"/>
+            </a:schemeClr>
+          </a:solidFill>
+          <a:ln>
+            <a:noFill/>
+          </a:ln>
+        </p:spPr>
+        <p:style>
+          <a:lnRef idx="2">
+            <a:schemeClr val="accent1">
+              <a:shade val="15000"/>
+            </a:schemeClr>
+          </a:lnRef>
+          <a:fillRef idx="1">
+            <a:schemeClr val="accent1"/>
+          </a:fillRef>
+          <a:effectRef idx="0">
+            <a:schemeClr val="accent1"/>
+          </a:effectRef>
+          <a:fontRef idx="minor">
+            <a:schemeClr val="lt1"/>
+          </a:fontRef>
+        </p:style>
+        <p:txBody>
+          <a:bodyPr rtlCol="0" anchor="ctr"/>
+          <a:lstStyle/>
+          <a:p>
+            <a:pPr algn="ctr"/>
+            <a:endParaRPr lang="en-NZ"/>
+          </a:p>
+        </p:txBody>
+      </p:sp>
+      <p:sp>
+        <p:nvSpPr>
+          <p:cNvPr id="56" name="Rectangle 55">
+            <a:extLst>
+              <a:ext uri="{FF2B5EF4-FFF2-40B4-BE49-F238E27FC236}">
+                <a16:creationId xmlns:a16="http://schemas.microsoft.com/office/drawing/2014/main" id="{798FCA98-C0C5-D04D-71BF-D49C87C948B9}"/>
+              </a:ext>
+            </a:extLst>
+          </p:cNvPr>
+          <p:cNvSpPr/>
+          <p:nvPr/>
+        </p:nvSpPr>
+        <p:spPr>
+          <a:xfrm>
+            <a:off x="1" y="0"/>
+            <a:ext cx="6132512" cy="3429000"/>
+          </a:xfrm>
+          <a:prstGeom prst="rect">
+            <a:avLst/>
+          </a:prstGeom>
+          <a:solidFill>
+            <a:schemeClr val="accent2">
+              <a:lumMod val="20000"/>
+              <a:lumOff val="80000"/>
+            </a:schemeClr>
+          </a:solidFill>
+          <a:ln>
+            <a:noFill/>
+          </a:ln>
+        </p:spPr>
+        <p:style>
+          <a:lnRef idx="2">
+            <a:schemeClr val="accent1">
+              <a:shade val="15000"/>
+            </a:schemeClr>
+          </a:lnRef>
+          <a:fillRef idx="1">
+            <a:schemeClr val="accent1"/>
+          </a:fillRef>
+          <a:effectRef idx="0">
+            <a:schemeClr val="accent1"/>
+          </a:effectRef>
+          <a:fontRef idx="minor">
+            <a:schemeClr val="lt1"/>
+          </a:fontRef>
+        </p:style>
+        <p:txBody>
+          <a:bodyPr rtlCol="0" anchor="ctr"/>
+          <a:lstStyle/>
+          <a:p>
+            <a:pPr algn="ctr"/>
+            <a:endParaRPr lang="en-NZ"/>
+          </a:p>
+        </p:txBody>
+      </p:sp>
+      <p:sp>
+        <p:nvSpPr>
+          <p:cNvPr id="2" name="Oval 1">
+            <a:extLst>
+              <a:ext uri="{FF2B5EF4-FFF2-40B4-BE49-F238E27FC236}">
+                <a16:creationId xmlns:a16="http://schemas.microsoft.com/office/drawing/2014/main" id="{C7A0D924-58F1-9B3B-A930-40D3E08B734A}"/>
+              </a:ext>
+            </a:extLst>
+          </p:cNvPr>
+          <p:cNvSpPr/>
+          <p:nvPr/>
+        </p:nvSpPr>
+        <p:spPr>
+          <a:xfrm>
+            <a:off x="1018479" y="4431620"/>
+            <a:ext cx="1311007" cy="1311007"/>
+          </a:xfrm>
+          <a:prstGeom prst="ellipse">
+            <a:avLst/>
+          </a:prstGeom>
+          <a:noFill/>
+          <a:ln w="50800">
+            <a:solidFill>
+              <a:schemeClr val="accent5">
+                <a:lumMod val="75000"/>
+              </a:schemeClr>
+            </a:solidFill>
+          </a:ln>
+        </p:spPr>
+        <p:style>
+          <a:lnRef idx="2">
+            <a:schemeClr val="accent1">
+              <a:shade val="15000"/>
+            </a:schemeClr>
+          </a:lnRef>
+          <a:fillRef idx="1">
+            <a:schemeClr val="accent1"/>
+          </a:fillRef>
+          <a:effectRef idx="0">
+            <a:schemeClr val="accent1"/>
+          </a:effectRef>
+          <a:fontRef idx="minor">
+            <a:schemeClr val="lt1"/>
+          </a:fontRef>
+        </p:style>
+        <p:txBody>
+          <a:bodyPr rtlCol="0" anchor="ctr"/>
+          <a:lstStyle/>
+          <a:p>
+            <a:pPr algn="ctr"/>
+            <a:endParaRPr lang="en-NZ"/>
+          </a:p>
+        </p:txBody>
+      </p:sp>
+      <p:sp>
+        <p:nvSpPr>
+          <p:cNvPr id="3" name="Oval 2">
+            <a:extLst>
+              <a:ext uri="{FF2B5EF4-FFF2-40B4-BE49-F238E27FC236}">
+                <a16:creationId xmlns:a16="http://schemas.microsoft.com/office/drawing/2014/main" id="{22B72B97-7CBD-676F-B026-00F0CF7EAE2C}"/>
+              </a:ext>
+            </a:extLst>
+          </p:cNvPr>
+          <p:cNvSpPr/>
+          <p:nvPr/>
+        </p:nvSpPr>
+        <p:spPr>
+          <a:xfrm>
+            <a:off x="3554731" y="4201642"/>
+            <a:ext cx="1770962" cy="1770962"/>
+          </a:xfrm>
+          <a:prstGeom prst="ellipse">
+            <a:avLst/>
+          </a:prstGeom>
+          <a:noFill/>
+          <a:ln w="50800">
+            <a:solidFill>
+              <a:schemeClr val="accent5">
+                <a:lumMod val="60000"/>
+                <a:lumOff val="40000"/>
+              </a:schemeClr>
+            </a:solidFill>
+          </a:ln>
+        </p:spPr>
+        <p:style>
+          <a:lnRef idx="2">
+            <a:schemeClr val="accent1">
+              <a:shade val="15000"/>
+            </a:schemeClr>
+          </a:lnRef>
+          <a:fillRef idx="1">
+            <a:schemeClr val="accent1"/>
+          </a:fillRef>
+          <a:effectRef idx="0">
+            <a:schemeClr val="accent1"/>
+          </a:effectRef>
+          <a:fontRef idx="minor">
+            <a:schemeClr val="lt1"/>
+          </a:fontRef>
+        </p:style>
+        <p:txBody>
+          <a:bodyPr rtlCol="0" anchor="ctr"/>
+          <a:lstStyle/>
+          <a:p>
+            <a:pPr algn="ctr"/>
+            <a:endParaRPr lang="en-NZ"/>
+          </a:p>
+        </p:txBody>
+      </p:sp>
+      <p:sp>
+        <p:nvSpPr>
+          <p:cNvPr id="18" name="Oval 17">
+            <a:extLst>
+              <a:ext uri="{FF2B5EF4-FFF2-40B4-BE49-F238E27FC236}">
+                <a16:creationId xmlns:a16="http://schemas.microsoft.com/office/drawing/2014/main" id="{5A345D4C-F312-3253-64E1-8EE86EC79BBC}"/>
+              </a:ext>
+            </a:extLst>
+          </p:cNvPr>
+          <p:cNvSpPr/>
+          <p:nvPr/>
+        </p:nvSpPr>
+        <p:spPr>
+          <a:xfrm>
+            <a:off x="7996517" y="4118015"/>
+            <a:ext cx="1977913" cy="1977913"/>
+          </a:xfrm>
+          <a:prstGeom prst="ellipse">
+            <a:avLst/>
+          </a:prstGeom>
+          <a:noFill/>
+          <a:ln w="50800">
+            <a:solidFill>
+              <a:schemeClr val="accent5">
+                <a:lumMod val="60000"/>
+                <a:lumOff val="40000"/>
+              </a:schemeClr>
+            </a:solidFill>
+          </a:ln>
+        </p:spPr>
+        <p:style>
+          <a:lnRef idx="2">
+            <a:schemeClr val="accent1">
+              <a:shade val="15000"/>
+            </a:schemeClr>
+          </a:lnRef>
+          <a:fillRef idx="1">
+            <a:schemeClr val="accent1"/>
+          </a:fillRef>
+          <a:effectRef idx="0">
+            <a:schemeClr val="accent1"/>
+          </a:effectRef>
+          <a:fontRef idx="minor">
+            <a:schemeClr val="lt1"/>
+          </a:fontRef>
+        </p:style>
+        <p:txBody>
+          <a:bodyPr rtlCol="0" anchor="ctr"/>
+          <a:lstStyle/>
+          <a:p>
+            <a:pPr algn="ctr"/>
+            <a:endParaRPr lang="en-NZ"/>
+          </a:p>
+        </p:txBody>
+      </p:sp>
+      <p:sp>
+        <p:nvSpPr>
+          <p:cNvPr id="27" name="TextBox 26">
+            <a:extLst>
+              <a:ext uri="{FF2B5EF4-FFF2-40B4-BE49-F238E27FC236}">
+                <a16:creationId xmlns:a16="http://schemas.microsoft.com/office/drawing/2014/main" id="{462038AC-78D8-6AAF-382C-D2BF846B1923}"/>
+              </a:ext>
+            </a:extLst>
+          </p:cNvPr>
+          <p:cNvSpPr txBox="1"/>
+          <p:nvPr/>
+        </p:nvSpPr>
+        <p:spPr>
+          <a:xfrm>
+            <a:off x="4256070" y="6508323"/>
+            <a:ext cx="3752887" cy="338554"/>
+          </a:xfrm>
+          <a:prstGeom prst="rect">
+            <a:avLst/>
+          </a:prstGeom>
+          <a:noFill/>
+        </p:spPr>
+        <p:txBody>
+          <a:bodyPr wrap="none" rtlCol="0">
+            <a:spAutoFit/>
+          </a:bodyPr>
+          <a:lstStyle/>
+          <a:p>
+            <a:r>
+              <a:rPr lang="en-NZ" sz="1600" i="1" dirty="0"/>
+              <a:t>Circles show overlapping gene functions</a:t>
+            </a:r>
+          </a:p>
+        </p:txBody>
+      </p:sp>
+      <p:sp>
+        <p:nvSpPr>
+          <p:cNvPr id="29" name="TextBox 28">
+            <a:extLst>
+              <a:ext uri="{FF2B5EF4-FFF2-40B4-BE49-F238E27FC236}">
+                <a16:creationId xmlns:a16="http://schemas.microsoft.com/office/drawing/2014/main" id="{8EFAF94D-AE28-7F83-65B6-72157DD3F698}"/>
+              </a:ext>
+            </a:extLst>
+          </p:cNvPr>
+          <p:cNvSpPr txBox="1"/>
+          <p:nvPr/>
+        </p:nvSpPr>
+        <p:spPr>
+          <a:xfrm>
+            <a:off x="2153026" y="5972604"/>
+            <a:ext cx="1578166" cy="369332"/>
+          </a:xfrm>
+          <a:prstGeom prst="rect">
+            <a:avLst/>
+          </a:prstGeom>
+          <a:noFill/>
+        </p:spPr>
+        <p:txBody>
+          <a:bodyPr wrap="square">
+            <a:spAutoFit/>
+          </a:bodyPr>
+          <a:lstStyle/>
+          <a:p>
+            <a:pPr algn="ctr"/>
+            <a:r>
+              <a:rPr lang="en-NZ" sz="1800" i="1" dirty="0"/>
+              <a:t>Exotic trade</a:t>
+            </a:r>
+          </a:p>
+        </p:txBody>
+      </p:sp>
+      <p:cxnSp>
+        <p:nvCxnSpPr>
+          <p:cNvPr id="30" name="Straight Arrow Connector 29">
+            <a:extLst>
+              <a:ext uri="{FF2B5EF4-FFF2-40B4-BE49-F238E27FC236}">
+                <a16:creationId xmlns:a16="http://schemas.microsoft.com/office/drawing/2014/main" id="{2F449D6A-C9D2-9667-BEDE-81ABB28A1807}"/>
+              </a:ext>
+            </a:extLst>
+          </p:cNvPr>
+          <p:cNvCxnSpPr>
+            <a:cxnSpLocks/>
+          </p:cNvCxnSpPr>
+          <p:nvPr/>
+        </p:nvCxnSpPr>
+        <p:spPr>
+          <a:xfrm flipH="1">
+            <a:off x="2666548" y="4953431"/>
+            <a:ext cx="551122" cy="0"/>
+          </a:xfrm>
+          <a:prstGeom prst="straightConnector1">
+            <a:avLst/>
+          </a:prstGeom>
+          <a:ln w="50800">
+            <a:solidFill>
+              <a:schemeClr val="accent1"/>
+            </a:solidFill>
+            <a:tailEnd type="triangle"/>
+          </a:ln>
+        </p:spPr>
+        <p:style>
+          <a:lnRef idx="2">
+            <a:schemeClr val="accent1"/>
+          </a:lnRef>
+          <a:fillRef idx="0">
+            <a:schemeClr val="accent1"/>
+          </a:fillRef>
+          <a:effectRef idx="1">
+            <a:schemeClr val="accent1"/>
+          </a:effectRef>
+          <a:fontRef idx="minor">
+            <a:schemeClr val="tx1"/>
+          </a:fontRef>
+        </p:style>
+      </p:cxnSp>
+      <p:cxnSp>
+        <p:nvCxnSpPr>
+          <p:cNvPr id="37" name="Straight Arrow Connector 36">
+            <a:extLst>
+              <a:ext uri="{FF2B5EF4-FFF2-40B4-BE49-F238E27FC236}">
+                <a16:creationId xmlns:a16="http://schemas.microsoft.com/office/drawing/2014/main" id="{7FB7B754-85DC-08D7-42BE-2B5E27442450}"/>
+              </a:ext>
+            </a:extLst>
+          </p:cNvPr>
+          <p:cNvCxnSpPr>
+            <a:cxnSpLocks/>
+          </p:cNvCxnSpPr>
+          <p:nvPr/>
+        </p:nvCxnSpPr>
+        <p:spPr>
+          <a:xfrm>
+            <a:off x="2677560" y="5229205"/>
+            <a:ext cx="551122" cy="0"/>
+          </a:xfrm>
+          <a:prstGeom prst="straightConnector1">
+            <a:avLst/>
+          </a:prstGeom>
+          <a:ln w="50800">
+            <a:solidFill>
+              <a:schemeClr val="accent1"/>
+            </a:solidFill>
+            <a:tailEnd type="triangle"/>
+          </a:ln>
+        </p:spPr>
+        <p:style>
+          <a:lnRef idx="2">
+            <a:schemeClr val="accent1"/>
+          </a:lnRef>
+          <a:fillRef idx="0">
+            <a:schemeClr val="accent1"/>
+          </a:fillRef>
+          <a:effectRef idx="1">
+            <a:schemeClr val="accent1"/>
+          </a:effectRef>
+          <a:fontRef idx="minor">
+            <a:schemeClr val="tx1"/>
+          </a:fontRef>
+        </p:style>
+      </p:cxnSp>
+      <p:sp>
+        <p:nvSpPr>
+          <p:cNvPr id="39" name="Oval 38">
+            <a:extLst>
+              <a:ext uri="{FF2B5EF4-FFF2-40B4-BE49-F238E27FC236}">
+                <a16:creationId xmlns:a16="http://schemas.microsoft.com/office/drawing/2014/main" id="{5ECE81BD-3242-C4DB-7A61-CE188C8DD7F8}"/>
+              </a:ext>
+            </a:extLst>
+          </p:cNvPr>
+          <p:cNvSpPr/>
+          <p:nvPr/>
+        </p:nvSpPr>
+        <p:spPr>
+          <a:xfrm>
+            <a:off x="8517355" y="4633405"/>
+            <a:ext cx="936236" cy="936236"/>
+          </a:xfrm>
+          <a:prstGeom prst="ellipse">
+            <a:avLst/>
+          </a:prstGeom>
+          <a:noFill/>
+          <a:ln w="50800">
+            <a:solidFill>
+              <a:schemeClr val="accent5">
+                <a:lumMod val="75000"/>
+              </a:schemeClr>
+            </a:solidFill>
+          </a:ln>
+        </p:spPr>
+        <p:style>
+          <a:lnRef idx="2">
+            <a:schemeClr val="accent1">
+              <a:shade val="15000"/>
+            </a:schemeClr>
+          </a:lnRef>
+          <a:fillRef idx="1">
+            <a:schemeClr val="accent1"/>
+          </a:fillRef>
+          <a:effectRef idx="0">
+            <a:schemeClr val="accent1"/>
+          </a:effectRef>
+          <a:fontRef idx="minor">
+            <a:schemeClr val="lt1"/>
+          </a:fontRef>
+        </p:style>
+        <p:txBody>
+          <a:bodyPr rtlCol="0" anchor="ctr"/>
+          <a:lstStyle/>
+          <a:p>
+            <a:pPr algn="ctr"/>
+            <a:endParaRPr lang="en-NZ"/>
+          </a:p>
+        </p:txBody>
+      </p:sp>
+      <p:cxnSp>
+        <p:nvCxnSpPr>
+          <p:cNvPr id="40" name="Straight Arrow Connector 39">
+            <a:extLst>
+              <a:ext uri="{FF2B5EF4-FFF2-40B4-BE49-F238E27FC236}">
+                <a16:creationId xmlns:a16="http://schemas.microsoft.com/office/drawing/2014/main" id="{2642640C-1A75-0182-A350-87028CCA166C}"/>
+              </a:ext>
+            </a:extLst>
+          </p:cNvPr>
+          <p:cNvCxnSpPr>
+            <a:cxnSpLocks/>
+          </p:cNvCxnSpPr>
+          <p:nvPr/>
+        </p:nvCxnSpPr>
+        <p:spPr>
+          <a:xfrm rot="2700000" flipH="1">
+            <a:off x="8407403" y="4826151"/>
+            <a:ext cx="360000" cy="0"/>
+          </a:xfrm>
+          <a:prstGeom prst="straightConnector1">
+            <a:avLst/>
+          </a:prstGeom>
+          <a:ln w="50800">
+            <a:solidFill>
+              <a:schemeClr val="accent1"/>
+            </a:solidFill>
+            <a:tailEnd type="triangle"/>
+          </a:ln>
+        </p:spPr>
+        <p:style>
+          <a:lnRef idx="2">
+            <a:schemeClr val="accent1"/>
+          </a:lnRef>
+          <a:fillRef idx="0">
+            <a:schemeClr val="accent1"/>
+          </a:fillRef>
+          <a:effectRef idx="1">
+            <a:schemeClr val="accent1"/>
+          </a:effectRef>
+          <a:fontRef idx="minor">
+            <a:schemeClr val="tx1"/>
+          </a:fontRef>
+        </p:style>
+      </p:cxnSp>
+      <p:cxnSp>
+        <p:nvCxnSpPr>
+          <p:cNvPr id="42" name="Straight Arrow Connector 41">
+            <a:extLst>
+              <a:ext uri="{FF2B5EF4-FFF2-40B4-BE49-F238E27FC236}">
+                <a16:creationId xmlns:a16="http://schemas.microsoft.com/office/drawing/2014/main" id="{34858AEB-17A6-EDCF-CB71-35CF51750450}"/>
+              </a:ext>
+            </a:extLst>
+          </p:cNvPr>
+          <p:cNvCxnSpPr>
+            <a:cxnSpLocks/>
+          </p:cNvCxnSpPr>
+          <p:nvPr/>
+        </p:nvCxnSpPr>
+        <p:spPr>
+          <a:xfrm rot="13500000" flipH="1">
+            <a:off x="9125948" y="5497112"/>
+            <a:ext cx="360000" cy="0"/>
+          </a:xfrm>
+          <a:prstGeom prst="straightConnector1">
+            <a:avLst/>
+          </a:prstGeom>
+          <a:ln w="50800">
+            <a:solidFill>
+              <a:schemeClr val="accent1"/>
+            </a:solidFill>
+            <a:tailEnd type="triangle"/>
+          </a:ln>
+        </p:spPr>
+        <p:style>
+          <a:lnRef idx="2">
+            <a:schemeClr val="accent1"/>
+          </a:lnRef>
+          <a:fillRef idx="0">
+            <a:schemeClr val="accent1"/>
+          </a:fillRef>
+          <a:effectRef idx="1">
+            <a:schemeClr val="accent1"/>
+          </a:effectRef>
+          <a:fontRef idx="minor">
+            <a:schemeClr val="tx1"/>
+          </a:fontRef>
+        </p:style>
+      </p:cxnSp>
+      <p:cxnSp>
+        <p:nvCxnSpPr>
+          <p:cNvPr id="43" name="Straight Arrow Connector 42">
+            <a:extLst>
+              <a:ext uri="{FF2B5EF4-FFF2-40B4-BE49-F238E27FC236}">
+                <a16:creationId xmlns:a16="http://schemas.microsoft.com/office/drawing/2014/main" id="{4BEC5AC5-3682-CADE-3B59-14CC1B406369}"/>
+              </a:ext>
+            </a:extLst>
+          </p:cNvPr>
+          <p:cNvCxnSpPr>
+            <a:cxnSpLocks/>
+          </p:cNvCxnSpPr>
+          <p:nvPr/>
+        </p:nvCxnSpPr>
+        <p:spPr>
+          <a:xfrm rot="2700000" flipH="1">
+            <a:off x="9182676" y="5342457"/>
+            <a:ext cx="360000" cy="0"/>
+          </a:xfrm>
+          <a:prstGeom prst="straightConnector1">
+            <a:avLst/>
+          </a:prstGeom>
+          <a:ln w="50800">
+            <a:solidFill>
+              <a:schemeClr val="accent1"/>
+            </a:solidFill>
+            <a:tailEnd type="triangle"/>
+          </a:ln>
+        </p:spPr>
+        <p:style>
+          <a:lnRef idx="2">
+            <a:schemeClr val="accent1"/>
+          </a:lnRef>
+          <a:fillRef idx="0">
+            <a:schemeClr val="accent1"/>
+          </a:fillRef>
+          <a:effectRef idx="1">
+            <a:schemeClr val="accent1"/>
+          </a:effectRef>
+          <a:fontRef idx="minor">
+            <a:schemeClr val="tx1"/>
+          </a:fontRef>
+        </p:style>
+      </p:cxnSp>
+      <p:cxnSp>
+        <p:nvCxnSpPr>
+          <p:cNvPr id="44" name="Straight Arrow Connector 43">
+            <a:extLst>
+              <a:ext uri="{FF2B5EF4-FFF2-40B4-BE49-F238E27FC236}">
+                <a16:creationId xmlns:a16="http://schemas.microsoft.com/office/drawing/2014/main" id="{8CB97587-0C8E-F9DD-2EE4-145A20F972FE}"/>
+              </a:ext>
+            </a:extLst>
+          </p:cNvPr>
+          <p:cNvCxnSpPr>
+            <a:cxnSpLocks/>
+          </p:cNvCxnSpPr>
+          <p:nvPr/>
+        </p:nvCxnSpPr>
+        <p:spPr>
+          <a:xfrm rot="13500000" flipH="1">
+            <a:off x="8565007" y="4760684"/>
+            <a:ext cx="360000" cy="0"/>
+          </a:xfrm>
+          <a:prstGeom prst="straightConnector1">
+            <a:avLst/>
+          </a:prstGeom>
+          <a:ln w="50800">
+            <a:solidFill>
+              <a:schemeClr val="accent1"/>
+            </a:solidFill>
+            <a:tailEnd type="triangle"/>
+          </a:ln>
+        </p:spPr>
+        <p:style>
+          <a:lnRef idx="2">
+            <a:schemeClr val="accent1"/>
+          </a:lnRef>
+          <a:fillRef idx="0">
+            <a:schemeClr val="accent1"/>
+          </a:fillRef>
+          <a:effectRef idx="1">
+            <a:schemeClr val="accent1"/>
+          </a:effectRef>
+          <a:fontRef idx="minor">
+            <a:schemeClr val="tx1"/>
+          </a:fontRef>
+        </p:style>
+      </p:cxnSp>
+      <p:sp>
+        <p:nvSpPr>
+          <p:cNvPr id="45" name="TextBox 44">
+            <a:extLst>
+              <a:ext uri="{FF2B5EF4-FFF2-40B4-BE49-F238E27FC236}">
+                <a16:creationId xmlns:a16="http://schemas.microsoft.com/office/drawing/2014/main" id="{D567044B-EA4E-7A99-C562-EF953552BBC5}"/>
+              </a:ext>
+            </a:extLst>
+          </p:cNvPr>
+          <p:cNvSpPr txBox="1"/>
+          <p:nvPr/>
+        </p:nvSpPr>
+        <p:spPr>
+          <a:xfrm>
+            <a:off x="9525218" y="5998933"/>
+            <a:ext cx="1937196" cy="369332"/>
+          </a:xfrm>
+          <a:prstGeom prst="rect">
+            <a:avLst/>
+          </a:prstGeom>
+          <a:noFill/>
+        </p:spPr>
+        <p:txBody>
+          <a:bodyPr wrap="square">
+            <a:spAutoFit/>
+          </a:bodyPr>
+          <a:lstStyle/>
+          <a:p>
+            <a:pPr algn="ctr"/>
+            <a:r>
+              <a:rPr lang="en-NZ" i="1" dirty="0"/>
+              <a:t>Commodity</a:t>
+            </a:r>
+            <a:r>
+              <a:rPr lang="en-NZ" sz="1800" i="1" dirty="0"/>
+              <a:t> trade</a:t>
+            </a:r>
+          </a:p>
+        </p:txBody>
+      </p:sp>
+      <p:sp>
+        <p:nvSpPr>
+          <p:cNvPr id="47" name="Oval 46">
+            <a:extLst>
+              <a:ext uri="{FF2B5EF4-FFF2-40B4-BE49-F238E27FC236}">
+                <a16:creationId xmlns:a16="http://schemas.microsoft.com/office/drawing/2014/main" id="{88FF837A-13DF-080B-E31F-A863A6FB29D3}"/>
+              </a:ext>
+            </a:extLst>
+          </p:cNvPr>
+          <p:cNvSpPr/>
+          <p:nvPr/>
+        </p:nvSpPr>
+        <p:spPr>
+          <a:xfrm>
+            <a:off x="928105" y="1294718"/>
+            <a:ext cx="1311007" cy="1311007"/>
+          </a:xfrm>
+          <a:prstGeom prst="ellipse">
+            <a:avLst/>
+          </a:prstGeom>
+          <a:noFill/>
+          <a:ln w="50800">
+            <a:solidFill>
+              <a:schemeClr val="accent5">
+                <a:lumMod val="75000"/>
+              </a:schemeClr>
+            </a:solidFill>
+          </a:ln>
+        </p:spPr>
+        <p:style>
+          <a:lnRef idx="2">
+            <a:schemeClr val="accent1">
+              <a:shade val="15000"/>
+            </a:schemeClr>
+          </a:lnRef>
+          <a:fillRef idx="1">
+            <a:schemeClr val="accent1"/>
+          </a:fillRef>
+          <a:effectRef idx="0">
+            <a:schemeClr val="accent1"/>
+          </a:effectRef>
+          <a:fontRef idx="minor">
+            <a:schemeClr val="lt1"/>
+          </a:fontRef>
+        </p:style>
+        <p:txBody>
+          <a:bodyPr rtlCol="0" anchor="ctr"/>
+          <a:lstStyle/>
+          <a:p>
+            <a:pPr algn="ctr"/>
+            <a:endParaRPr lang="en-NZ"/>
+          </a:p>
+        </p:txBody>
+      </p:sp>
+      <p:cxnSp>
+        <p:nvCxnSpPr>
+          <p:cNvPr id="48" name="Straight Arrow Connector 47">
+            <a:extLst>
+              <a:ext uri="{FF2B5EF4-FFF2-40B4-BE49-F238E27FC236}">
+                <a16:creationId xmlns:a16="http://schemas.microsoft.com/office/drawing/2014/main" id="{DE20FE25-CDF8-A882-7CC7-AC27879E490D}"/>
+              </a:ext>
+            </a:extLst>
+          </p:cNvPr>
+          <p:cNvCxnSpPr>
+            <a:cxnSpLocks/>
+          </p:cNvCxnSpPr>
+          <p:nvPr/>
+        </p:nvCxnSpPr>
+        <p:spPr>
+          <a:xfrm>
+            <a:off x="2675083" y="1950221"/>
+            <a:ext cx="551122" cy="0"/>
+          </a:xfrm>
+          <a:prstGeom prst="straightConnector1">
+            <a:avLst/>
+          </a:prstGeom>
+          <a:ln w="50800">
+            <a:solidFill>
+              <a:schemeClr val="accent1"/>
+            </a:solidFill>
+            <a:tailEnd type="triangle"/>
+          </a:ln>
+        </p:spPr>
+        <p:style>
+          <a:lnRef idx="2">
+            <a:schemeClr val="accent1"/>
+          </a:lnRef>
+          <a:fillRef idx="0">
+            <a:schemeClr val="accent1"/>
+          </a:fillRef>
+          <a:effectRef idx="1">
+            <a:schemeClr val="accent1"/>
+          </a:effectRef>
+          <a:fontRef idx="minor">
+            <a:schemeClr val="tx1"/>
+          </a:fontRef>
+        </p:style>
+      </p:cxnSp>
+      <p:sp>
+        <p:nvSpPr>
+          <p:cNvPr id="49" name="Oval 48">
+            <a:extLst>
+              <a:ext uri="{FF2B5EF4-FFF2-40B4-BE49-F238E27FC236}">
+                <a16:creationId xmlns:a16="http://schemas.microsoft.com/office/drawing/2014/main" id="{3F95C467-40E6-196C-2B91-376DF78548FE}"/>
+              </a:ext>
+            </a:extLst>
+          </p:cNvPr>
+          <p:cNvSpPr/>
+          <p:nvPr/>
+        </p:nvSpPr>
+        <p:spPr>
+          <a:xfrm>
+            <a:off x="3622457" y="1064740"/>
+            <a:ext cx="1770962" cy="1770962"/>
+          </a:xfrm>
+          <a:prstGeom prst="ellipse">
+            <a:avLst/>
+          </a:prstGeom>
+          <a:noFill/>
+          <a:ln w="50800">
+            <a:solidFill>
+              <a:schemeClr val="accent5">
+                <a:lumMod val="60000"/>
+                <a:lumOff val="40000"/>
+              </a:schemeClr>
+            </a:solidFill>
+          </a:ln>
+        </p:spPr>
+        <p:style>
+          <a:lnRef idx="2">
+            <a:schemeClr val="accent1">
+              <a:shade val="15000"/>
+            </a:schemeClr>
+          </a:lnRef>
+          <a:fillRef idx="1">
+            <a:schemeClr val="accent1"/>
+          </a:fillRef>
+          <a:effectRef idx="0">
+            <a:schemeClr val="accent1"/>
+          </a:effectRef>
+          <a:fontRef idx="minor">
+            <a:schemeClr val="lt1"/>
+          </a:fontRef>
+        </p:style>
+        <p:txBody>
+          <a:bodyPr rtlCol="0" anchor="ctr"/>
+          <a:lstStyle/>
+          <a:p>
+            <a:pPr algn="ctr"/>
+            <a:endParaRPr lang="en-NZ"/>
+          </a:p>
+        </p:txBody>
+      </p:sp>
+      <p:sp>
+        <p:nvSpPr>
+          <p:cNvPr id="50" name="TextBox 49">
+            <a:extLst>
+              <a:ext uri="{FF2B5EF4-FFF2-40B4-BE49-F238E27FC236}">
+                <a16:creationId xmlns:a16="http://schemas.microsoft.com/office/drawing/2014/main" id="{46B07A92-3423-AB54-8824-8016AC697C2F}"/>
+              </a:ext>
+            </a:extLst>
+          </p:cNvPr>
+          <p:cNvSpPr txBox="1"/>
+          <p:nvPr/>
+        </p:nvSpPr>
+        <p:spPr>
+          <a:xfrm>
+            <a:off x="2153025" y="2715557"/>
+            <a:ext cx="1578166" cy="369332"/>
+          </a:xfrm>
+          <a:prstGeom prst="rect">
+            <a:avLst/>
+          </a:prstGeom>
+          <a:noFill/>
+        </p:spPr>
+        <p:txBody>
+          <a:bodyPr wrap="square">
+            <a:spAutoFit/>
+          </a:bodyPr>
+          <a:lstStyle/>
+          <a:p>
+            <a:pPr algn="ctr"/>
+            <a:r>
+              <a:rPr lang="en-NZ" sz="1800" i="1" dirty="0"/>
+              <a:t>Exotic theft</a:t>
+            </a:r>
+          </a:p>
+        </p:txBody>
+      </p:sp>
+      <p:sp>
+        <p:nvSpPr>
+          <p:cNvPr id="51" name="Oval 50">
+            <a:extLst>
+              <a:ext uri="{FF2B5EF4-FFF2-40B4-BE49-F238E27FC236}">
+                <a16:creationId xmlns:a16="http://schemas.microsoft.com/office/drawing/2014/main" id="{C359A655-CDEF-C3C3-D94F-1B597CEA3C29}"/>
+              </a:ext>
+            </a:extLst>
+          </p:cNvPr>
+          <p:cNvSpPr/>
+          <p:nvPr/>
+        </p:nvSpPr>
+        <p:spPr>
+          <a:xfrm>
+            <a:off x="7996517" y="987624"/>
+            <a:ext cx="1977913" cy="1977913"/>
+          </a:xfrm>
+          <a:prstGeom prst="ellipse">
+            <a:avLst/>
+          </a:prstGeom>
+          <a:noFill/>
+          <a:ln w="50800">
+            <a:solidFill>
+              <a:schemeClr val="accent5">
+                <a:lumMod val="60000"/>
+                <a:lumOff val="40000"/>
+              </a:schemeClr>
+            </a:solidFill>
+          </a:ln>
+        </p:spPr>
+        <p:style>
+          <a:lnRef idx="2">
+            <a:schemeClr val="accent1">
+              <a:shade val="15000"/>
+            </a:schemeClr>
+          </a:lnRef>
+          <a:fillRef idx="1">
+            <a:schemeClr val="accent1"/>
+          </a:fillRef>
+          <a:effectRef idx="0">
+            <a:schemeClr val="accent1"/>
+          </a:effectRef>
+          <a:fontRef idx="minor">
+            <a:schemeClr val="lt1"/>
+          </a:fontRef>
+        </p:style>
+        <p:txBody>
+          <a:bodyPr rtlCol="0" anchor="ctr"/>
+          <a:lstStyle/>
+          <a:p>
+            <a:pPr algn="ctr"/>
+            <a:endParaRPr lang="en-NZ"/>
+          </a:p>
+        </p:txBody>
+      </p:sp>
+      <p:sp>
+        <p:nvSpPr>
+          <p:cNvPr id="52" name="Oval 51">
+            <a:extLst>
+              <a:ext uri="{FF2B5EF4-FFF2-40B4-BE49-F238E27FC236}">
+                <a16:creationId xmlns:a16="http://schemas.microsoft.com/office/drawing/2014/main" id="{73D57C5E-0DB0-7B5E-A673-8546B2A60019}"/>
+              </a:ext>
+            </a:extLst>
+          </p:cNvPr>
+          <p:cNvSpPr/>
+          <p:nvPr/>
+        </p:nvSpPr>
+        <p:spPr>
+          <a:xfrm>
+            <a:off x="8517355" y="1503014"/>
+            <a:ext cx="936236" cy="936236"/>
+          </a:xfrm>
+          <a:prstGeom prst="ellipse">
+            <a:avLst/>
+          </a:prstGeom>
+          <a:noFill/>
+          <a:ln w="50800">
+            <a:solidFill>
+              <a:schemeClr val="accent5">
+                <a:lumMod val="75000"/>
+              </a:schemeClr>
+            </a:solidFill>
+          </a:ln>
+        </p:spPr>
+        <p:style>
+          <a:lnRef idx="2">
+            <a:schemeClr val="accent1">
+              <a:shade val="15000"/>
+            </a:schemeClr>
+          </a:lnRef>
+          <a:fillRef idx="1">
+            <a:schemeClr val="accent1"/>
+          </a:fillRef>
+          <a:effectRef idx="0">
+            <a:schemeClr val="accent1"/>
+          </a:effectRef>
+          <a:fontRef idx="minor">
+            <a:schemeClr val="lt1"/>
+          </a:fontRef>
+        </p:style>
+        <p:txBody>
+          <a:bodyPr rtlCol="0" anchor="ctr"/>
+          <a:lstStyle/>
+          <a:p>
+            <a:pPr algn="ctr"/>
+            <a:endParaRPr lang="en-NZ"/>
+          </a:p>
+        </p:txBody>
+      </p:sp>
+      <p:cxnSp>
+        <p:nvCxnSpPr>
+          <p:cNvPr id="53" name="Straight Arrow Connector 52">
+            <a:extLst>
+              <a:ext uri="{FF2B5EF4-FFF2-40B4-BE49-F238E27FC236}">
+                <a16:creationId xmlns:a16="http://schemas.microsoft.com/office/drawing/2014/main" id="{100BDC21-5E85-47CF-F57F-DA32E1609442}"/>
+              </a:ext>
+            </a:extLst>
+          </p:cNvPr>
+          <p:cNvCxnSpPr>
+            <a:cxnSpLocks/>
+          </p:cNvCxnSpPr>
+          <p:nvPr/>
+        </p:nvCxnSpPr>
+        <p:spPr>
+          <a:xfrm rot="2700000" flipH="1">
+            <a:off x="8435741" y="1582326"/>
+            <a:ext cx="360000" cy="0"/>
+          </a:xfrm>
+          <a:prstGeom prst="straightConnector1">
+            <a:avLst/>
+          </a:prstGeom>
+          <a:ln w="50800">
+            <a:solidFill>
+              <a:schemeClr val="accent1"/>
+            </a:solidFill>
+            <a:tailEnd type="triangle"/>
+          </a:ln>
+        </p:spPr>
+        <p:style>
+          <a:lnRef idx="2">
+            <a:schemeClr val="accent1"/>
+          </a:lnRef>
+          <a:fillRef idx="0">
+            <a:schemeClr val="accent1"/>
+          </a:fillRef>
+          <a:effectRef idx="1">
+            <a:schemeClr val="accent1"/>
+          </a:effectRef>
+          <a:fontRef idx="minor">
+            <a:schemeClr val="tx1"/>
+          </a:fontRef>
+        </p:style>
+      </p:cxnSp>
+      <p:cxnSp>
+        <p:nvCxnSpPr>
+          <p:cNvPr id="54" name="Straight Arrow Connector 53">
+            <a:extLst>
+              <a:ext uri="{FF2B5EF4-FFF2-40B4-BE49-F238E27FC236}">
+                <a16:creationId xmlns:a16="http://schemas.microsoft.com/office/drawing/2014/main" id="{DBE737E4-10FE-A847-7321-9DBC4B48A3FD}"/>
+              </a:ext>
+            </a:extLst>
+          </p:cNvPr>
+          <p:cNvCxnSpPr>
+            <a:cxnSpLocks/>
+          </p:cNvCxnSpPr>
+          <p:nvPr/>
+        </p:nvCxnSpPr>
+        <p:spPr>
+          <a:xfrm rot="13500000" flipH="1">
+            <a:off x="9217938" y="2320196"/>
+            <a:ext cx="360000" cy="0"/>
+          </a:xfrm>
+          <a:prstGeom prst="straightConnector1">
+            <a:avLst/>
+          </a:prstGeom>
+          <a:ln w="50800">
+            <a:solidFill>
+              <a:schemeClr val="accent1"/>
+            </a:solidFill>
+            <a:tailEnd type="triangle"/>
+          </a:ln>
+        </p:spPr>
+        <p:style>
+          <a:lnRef idx="2">
+            <a:schemeClr val="accent1"/>
+          </a:lnRef>
+          <a:fillRef idx="0">
+            <a:schemeClr val="accent1"/>
+          </a:fillRef>
+          <a:effectRef idx="1">
+            <a:schemeClr val="accent1"/>
+          </a:effectRef>
+          <a:fontRef idx="minor">
+            <a:schemeClr val="tx1"/>
+          </a:fontRef>
+        </p:style>
+      </p:cxnSp>
+      <p:sp>
+        <p:nvSpPr>
+          <p:cNvPr id="55" name="TextBox 54">
+            <a:extLst>
+              <a:ext uri="{FF2B5EF4-FFF2-40B4-BE49-F238E27FC236}">
+                <a16:creationId xmlns:a16="http://schemas.microsoft.com/office/drawing/2014/main" id="{0C0477B9-B60D-B297-DCCB-CF578EC36AC2}"/>
+              </a:ext>
+            </a:extLst>
+          </p:cNvPr>
+          <p:cNvSpPr txBox="1"/>
+          <p:nvPr/>
+        </p:nvSpPr>
+        <p:spPr>
+          <a:xfrm>
+            <a:off x="9974430" y="2605725"/>
+            <a:ext cx="1937196" cy="369332"/>
+          </a:xfrm>
+          <a:prstGeom prst="rect">
+            <a:avLst/>
+          </a:prstGeom>
+          <a:noFill/>
+        </p:spPr>
+        <p:txBody>
+          <a:bodyPr wrap="square">
+            <a:spAutoFit/>
+          </a:bodyPr>
+          <a:lstStyle/>
+          <a:p>
+            <a:pPr algn="ctr"/>
+            <a:r>
+              <a:rPr lang="en-NZ" i="1" dirty="0"/>
+              <a:t>Commodity</a:t>
+            </a:r>
+            <a:r>
+              <a:rPr lang="en-NZ" sz="1800" i="1" dirty="0"/>
+              <a:t> theft</a:t>
+            </a:r>
+          </a:p>
+        </p:txBody>
+      </p:sp>
+      <p:cxnSp>
+        <p:nvCxnSpPr>
+          <p:cNvPr id="60" name="Straight Arrow Connector 59">
+            <a:extLst>
+              <a:ext uri="{FF2B5EF4-FFF2-40B4-BE49-F238E27FC236}">
+                <a16:creationId xmlns:a16="http://schemas.microsoft.com/office/drawing/2014/main" id="{27F398B2-E057-1319-929E-1E6A57E200FE}"/>
+              </a:ext>
+            </a:extLst>
+          </p:cNvPr>
+          <p:cNvCxnSpPr>
+            <a:cxnSpLocks/>
+          </p:cNvCxnSpPr>
+          <p:nvPr/>
+        </p:nvCxnSpPr>
+        <p:spPr>
+          <a:xfrm>
+            <a:off x="6132512" y="0"/>
+            <a:ext cx="0" cy="6508323"/>
+          </a:xfrm>
+          <a:prstGeom prst="straightConnector1">
+            <a:avLst/>
+          </a:prstGeom>
+          <a:ln w="63500">
+            <a:headEnd type="triangle" w="lg" len="lg"/>
+            <a:tailEnd type="triangle" w="lg" len="lg"/>
+          </a:ln>
+        </p:spPr>
+        <p:style>
+          <a:lnRef idx="2">
+            <a:schemeClr val="accent1"/>
+          </a:lnRef>
+          <a:fillRef idx="0">
+            <a:schemeClr val="accent1"/>
+          </a:fillRef>
+          <a:effectRef idx="1">
+            <a:schemeClr val="accent1"/>
+          </a:effectRef>
+          <a:fontRef idx="minor">
+            <a:schemeClr val="tx1"/>
+          </a:fontRef>
+        </p:style>
+      </p:cxnSp>
+      <p:cxnSp>
+        <p:nvCxnSpPr>
+          <p:cNvPr id="63" name="Straight Arrow Connector 62">
+            <a:extLst>
+              <a:ext uri="{FF2B5EF4-FFF2-40B4-BE49-F238E27FC236}">
+                <a16:creationId xmlns:a16="http://schemas.microsoft.com/office/drawing/2014/main" id="{FE63B924-201F-7C08-ABF5-E0C20C0C16A6}"/>
+              </a:ext>
+            </a:extLst>
+          </p:cNvPr>
+          <p:cNvCxnSpPr>
+            <a:cxnSpLocks/>
+          </p:cNvCxnSpPr>
+          <p:nvPr/>
+        </p:nvCxnSpPr>
+        <p:spPr>
+          <a:xfrm>
+            <a:off x="0" y="3429000"/>
+            <a:ext cx="12191999" cy="0"/>
+          </a:xfrm>
+          <a:prstGeom prst="straightConnector1">
+            <a:avLst/>
+          </a:prstGeom>
+          <a:ln w="63500">
+            <a:headEnd type="triangle" w="lg" len="lg"/>
+            <a:tailEnd type="triangle" w="lg" len="lg"/>
+          </a:ln>
+        </p:spPr>
+        <p:style>
+          <a:lnRef idx="2">
+            <a:schemeClr val="accent1"/>
+          </a:lnRef>
+          <a:fillRef idx="0">
+            <a:schemeClr val="accent1"/>
+          </a:fillRef>
+          <a:effectRef idx="1">
+            <a:schemeClr val="accent1"/>
+          </a:effectRef>
+          <a:fontRef idx="minor">
+            <a:schemeClr val="tx1"/>
+          </a:fontRef>
+        </p:style>
+      </p:cxnSp>
+      <p:sp>
+        <p:nvSpPr>
+          <p:cNvPr id="66" name="Rectangle 65">
+            <a:extLst>
+              <a:ext uri="{FF2B5EF4-FFF2-40B4-BE49-F238E27FC236}">
+                <a16:creationId xmlns:a16="http://schemas.microsoft.com/office/drawing/2014/main" id="{AD8B05A5-6727-FABD-56FE-F7D45D325B8E}"/>
+              </a:ext>
+            </a:extLst>
+          </p:cNvPr>
+          <p:cNvSpPr/>
+          <p:nvPr/>
+        </p:nvSpPr>
+        <p:spPr>
+          <a:xfrm>
+            <a:off x="990813" y="353944"/>
+            <a:ext cx="4150885" cy="397205"/>
+          </a:xfrm>
+          <a:prstGeom prst="rect">
+            <a:avLst/>
+          </a:prstGeom>
+          <a:solidFill>
+            <a:schemeClr val="bg1"/>
+          </a:solidFill>
+        </p:spPr>
+        <p:style>
+          <a:lnRef idx="2">
+            <a:schemeClr val="accent1">
+              <a:shade val="15000"/>
+            </a:schemeClr>
+          </a:lnRef>
+          <a:fillRef idx="1">
+            <a:schemeClr val="accent1"/>
+          </a:fillRef>
+          <a:effectRef idx="0">
+            <a:schemeClr val="accent1"/>
+          </a:effectRef>
+          <a:fontRef idx="minor">
+            <a:schemeClr val="lt1"/>
+          </a:fontRef>
+        </p:style>
+        <p:txBody>
+          <a:bodyPr rtlCol="0" anchor="ctr"/>
+          <a:lstStyle/>
+          <a:p>
+            <a:pPr algn="ctr"/>
+            <a:r>
+              <a:rPr lang="en-NZ" sz="1800" b="1" dirty="0">
+                <a:solidFill>
+                  <a:schemeClr val="tx1"/>
+                </a:solidFill>
+              </a:rPr>
+              <a:t>Independent specialists (Parasitism)</a:t>
+            </a:r>
+          </a:p>
+        </p:txBody>
+      </p:sp>
+      <p:sp>
+        <p:nvSpPr>
+          <p:cNvPr id="67" name="Rectangle 66">
+            <a:extLst>
+              <a:ext uri="{FF2B5EF4-FFF2-40B4-BE49-F238E27FC236}">
+                <a16:creationId xmlns:a16="http://schemas.microsoft.com/office/drawing/2014/main" id="{8D47A269-9F11-1121-E490-9879B0BFD64D}"/>
+              </a:ext>
+            </a:extLst>
+          </p:cNvPr>
+          <p:cNvSpPr/>
+          <p:nvPr/>
+        </p:nvSpPr>
+        <p:spPr>
+          <a:xfrm>
+            <a:off x="6885109" y="356665"/>
+            <a:ext cx="4389100" cy="397205"/>
+          </a:xfrm>
+          <a:prstGeom prst="rect">
+            <a:avLst/>
+          </a:prstGeom>
+          <a:solidFill>
+            <a:schemeClr val="bg1"/>
+          </a:solidFill>
+        </p:spPr>
+        <p:style>
+          <a:lnRef idx="2">
+            <a:schemeClr val="accent1">
+              <a:shade val="15000"/>
+            </a:schemeClr>
+          </a:lnRef>
+          <a:fillRef idx="1">
+            <a:schemeClr val="accent1"/>
+          </a:fillRef>
+          <a:effectRef idx="0">
+            <a:schemeClr val="accent1"/>
+          </a:effectRef>
+          <a:fontRef idx="minor">
+            <a:schemeClr val="lt1"/>
+          </a:fontRef>
+        </p:style>
+        <p:txBody>
+          <a:bodyPr rtlCol="0" anchor="ctr"/>
+          <a:lstStyle/>
+          <a:p>
+            <a:pPr algn="ctr"/>
+            <a:r>
+              <a:rPr lang="en-NZ" sz="1800" b="1" dirty="0">
+                <a:solidFill>
+                  <a:schemeClr val="tx1"/>
+                </a:solidFill>
+              </a:rPr>
+              <a:t>Independent generalists (Predator/Prey)</a:t>
+            </a:r>
+          </a:p>
+        </p:txBody>
+      </p:sp>
+      <p:sp>
+        <p:nvSpPr>
+          <p:cNvPr id="68" name="Rectangle 67">
+            <a:extLst>
+              <a:ext uri="{FF2B5EF4-FFF2-40B4-BE49-F238E27FC236}">
+                <a16:creationId xmlns:a16="http://schemas.microsoft.com/office/drawing/2014/main" id="{CF6EAE85-33F0-A524-0112-027C1F25D631}"/>
+              </a:ext>
+            </a:extLst>
+          </p:cNvPr>
+          <p:cNvSpPr/>
+          <p:nvPr/>
+        </p:nvSpPr>
+        <p:spPr>
+          <a:xfrm>
+            <a:off x="1072113" y="3675171"/>
+            <a:ext cx="3988283" cy="397205"/>
+          </a:xfrm>
+          <a:prstGeom prst="rect">
+            <a:avLst/>
+          </a:prstGeom>
+          <a:solidFill>
+            <a:schemeClr val="bg1"/>
+          </a:solidFill>
+        </p:spPr>
+        <p:style>
+          <a:lnRef idx="2">
+            <a:schemeClr val="accent1">
+              <a:shade val="15000"/>
+            </a:schemeClr>
+          </a:lnRef>
+          <a:fillRef idx="1">
+            <a:schemeClr val="accent1"/>
+          </a:fillRef>
+          <a:effectRef idx="0">
+            <a:schemeClr val="accent1"/>
+          </a:effectRef>
+          <a:fontRef idx="minor">
+            <a:schemeClr val="lt1"/>
+          </a:fontRef>
+        </p:style>
+        <p:txBody>
+          <a:bodyPr rtlCol="0" anchor="ctr"/>
+          <a:lstStyle/>
+          <a:p>
+            <a:pPr algn="ctr"/>
+            <a:r>
+              <a:rPr lang="en-NZ" sz="1800" b="1" dirty="0">
+                <a:solidFill>
+                  <a:schemeClr val="tx1"/>
+                </a:solidFill>
+              </a:rPr>
+              <a:t>Dependent specialists (Mutualism)</a:t>
+            </a:r>
+          </a:p>
+        </p:txBody>
+      </p:sp>
+      <p:sp>
+        <p:nvSpPr>
+          <p:cNvPr id="69" name="Rectangle 68">
+            <a:extLst>
+              <a:ext uri="{FF2B5EF4-FFF2-40B4-BE49-F238E27FC236}">
+                <a16:creationId xmlns:a16="http://schemas.microsoft.com/office/drawing/2014/main" id="{00413206-DD64-9BA2-2972-950617486392}"/>
+              </a:ext>
+            </a:extLst>
+          </p:cNvPr>
+          <p:cNvSpPr/>
+          <p:nvPr/>
+        </p:nvSpPr>
+        <p:spPr>
+          <a:xfrm>
+            <a:off x="7028504" y="3599729"/>
+            <a:ext cx="4091383" cy="397205"/>
+          </a:xfrm>
+          <a:prstGeom prst="rect">
+            <a:avLst/>
+          </a:prstGeom>
+          <a:solidFill>
+            <a:schemeClr val="bg1"/>
+          </a:solidFill>
+        </p:spPr>
+        <p:style>
+          <a:lnRef idx="2">
+            <a:schemeClr val="accent1">
+              <a:shade val="15000"/>
+            </a:schemeClr>
+          </a:lnRef>
+          <a:fillRef idx="1">
+            <a:schemeClr val="accent1"/>
+          </a:fillRef>
+          <a:effectRef idx="0">
+            <a:schemeClr val="accent1"/>
+          </a:effectRef>
+          <a:fontRef idx="minor">
+            <a:schemeClr val="lt1"/>
+          </a:fontRef>
+        </p:style>
+        <p:txBody>
+          <a:bodyPr rtlCol="0" anchor="ctr"/>
+          <a:lstStyle/>
+          <a:p>
+            <a:pPr algn="ctr"/>
+            <a:r>
+              <a:rPr lang="en-NZ" sz="1800" b="1" dirty="0">
+                <a:solidFill>
+                  <a:schemeClr val="tx1"/>
+                </a:solidFill>
+              </a:rPr>
+              <a:t>Dependent generalists (Antagonism)</a:t>
+            </a:r>
+          </a:p>
+        </p:txBody>
+      </p:sp>
+      <p:pic>
+        <p:nvPicPr>
+          <p:cNvPr id="70" name="Picture 69" descr="A skull and crossbones on a black background&#10;&#10;AI-generated content may be incorrect.">
+            <a:extLst>
+              <a:ext uri="{FF2B5EF4-FFF2-40B4-BE49-F238E27FC236}">
+                <a16:creationId xmlns:a16="http://schemas.microsoft.com/office/drawing/2014/main" id="{8CDE4979-DFD9-1F33-0E7F-6FDBCC32F375}"/>
+              </a:ext>
+            </a:extLst>
+          </p:cNvPr>
+          <p:cNvPicPr>
+            <a:picLocks noChangeAspect="1"/>
+          </p:cNvPicPr>
+          <p:nvPr/>
+        </p:nvPicPr>
+        <p:blipFill>
+          <a:blip r:embed="rId3">
+            <a:extLst>
+              <a:ext uri="{28A0092B-C50C-407E-A947-70E740481C1C}">
+                <a14:useLocalDpi xmlns:a14="http://schemas.microsoft.com/office/drawing/2010/main" val="0"/>
+              </a:ext>
+            </a:extLst>
+          </a:blip>
+          <a:stretch>
+            <a:fillRect/>
+          </a:stretch>
+        </p:blipFill>
+        <p:spPr>
+          <a:xfrm>
+            <a:off x="8806557" y="1797706"/>
+            <a:ext cx="360902" cy="346852"/>
+          </a:xfrm>
+          <a:prstGeom prst="rect">
+            <a:avLst/>
+          </a:prstGeom>
+        </p:spPr>
+      </p:pic>
+      <p:pic>
+        <p:nvPicPr>
+          <p:cNvPr id="71" name="Picture 70" descr="A skull and crossbones on a black background&#10;&#10;AI-generated content may be incorrect.">
+            <a:extLst>
+              <a:ext uri="{FF2B5EF4-FFF2-40B4-BE49-F238E27FC236}">
+                <a16:creationId xmlns:a16="http://schemas.microsoft.com/office/drawing/2014/main" id="{672720E3-2CE2-FABB-6F10-6AC712DF07BD}"/>
+              </a:ext>
+            </a:extLst>
+          </p:cNvPr>
+          <p:cNvPicPr>
+            <a:picLocks noChangeAspect="1"/>
+          </p:cNvPicPr>
+          <p:nvPr/>
+        </p:nvPicPr>
+        <p:blipFill>
+          <a:blip r:embed="rId3">
+            <a:extLst>
+              <a:ext uri="{28A0092B-C50C-407E-A947-70E740481C1C}">
+                <a14:useLocalDpi xmlns:a14="http://schemas.microsoft.com/office/drawing/2010/main" val="0"/>
+              </a:ext>
+            </a:extLst>
+          </a:blip>
+          <a:stretch>
+            <a:fillRect/>
+          </a:stretch>
+        </p:blipFill>
+        <p:spPr>
+          <a:xfrm>
+            <a:off x="8801354" y="4928097"/>
+            <a:ext cx="360902" cy="346852"/>
+          </a:xfrm>
+          <a:prstGeom prst="rect">
+            <a:avLst/>
+          </a:prstGeom>
+        </p:spPr>
+      </p:pic>
+    </p:spTree>
+    <p:extLst>
+      <p:ext uri="{BB962C8B-B14F-4D97-AF65-F5344CB8AC3E}">
+        <p14:creationId xmlns:p14="http://schemas.microsoft.com/office/powerpoint/2010/main" val="2270087678"/>
       </p:ext>
     </p:extLst>
   </p:cSld>
@@ -10355,4 +12439,319 @@
     </a:ext>
   </a:extLst>
 </a:theme>
+</file>
+
+<file path=ppt/theme/theme2.xml><?xml version="1.0" encoding="utf-8"?>
+<a:theme xmlns:a="http://schemas.openxmlformats.org/drawingml/2006/main" name="Office Theme">
+  <a:themeElements>
+    <a:clrScheme name="Office">
+      <a:dk1>
+        <a:sysClr val="windowText" lastClr="000000"/>
+      </a:dk1>
+      <a:lt1>
+        <a:sysClr val="window" lastClr="FFFFFF"/>
+      </a:lt1>
+      <a:dk2>
+        <a:srgbClr val="0E2841"/>
+      </a:dk2>
+      <a:lt2>
+        <a:srgbClr val="E8E8E8"/>
+      </a:lt2>
+      <a:accent1>
+        <a:srgbClr val="156082"/>
+      </a:accent1>
+      <a:accent2>
+        <a:srgbClr val="E97132"/>
+      </a:accent2>
+      <a:accent3>
+        <a:srgbClr val="196B24"/>
+      </a:accent3>
+      <a:accent4>
+        <a:srgbClr val="0F9ED5"/>
+      </a:accent4>
+      <a:accent5>
+        <a:srgbClr val="A02B93"/>
+      </a:accent5>
+      <a:accent6>
+        <a:srgbClr val="4EA72E"/>
+      </a:accent6>
+      <a:hlink>
+        <a:srgbClr val="467886"/>
+      </a:hlink>
+      <a:folHlink>
+        <a:srgbClr val="96607D"/>
+      </a:folHlink>
+    </a:clrScheme>
+    <a:fontScheme name="Office">
+      <a:majorFont>
+        <a:latin typeface="Aptos Display" panose="02110004020202020204"/>
+        <a:ea typeface=""/>
+        <a:cs typeface=""/>
+        <a:font script="Jpan" typeface="游ゴシック Light"/>
+        <a:font script="Hang" typeface="맑은 고딕"/>
+        <a:font script="Hans" typeface="等线 Light"/>
+        <a:font script="Hant" typeface="新細明體"/>
+        <a:font script="Arab" typeface="Times New Roman"/>
+        <a:font script="Hebr" typeface="Times New Roman"/>
+        <a:font script="Thai" typeface="Angsana New"/>
+        <a:font script="Ethi" typeface="Nyala"/>
+        <a:font script="Beng" typeface="Vrinda"/>
+        <a:font script="Gujr" typeface="Shruti"/>
+        <a:font script="Khmr" typeface="MoolBoran"/>
+        <a:font script="Knda" typeface="Tunga"/>
+        <a:font script="Guru" typeface="Raavi"/>
+        <a:font script="Cans" typeface="Euphemia"/>
+        <a:font script="Cher" typeface="Plantagenet Cherokee"/>
+        <a:font script="Yiii" typeface="Microsoft Yi Baiti"/>
+        <a:font script="Tibt" typeface="Microsoft Himalaya"/>
+        <a:font script="Thaa" typeface="MV Boli"/>
+        <a:font script="Deva" typeface="Mangal"/>
+        <a:font script="Telu" typeface="Gautami"/>
+        <a:font script="Taml" typeface="Latha"/>
+        <a:font script="Syrc" typeface="Estrangelo Edessa"/>
+        <a:font script="Orya" typeface="Kalinga"/>
+        <a:font script="Mlym" typeface="Kartika"/>
+        <a:font script="Laoo" typeface="DokChampa"/>
+        <a:font script="Sinh" typeface="Iskoola Pota"/>
+        <a:font script="Mong" typeface="Mongolian Baiti"/>
+        <a:font script="Viet" typeface="Times New Roman"/>
+        <a:font script="Uigh" typeface="Microsoft Uighur"/>
+        <a:font script="Geor" typeface="Sylfaen"/>
+        <a:font script="Armn" typeface="Arial"/>
+        <a:font script="Bugi" typeface="Leelawadee UI"/>
+        <a:font script="Bopo" typeface="Microsoft JhengHei"/>
+        <a:font script="Java" typeface="Javanese Text"/>
+        <a:font script="Lisu" typeface="Segoe UI"/>
+        <a:font script="Mymr" typeface="Myanmar Text"/>
+        <a:font script="Nkoo" typeface="Ebrima"/>
+        <a:font script="Olck" typeface="Nirmala UI"/>
+        <a:font script="Osma" typeface="Ebrima"/>
+        <a:font script="Phag" typeface="Phagspa"/>
+        <a:font script="Syrn" typeface="Estrangelo Edessa"/>
+        <a:font script="Syrj" typeface="Estrangelo Edessa"/>
+        <a:font script="Syre" typeface="Estrangelo Edessa"/>
+        <a:font script="Sora" typeface="Nirmala UI"/>
+        <a:font script="Tale" typeface="Microsoft Tai Le"/>
+        <a:font script="Talu" typeface="Microsoft New Tai Lue"/>
+        <a:font script="Tfng" typeface="Ebrima"/>
+      </a:majorFont>
+      <a:minorFont>
+        <a:latin typeface="Aptos" panose="02110004020202020204"/>
+        <a:ea typeface=""/>
+        <a:cs typeface=""/>
+        <a:font script="Jpan" typeface="游ゴシック"/>
+        <a:font script="Hang" typeface="맑은 고딕"/>
+        <a:font script="Hans" typeface="等线"/>
+        <a:font script="Hant" typeface="新細明體"/>
+        <a:font script="Arab" typeface="Arial"/>
+        <a:font script="Hebr" typeface="Arial"/>
+        <a:font script="Thai" typeface="Cordia New"/>
+        <a:font script="Ethi" typeface="Nyala"/>
+        <a:font script="Beng" typeface="Vrinda"/>
+        <a:font script="Gujr" typeface="Shruti"/>
+        <a:font script="Khmr" typeface="DaunPenh"/>
+        <a:font script="Knda" typeface="Tunga"/>
+        <a:font script="Guru" typeface="Raavi"/>
+        <a:font script="Cans" typeface="Euphemia"/>
+        <a:font script="Cher" typeface="Plantagenet Cherokee"/>
+        <a:font script="Yiii" typeface="Microsoft Yi Baiti"/>
+        <a:font script="Tibt" typeface="Microsoft Himalaya"/>
+        <a:font script="Thaa" typeface="MV Boli"/>
+        <a:font script="Deva" typeface="Mangal"/>
+        <a:font script="Telu" typeface="Gautami"/>
+        <a:font script="Taml" typeface="Latha"/>
+        <a:font script="Syrc" typeface="Estrangelo Edessa"/>
+        <a:font script="Orya" typeface="Kalinga"/>
+        <a:font script="Mlym" typeface="Kartika"/>
+        <a:font script="Laoo" typeface="DokChampa"/>
+        <a:font script="Sinh" typeface="Iskoola Pota"/>
+        <a:font script="Mong" typeface="Mongolian Baiti"/>
+        <a:font script="Viet" typeface="Arial"/>
+        <a:font script="Uigh" typeface="Microsoft Uighur"/>
+        <a:font script="Geor" typeface="Sylfaen"/>
+        <a:font script="Armn" typeface="Arial"/>
+        <a:font script="Bugi" typeface="Leelawadee UI"/>
+        <a:font script="Bopo" typeface="Microsoft JhengHei"/>
+        <a:font script="Java" typeface="Javanese Text"/>
+        <a:font script="Lisu" typeface="Segoe UI"/>
+        <a:font script="Mymr" typeface="Myanmar Text"/>
+        <a:font script="Nkoo" typeface="Ebrima"/>
+        <a:font script="Olck" typeface="Nirmala UI"/>
+        <a:font script="Osma" typeface="Ebrima"/>
+        <a:font script="Phag" typeface="Phagspa"/>
+        <a:font script="Syrn" typeface="Estrangelo Edessa"/>
+        <a:font script="Syrj" typeface="Estrangelo Edessa"/>
+        <a:font script="Syre" typeface="Estrangelo Edessa"/>
+        <a:font script="Sora" typeface="Nirmala UI"/>
+        <a:font script="Tale" typeface="Microsoft Tai Le"/>
+        <a:font script="Talu" typeface="Microsoft New Tai Lue"/>
+        <a:font script="Tfng" typeface="Ebrima"/>
+      </a:minorFont>
+    </a:fontScheme>
+    <a:fmtScheme name="Office">
+      <a:fillStyleLst>
+        <a:solidFill>
+          <a:schemeClr val="phClr"/>
+        </a:solidFill>
+        <a:gradFill rotWithShape="1">
+          <a:gsLst>
+            <a:gs pos="0">
+              <a:schemeClr val="phClr">
+                <a:lumMod val="110000"/>
+                <a:satMod val="105000"/>
+                <a:tint val="67000"/>
+              </a:schemeClr>
+            </a:gs>
+            <a:gs pos="50000">
+              <a:schemeClr val="phClr">
+                <a:lumMod val="105000"/>
+                <a:satMod val="103000"/>
+                <a:tint val="73000"/>
+              </a:schemeClr>
+            </a:gs>
+            <a:gs pos="100000">
+              <a:schemeClr val="phClr">
+                <a:lumMod val="105000"/>
+                <a:satMod val="109000"/>
+                <a:tint val="81000"/>
+              </a:schemeClr>
+            </a:gs>
+          </a:gsLst>
+          <a:lin ang="5400000" scaled="0"/>
+        </a:gradFill>
+        <a:gradFill rotWithShape="1">
+          <a:gsLst>
+            <a:gs pos="0">
+              <a:schemeClr val="phClr">
+                <a:satMod val="103000"/>
+                <a:lumMod val="102000"/>
+                <a:tint val="94000"/>
+              </a:schemeClr>
+            </a:gs>
+            <a:gs pos="50000">
+              <a:schemeClr val="phClr">
+                <a:satMod val="110000"/>
+                <a:lumMod val="100000"/>
+                <a:shade val="100000"/>
+              </a:schemeClr>
+            </a:gs>
+            <a:gs pos="100000">
+              <a:schemeClr val="phClr">
+                <a:lumMod val="99000"/>
+                <a:satMod val="120000"/>
+                <a:shade val="78000"/>
+              </a:schemeClr>
+            </a:gs>
+          </a:gsLst>
+          <a:lin ang="5400000" scaled="0"/>
+        </a:gradFill>
+      </a:fillStyleLst>
+      <a:lnStyleLst>
+        <a:ln w="12700" cap="flat" cmpd="sng" algn="ctr">
+          <a:solidFill>
+            <a:schemeClr val="phClr"/>
+          </a:solidFill>
+          <a:prstDash val="solid"/>
+          <a:miter lim="800000"/>
+        </a:ln>
+        <a:ln w="19050" cap="flat" cmpd="sng" algn="ctr">
+          <a:solidFill>
+            <a:schemeClr val="phClr"/>
+          </a:solidFill>
+          <a:prstDash val="solid"/>
+          <a:miter lim="800000"/>
+        </a:ln>
+        <a:ln w="25400" cap="flat" cmpd="sng" algn="ctr">
+          <a:solidFill>
+            <a:schemeClr val="phClr"/>
+          </a:solidFill>
+          <a:prstDash val="solid"/>
+          <a:miter lim="800000"/>
+        </a:ln>
+      </a:lnStyleLst>
+      <a:effectStyleLst>
+        <a:effectStyle>
+          <a:effectLst/>
+        </a:effectStyle>
+        <a:effectStyle>
+          <a:effectLst/>
+        </a:effectStyle>
+        <a:effectStyle>
+          <a:effectLst>
+            <a:outerShdw blurRad="57150" dist="19050" dir="5400000" algn="ctr" rotWithShape="0">
+              <a:srgbClr val="000000">
+                <a:alpha val="63000"/>
+              </a:srgbClr>
+            </a:outerShdw>
+          </a:effectLst>
+        </a:effectStyle>
+      </a:effectStyleLst>
+      <a:bgFillStyleLst>
+        <a:solidFill>
+          <a:schemeClr val="phClr"/>
+        </a:solidFill>
+        <a:solidFill>
+          <a:schemeClr val="phClr">
+            <a:tint val="95000"/>
+            <a:satMod val="170000"/>
+          </a:schemeClr>
+        </a:solidFill>
+        <a:gradFill rotWithShape="1">
+          <a:gsLst>
+            <a:gs pos="0">
+              <a:schemeClr val="phClr">
+                <a:tint val="93000"/>
+                <a:satMod val="150000"/>
+                <a:shade val="98000"/>
+                <a:lumMod val="102000"/>
+              </a:schemeClr>
+            </a:gs>
+            <a:gs pos="50000">
+              <a:schemeClr val="phClr">
+                <a:tint val="98000"/>
+                <a:satMod val="130000"/>
+                <a:shade val="90000"/>
+                <a:lumMod val="103000"/>
+              </a:schemeClr>
+            </a:gs>
+            <a:gs pos="100000">
+              <a:schemeClr val="phClr">
+                <a:shade val="63000"/>
+                <a:satMod val="120000"/>
+              </a:schemeClr>
+            </a:gs>
+          </a:gsLst>
+          <a:lin ang="5400000" scaled="0"/>
+        </a:gradFill>
+      </a:bgFillStyleLst>
+    </a:fmtScheme>
+  </a:themeElements>
+  <a:objectDefaults>
+    <a:lnDef>
+      <a:spPr/>
+      <a:bodyPr/>
+      <a:lstStyle/>
+      <a:style>
+        <a:lnRef idx="2">
+          <a:schemeClr val="accent1"/>
+        </a:lnRef>
+        <a:fillRef idx="0">
+          <a:schemeClr val="accent1"/>
+        </a:fillRef>
+        <a:effectRef idx="1">
+          <a:schemeClr val="accent1"/>
+        </a:effectRef>
+        <a:fontRef idx="minor">
+          <a:schemeClr val="tx1"/>
+        </a:fontRef>
+      </a:style>
+    </a:lnDef>
+  </a:objectDefaults>
+  <a:extraClrSchemeLst/>
+  <a:extLst>
+    <a:ext uri="{05A4C25C-085E-4340-85A3-A5531E510DB2}">
+      <thm15:themeFamily xmlns:thm15="http://schemas.microsoft.com/office/thememl/2012/main" name="Office Theme" id="{2E142A2C-CD16-42D6-873A-C26D2A0506FA}" vid="{1BDDFF52-6CD6-40A5-AB3C-68EB2F1E4D0A}"/>
+    </a:ext>
+  </a:extLst>
+</a:theme>
 </file>
--- a/home-made-diagrams/16.3 homebrew-diagrams.pptx
+++ b/home-made-diagrams/16.3 homebrew-diagrams.pptx
@@ -5,7 +5,7 @@
     <p:sldMasterId id="2147483648" r:id="rId1"/>
   </p:sldMasterIdLst>
   <p:notesMasterIdLst>
-    <p:notesMasterId r:id="rId7"/>
+    <p:notesMasterId r:id="rId8"/>
   </p:notesMasterIdLst>
   <p:sldIdLst>
     <p:sldId id="256" r:id="rId2"/>
@@ -13,6 +13,7 @@
     <p:sldId id="258" r:id="rId4"/>
     <p:sldId id="259" r:id="rId5"/>
     <p:sldId id="260" r:id="rId6"/>
+    <p:sldId id="261" r:id="rId7"/>
   </p:sldIdLst>
   <p:sldSz cx="12192000" cy="6858000"/>
   <p:notesSz cx="6858000" cy="9144000"/>
@@ -12117,6 +12118,615 @@
     <p:extLst>
       <p:ext uri="{BB962C8B-B14F-4D97-AF65-F5344CB8AC3E}">
         <p14:creationId xmlns:p14="http://schemas.microsoft.com/office/powerpoint/2010/main" val="2270087678"/>
+      </p:ext>
+    </p:extLst>
+  </p:cSld>
+  <p:clrMapOvr>
+    <a:masterClrMapping/>
+  </p:clrMapOvr>
+</p:sld>
+</file>
+
+<file path=ppt/slides/slide6.xml><?xml version="1.0" encoding="utf-8"?>
+<p:sld xmlns:a="http://schemas.openxmlformats.org/drawingml/2006/main" xmlns:r="http://schemas.openxmlformats.org/officeDocument/2006/relationships" xmlns:p="http://schemas.openxmlformats.org/presentationml/2006/main">
+  <p:cSld>
+    <p:spTree>
+      <p:nvGrpSpPr>
+        <p:cNvPr id="1" name=""/>
+        <p:cNvGrpSpPr/>
+        <p:nvPr/>
+      </p:nvGrpSpPr>
+      <p:grpSpPr>
+        <a:xfrm>
+          <a:off x="0" y="0"/>
+          <a:ext cx="0" cy="0"/>
+          <a:chOff x="0" y="0"/>
+          <a:chExt cx="0" cy="0"/>
+        </a:xfrm>
+      </p:grpSpPr>
+      <p:sp>
+        <p:nvSpPr>
+          <p:cNvPr id="7" name="Freeform: Shape 6">
+            <a:extLst>
+              <a:ext uri="{FF2B5EF4-FFF2-40B4-BE49-F238E27FC236}">
+                <a16:creationId xmlns:a16="http://schemas.microsoft.com/office/drawing/2014/main" id="{38FE6CA1-B8BB-D05A-3351-44A54B7D0FA8}"/>
+              </a:ext>
+            </a:extLst>
+          </p:cNvPr>
+          <p:cNvSpPr/>
+          <p:nvPr/>
+        </p:nvSpPr>
+        <p:spPr>
+          <a:xfrm>
+            <a:off x="2275519" y="1838632"/>
+            <a:ext cx="7713988" cy="3421626"/>
+          </a:xfrm>
+          <a:custGeom>
+            <a:avLst/>
+            <a:gdLst>
+              <a:gd name="connsiteX0" fmla="*/ 0 w 6184490"/>
+              <a:gd name="connsiteY0" fmla="*/ 2723535 h 2743200"/>
+              <a:gd name="connsiteX1" fmla="*/ 2005780 w 6184490"/>
+              <a:gd name="connsiteY1" fmla="*/ 1956619 h 2743200"/>
+              <a:gd name="connsiteX2" fmla="*/ 3097161 w 6184490"/>
+              <a:gd name="connsiteY2" fmla="*/ 0 h 2743200"/>
+              <a:gd name="connsiteX3" fmla="*/ 4198374 w 6184490"/>
+              <a:gd name="connsiteY3" fmla="*/ 1956619 h 2743200"/>
+              <a:gd name="connsiteX4" fmla="*/ 6184490 w 6184490"/>
+              <a:gd name="connsiteY4" fmla="*/ 2743200 h 2743200"/>
+            </a:gdLst>
+            <a:ahLst/>
+            <a:cxnLst>
+              <a:cxn ang="0">
+                <a:pos x="connsiteX0" y="connsiteY0"/>
+              </a:cxn>
+              <a:cxn ang="0">
+                <a:pos x="connsiteX1" y="connsiteY1"/>
+              </a:cxn>
+              <a:cxn ang="0">
+                <a:pos x="connsiteX2" y="connsiteY2"/>
+              </a:cxn>
+              <a:cxn ang="0">
+                <a:pos x="connsiteX3" y="connsiteY3"/>
+              </a:cxn>
+              <a:cxn ang="0">
+                <a:pos x="connsiteX4" y="connsiteY4"/>
+              </a:cxn>
+            </a:cxnLst>
+            <a:rect l="l" t="t" r="r" b="b"/>
+            <a:pathLst>
+              <a:path w="6184490" h="2743200">
+                <a:moveTo>
+                  <a:pt x="0" y="2723535"/>
+                </a:moveTo>
+                <a:cubicBezTo>
+                  <a:pt x="744793" y="2567038"/>
+                  <a:pt x="1489587" y="2410541"/>
+                  <a:pt x="2005780" y="1956619"/>
+                </a:cubicBezTo>
+                <a:cubicBezTo>
+                  <a:pt x="2521974" y="1502696"/>
+                  <a:pt x="2731729" y="0"/>
+                  <a:pt x="3097161" y="0"/>
+                </a:cubicBezTo>
+                <a:cubicBezTo>
+                  <a:pt x="3462593" y="0"/>
+                  <a:pt x="3683819" y="1499419"/>
+                  <a:pt x="4198374" y="1956619"/>
+                </a:cubicBezTo>
+                <a:cubicBezTo>
+                  <a:pt x="4712929" y="2413819"/>
+                  <a:pt x="5796116" y="2643239"/>
+                  <a:pt x="6184490" y="2743200"/>
+                </a:cubicBezTo>
+              </a:path>
+            </a:pathLst>
+          </a:custGeom>
+          <a:noFill/>
+          <a:ln w="44450"/>
+        </p:spPr>
+        <p:style>
+          <a:lnRef idx="2">
+            <a:schemeClr val="accent1">
+              <a:shade val="15000"/>
+            </a:schemeClr>
+          </a:lnRef>
+          <a:fillRef idx="1">
+            <a:schemeClr val="accent1"/>
+          </a:fillRef>
+          <a:effectRef idx="0">
+            <a:schemeClr val="accent1"/>
+          </a:effectRef>
+          <a:fontRef idx="minor">
+            <a:schemeClr val="lt1"/>
+          </a:fontRef>
+        </p:style>
+        <p:txBody>
+          <a:bodyPr rtlCol="0" anchor="ctr"/>
+          <a:lstStyle/>
+          <a:p>
+            <a:pPr algn="ctr"/>
+            <a:endParaRPr lang="en-NZ"/>
+          </a:p>
+        </p:txBody>
+      </p:sp>
+      <p:cxnSp>
+        <p:nvCxnSpPr>
+          <p:cNvPr id="9" name="Straight Connector 8">
+            <a:extLst>
+              <a:ext uri="{FF2B5EF4-FFF2-40B4-BE49-F238E27FC236}">
+                <a16:creationId xmlns:a16="http://schemas.microsoft.com/office/drawing/2014/main" id="{8D05AA7D-532D-CBD7-0417-D17A65CB60AF}"/>
+              </a:ext>
+            </a:extLst>
+          </p:cNvPr>
+          <p:cNvCxnSpPr>
+            <a:cxnSpLocks/>
+          </p:cNvCxnSpPr>
+          <p:nvPr/>
+        </p:nvCxnSpPr>
+        <p:spPr>
+          <a:xfrm>
+            <a:off x="1598792" y="5260258"/>
+            <a:ext cx="8994416" cy="0"/>
+          </a:xfrm>
+          <a:prstGeom prst="line">
+            <a:avLst/>
+          </a:prstGeom>
+          <a:ln w="101600" cap="rnd"/>
+        </p:spPr>
+        <p:style>
+          <a:lnRef idx="2">
+            <a:schemeClr val="accent1"/>
+          </a:lnRef>
+          <a:fillRef idx="0">
+            <a:schemeClr val="accent1"/>
+          </a:fillRef>
+          <a:effectRef idx="1">
+            <a:schemeClr val="accent1"/>
+          </a:effectRef>
+          <a:fontRef idx="minor">
+            <a:schemeClr val="tx1"/>
+          </a:fontRef>
+        </p:style>
+      </p:cxnSp>
+      <p:cxnSp>
+        <p:nvCxnSpPr>
+          <p:cNvPr id="11" name="Straight Connector 10">
+            <a:extLst>
+              <a:ext uri="{FF2B5EF4-FFF2-40B4-BE49-F238E27FC236}">
+                <a16:creationId xmlns:a16="http://schemas.microsoft.com/office/drawing/2014/main" id="{CE1C3465-36DB-CA64-2D18-B6F986E5E494}"/>
+              </a:ext>
+            </a:extLst>
+          </p:cNvPr>
+          <p:cNvCxnSpPr>
+            <a:cxnSpLocks/>
+          </p:cNvCxnSpPr>
+          <p:nvPr/>
+        </p:nvCxnSpPr>
+        <p:spPr>
+          <a:xfrm flipV="1">
+            <a:off x="6938758" y="1730477"/>
+            <a:ext cx="0" cy="3529781"/>
+          </a:xfrm>
+          <a:prstGeom prst="line">
+            <a:avLst/>
+          </a:prstGeom>
+          <a:ln w="101600" cap="rnd">
+            <a:prstDash val="sysDot"/>
+          </a:ln>
+        </p:spPr>
+        <p:style>
+          <a:lnRef idx="2">
+            <a:schemeClr val="accent1"/>
+          </a:lnRef>
+          <a:fillRef idx="0">
+            <a:schemeClr val="accent1"/>
+          </a:fillRef>
+          <a:effectRef idx="1">
+            <a:schemeClr val="accent1"/>
+          </a:effectRef>
+          <a:fontRef idx="minor">
+            <a:schemeClr val="tx1"/>
+          </a:fontRef>
+        </p:style>
+      </p:cxnSp>
+      <p:cxnSp>
+        <p:nvCxnSpPr>
+          <p:cNvPr id="14" name="Straight Connector 13">
+            <a:extLst>
+              <a:ext uri="{FF2B5EF4-FFF2-40B4-BE49-F238E27FC236}">
+                <a16:creationId xmlns:a16="http://schemas.microsoft.com/office/drawing/2014/main" id="{26D8B1D4-0854-E8EC-E7AF-7D6E8EB8ED98}"/>
+              </a:ext>
+            </a:extLst>
+          </p:cNvPr>
+          <p:cNvCxnSpPr>
+            <a:cxnSpLocks/>
+          </p:cNvCxnSpPr>
+          <p:nvPr/>
+        </p:nvCxnSpPr>
+        <p:spPr>
+          <a:xfrm flipV="1">
+            <a:off x="5336100" y="1730477"/>
+            <a:ext cx="0" cy="3529781"/>
+          </a:xfrm>
+          <a:prstGeom prst="line">
+            <a:avLst/>
+          </a:prstGeom>
+          <a:ln w="101600" cap="rnd">
+            <a:prstDash val="sysDot"/>
+          </a:ln>
+        </p:spPr>
+        <p:style>
+          <a:lnRef idx="2">
+            <a:schemeClr val="accent1"/>
+          </a:lnRef>
+          <a:fillRef idx="0">
+            <a:schemeClr val="accent1"/>
+          </a:fillRef>
+          <a:effectRef idx="1">
+            <a:schemeClr val="accent1"/>
+          </a:effectRef>
+          <a:fontRef idx="minor">
+            <a:schemeClr val="tx1"/>
+          </a:fontRef>
+        </p:style>
+      </p:cxnSp>
+      <p:cxnSp>
+        <p:nvCxnSpPr>
+          <p:cNvPr id="17" name="Straight Connector 16">
+            <a:extLst>
+              <a:ext uri="{FF2B5EF4-FFF2-40B4-BE49-F238E27FC236}">
+                <a16:creationId xmlns:a16="http://schemas.microsoft.com/office/drawing/2014/main" id="{CD84C7D9-EB53-EDF1-8B27-E7E22DF6A86E}"/>
+              </a:ext>
+            </a:extLst>
+          </p:cNvPr>
+          <p:cNvCxnSpPr>
+            <a:cxnSpLocks/>
+          </p:cNvCxnSpPr>
+          <p:nvPr/>
+        </p:nvCxnSpPr>
+        <p:spPr>
+          <a:xfrm flipV="1">
+            <a:off x="4028410" y="1730477"/>
+            <a:ext cx="0" cy="3529781"/>
+          </a:xfrm>
+          <a:prstGeom prst="line">
+            <a:avLst/>
+          </a:prstGeom>
+          <a:ln w="101600" cap="rnd">
+            <a:prstDash val="sysDot"/>
+          </a:ln>
+        </p:spPr>
+        <p:style>
+          <a:lnRef idx="2">
+            <a:schemeClr val="accent1"/>
+          </a:lnRef>
+          <a:fillRef idx="0">
+            <a:schemeClr val="accent1"/>
+          </a:fillRef>
+          <a:effectRef idx="1">
+            <a:schemeClr val="accent1"/>
+          </a:effectRef>
+          <a:fontRef idx="minor">
+            <a:schemeClr val="tx1"/>
+          </a:fontRef>
+        </p:style>
+      </p:cxnSp>
+      <p:cxnSp>
+        <p:nvCxnSpPr>
+          <p:cNvPr id="18" name="Straight Connector 17">
+            <a:extLst>
+              <a:ext uri="{FF2B5EF4-FFF2-40B4-BE49-F238E27FC236}">
+                <a16:creationId xmlns:a16="http://schemas.microsoft.com/office/drawing/2014/main" id="{231B0F37-9CA9-C5AA-54AF-ADDC9EBC3464}"/>
+              </a:ext>
+            </a:extLst>
+          </p:cNvPr>
+          <p:cNvCxnSpPr>
+            <a:cxnSpLocks/>
+          </p:cNvCxnSpPr>
+          <p:nvPr/>
+        </p:nvCxnSpPr>
+        <p:spPr>
+          <a:xfrm flipV="1">
+            <a:off x="8315274" y="1730477"/>
+            <a:ext cx="0" cy="3529781"/>
+          </a:xfrm>
+          <a:prstGeom prst="line">
+            <a:avLst/>
+          </a:prstGeom>
+          <a:ln w="101600" cap="rnd">
+            <a:prstDash val="sysDot"/>
+          </a:ln>
+        </p:spPr>
+        <p:style>
+          <a:lnRef idx="2">
+            <a:schemeClr val="accent1"/>
+          </a:lnRef>
+          <a:fillRef idx="0">
+            <a:schemeClr val="accent1"/>
+          </a:fillRef>
+          <a:effectRef idx="1">
+            <a:schemeClr val="accent1"/>
+          </a:effectRef>
+          <a:fontRef idx="minor">
+            <a:schemeClr val="tx1"/>
+          </a:fontRef>
+        </p:style>
+      </p:cxnSp>
+      <p:sp>
+        <p:nvSpPr>
+          <p:cNvPr id="20" name="Left Brace 19">
+            <a:extLst>
+              <a:ext uri="{FF2B5EF4-FFF2-40B4-BE49-F238E27FC236}">
+                <a16:creationId xmlns:a16="http://schemas.microsoft.com/office/drawing/2014/main" id="{A1CC3583-C8B3-999A-0DC1-43200F0227C3}"/>
+              </a:ext>
+            </a:extLst>
+          </p:cNvPr>
+          <p:cNvSpPr/>
+          <p:nvPr/>
+        </p:nvSpPr>
+        <p:spPr>
+          <a:xfrm rot="5400000">
+            <a:off x="6029423" y="794540"/>
+            <a:ext cx="206180" cy="1212820"/>
+          </a:xfrm>
+          <a:prstGeom prst="leftBrace">
+            <a:avLst/>
+          </a:prstGeom>
+          <a:ln w="50800">
+            <a:solidFill>
+              <a:schemeClr val="accent6">
+                <a:lumMod val="50000"/>
+              </a:schemeClr>
+            </a:solidFill>
+          </a:ln>
+        </p:spPr>
+        <p:style>
+          <a:lnRef idx="2">
+            <a:schemeClr val="accent1"/>
+          </a:lnRef>
+          <a:fillRef idx="0">
+            <a:schemeClr val="accent1"/>
+          </a:fillRef>
+          <a:effectRef idx="1">
+            <a:schemeClr val="accent1"/>
+          </a:effectRef>
+          <a:fontRef idx="minor">
+            <a:schemeClr val="tx1"/>
+          </a:fontRef>
+        </p:style>
+        <p:txBody>
+          <a:bodyPr rtlCol="0" anchor="ctr"/>
+          <a:lstStyle/>
+          <a:p>
+            <a:pPr algn="ctr"/>
+            <a:endParaRPr lang="en-NZ"/>
+          </a:p>
+        </p:txBody>
+      </p:sp>
+      <p:sp>
+        <p:nvSpPr>
+          <p:cNvPr id="21" name="Left Brace 20">
+            <a:extLst>
+              <a:ext uri="{FF2B5EF4-FFF2-40B4-BE49-F238E27FC236}">
+                <a16:creationId xmlns:a16="http://schemas.microsoft.com/office/drawing/2014/main" id="{01B6FA86-0585-7438-9B89-52F818DF3A5D}"/>
+              </a:ext>
+            </a:extLst>
+          </p:cNvPr>
+          <p:cNvSpPr/>
+          <p:nvPr/>
+        </p:nvSpPr>
+        <p:spPr>
+          <a:xfrm rot="5400000">
+            <a:off x="7514094" y="794540"/>
+            <a:ext cx="206180" cy="1212820"/>
+          </a:xfrm>
+          <a:prstGeom prst="leftBrace">
+            <a:avLst/>
+          </a:prstGeom>
+          <a:ln w="50800">
+            <a:solidFill>
+              <a:schemeClr val="accent6">
+                <a:lumMod val="60000"/>
+                <a:lumOff val="40000"/>
+              </a:schemeClr>
+            </a:solidFill>
+          </a:ln>
+        </p:spPr>
+        <p:style>
+          <a:lnRef idx="2">
+            <a:schemeClr val="accent1"/>
+          </a:lnRef>
+          <a:fillRef idx="0">
+            <a:schemeClr val="accent1"/>
+          </a:fillRef>
+          <a:effectRef idx="1">
+            <a:schemeClr val="accent1"/>
+          </a:effectRef>
+          <a:fontRef idx="minor">
+            <a:schemeClr val="tx1"/>
+          </a:fontRef>
+        </p:style>
+        <p:txBody>
+          <a:bodyPr rtlCol="0" anchor="ctr"/>
+          <a:lstStyle/>
+          <a:p>
+            <a:pPr algn="ctr"/>
+            <a:endParaRPr lang="en-NZ"/>
+          </a:p>
+        </p:txBody>
+      </p:sp>
+      <p:sp>
+        <p:nvSpPr>
+          <p:cNvPr id="22" name="Left Brace 21">
+            <a:extLst>
+              <a:ext uri="{FF2B5EF4-FFF2-40B4-BE49-F238E27FC236}">
+                <a16:creationId xmlns:a16="http://schemas.microsoft.com/office/drawing/2014/main" id="{079A9A19-35A7-CC53-7516-A8C830819062}"/>
+              </a:ext>
+            </a:extLst>
+          </p:cNvPr>
+          <p:cNvSpPr/>
+          <p:nvPr/>
+        </p:nvSpPr>
+        <p:spPr>
+          <a:xfrm rot="5400000">
+            <a:off x="8998765" y="794540"/>
+            <a:ext cx="206180" cy="1212820"/>
+          </a:xfrm>
+          <a:prstGeom prst="leftBrace">
+            <a:avLst/>
+          </a:prstGeom>
+          <a:ln w="50800">
+            <a:solidFill>
+              <a:schemeClr val="accent6">
+                <a:lumMod val="40000"/>
+                <a:lumOff val="60000"/>
+              </a:schemeClr>
+            </a:solidFill>
+          </a:ln>
+        </p:spPr>
+        <p:style>
+          <a:lnRef idx="2">
+            <a:schemeClr val="accent1"/>
+          </a:lnRef>
+          <a:fillRef idx="0">
+            <a:schemeClr val="accent1"/>
+          </a:fillRef>
+          <a:effectRef idx="1">
+            <a:schemeClr val="accent1"/>
+          </a:effectRef>
+          <a:fontRef idx="minor">
+            <a:schemeClr val="tx1"/>
+          </a:fontRef>
+        </p:style>
+        <p:txBody>
+          <a:bodyPr rtlCol="0" anchor="ctr"/>
+          <a:lstStyle/>
+          <a:p>
+            <a:pPr algn="ctr"/>
+            <a:endParaRPr lang="en-NZ"/>
+          </a:p>
+        </p:txBody>
+      </p:sp>
+      <p:sp>
+        <p:nvSpPr>
+          <p:cNvPr id="23" name="TextBox 22">
+            <a:extLst>
+              <a:ext uri="{FF2B5EF4-FFF2-40B4-BE49-F238E27FC236}">
+                <a16:creationId xmlns:a16="http://schemas.microsoft.com/office/drawing/2014/main" id="{C9BCBDB6-D775-EFB4-EE27-EE3CD682A75A}"/>
+              </a:ext>
+            </a:extLst>
+          </p:cNvPr>
+          <p:cNvSpPr txBox="1"/>
+          <p:nvPr/>
+        </p:nvSpPr>
+        <p:spPr>
+          <a:xfrm>
+            <a:off x="5716373" y="484233"/>
+            <a:ext cx="832279" cy="646331"/>
+          </a:xfrm>
+          <a:prstGeom prst="rect">
+            <a:avLst/>
+          </a:prstGeom>
+          <a:noFill/>
+        </p:spPr>
+        <p:txBody>
+          <a:bodyPr wrap="none" rtlCol="0">
+            <a:spAutoFit/>
+          </a:bodyPr>
+          <a:lstStyle/>
+          <a:p>
+            <a:pPr algn="ctr"/>
+            <a:r>
+              <a:rPr lang="en-NZ" dirty="0"/>
+              <a:t>Gene</a:t>
+            </a:r>
+          </a:p>
+          <a:p>
+            <a:pPr algn="ctr"/>
+            <a:r>
+              <a:rPr lang="en-NZ" dirty="0"/>
+              <a:t>mixing</a:t>
+            </a:r>
+          </a:p>
+        </p:txBody>
+      </p:sp>
+      <p:sp>
+        <p:nvSpPr>
+          <p:cNvPr id="24" name="TextBox 23">
+            <a:extLst>
+              <a:ext uri="{FF2B5EF4-FFF2-40B4-BE49-F238E27FC236}">
+                <a16:creationId xmlns:a16="http://schemas.microsoft.com/office/drawing/2014/main" id="{8CAFFE76-1EB0-DD5B-934F-A9321FD4580C}"/>
+              </a:ext>
+            </a:extLst>
+          </p:cNvPr>
+          <p:cNvSpPr txBox="1"/>
+          <p:nvPr/>
+        </p:nvSpPr>
+        <p:spPr>
+          <a:xfrm>
+            <a:off x="6960305" y="622732"/>
+            <a:ext cx="1313758" cy="369332"/>
+          </a:xfrm>
+          <a:prstGeom prst="rect">
+            <a:avLst/>
+          </a:prstGeom>
+          <a:noFill/>
+        </p:spPr>
+        <p:txBody>
+          <a:bodyPr wrap="none" rtlCol="0">
+            <a:spAutoFit/>
+          </a:bodyPr>
+          <a:lstStyle/>
+          <a:p>
+            <a:pPr algn="ctr"/>
+            <a:r>
+              <a:rPr lang="en-NZ" dirty="0"/>
+              <a:t>Asymmetry</a:t>
+            </a:r>
+          </a:p>
+        </p:txBody>
+      </p:sp>
+      <p:sp>
+        <p:nvSpPr>
+          <p:cNvPr id="25" name="TextBox 24">
+            <a:extLst>
+              <a:ext uri="{FF2B5EF4-FFF2-40B4-BE49-F238E27FC236}">
+                <a16:creationId xmlns:a16="http://schemas.microsoft.com/office/drawing/2014/main" id="{3C18217A-23FE-D985-9B11-9DA1D0A3A564}"/>
+              </a:ext>
+            </a:extLst>
+          </p:cNvPr>
+          <p:cNvSpPr txBox="1"/>
+          <p:nvPr/>
+        </p:nvSpPr>
+        <p:spPr>
+          <a:xfrm>
+            <a:off x="8607039" y="622732"/>
+            <a:ext cx="989631" cy="369332"/>
+          </a:xfrm>
+          <a:prstGeom prst="rect">
+            <a:avLst/>
+          </a:prstGeom>
+          <a:noFill/>
+        </p:spPr>
+        <p:txBody>
+          <a:bodyPr wrap="none" rtlCol="0">
+            <a:spAutoFit/>
+          </a:bodyPr>
+          <a:lstStyle/>
+          <a:p>
+            <a:pPr algn="ctr"/>
+            <a:r>
+              <a:rPr lang="en-NZ" dirty="0"/>
+              <a:t>Uniform</a:t>
+            </a:r>
+          </a:p>
+        </p:txBody>
+      </p:sp>
+    </p:spTree>
+    <p:extLst>
+      <p:ext uri="{BB962C8B-B14F-4D97-AF65-F5344CB8AC3E}">
+        <p14:creationId xmlns:p14="http://schemas.microsoft.com/office/powerpoint/2010/main" val="2703931877"/>
       </p:ext>
     </p:extLst>
   </p:cSld>
